--- a/docs/presentations/2026-10-20-saugomos-teritorijos/pymarxan_saugomos_teritorijos.pptx
+++ b/docs/presentations/2026-10-20-saugomos-teritorijos/pymarxan_saugomos_teritorijos.pptx
@@ -21,9 +21,10 @@
     <p:sldId id="269" r:id="rId15"/>
     <p:sldId id="270" r:id="rId16"/>
     <p:sldId id="271" r:id="rId17"/>
+    <p:sldId id="272" r:id="rId18"/>
   </p:sldIdLst>
   <p:notesMasterIdLst>
-    <p:notesMasterId r:id="rId18"/>
+    <p:notesMasterId r:id="rId19"/>
   </p:notesMasterIdLst>
   <p:sldSz cx="12192000" cy="6858000"/>
   <p:notesSz cx="6858000" cy="12192000"/>
@@ -122,40 +123,41 @@
   <p:extLst>
     <p:ext uri="{521415D9-36F7-43E2-AB2F-B90AF26B5E84}">
       <p14:sectionLst xmlns:p14="http://schemas.microsoft.com/office/powerpoint/2010/main">
-        <p14:section name="Įvadas" id="{be174cf2-52b4-92e1-4850-a80da2cc1c72}">
+        <p14:section name="Įvadas" id="{0ca98c39-fa65-bf9e-7beb-510419fe4bd6}">
           <p14:sldIdLst>
             <p14:sldId id="256"/>
             <p14:sldId id="257"/>
             <p14:sldId id="258"/>
           </p14:sldIdLst>
         </p14:section>
-        <p14:section name="Būklė ir galimybės" id="{2748b48f-01f3-ad32-77b6-dc6306b50c35}">
+        <p14:section name="Būklė ir galimybės" id="{ce024f98-eacb-0914-2f6e-c95f3ce9f430}">
           <p14:sldIdLst>
             <p14:sldId id="259"/>
             <p14:sldId id="260"/>
           </p14:sldIdLst>
         </p14:section>
-        <p14:section name="Taikymas" id="{e1080efd-4853-3c45-74e3-7fa3aad3fba0}">
+        <p14:section name="Taikymas" id="{3c605e1d-6574-0fe6-e5b0-047c44740170}">
           <p14:sldIdLst>
             <p14:sldId id="261"/>
             <p14:sldId id="262"/>
             <p14:sldId id="263"/>
             <p14:sldId id="264"/>
             <p14:sldId id="265"/>
+            <p14:sldId id="266"/>
           </p14:sldIdLst>
         </p14:section>
-        <p14:section name="Neišplėtotos galimybės" id="{3b3014e9-4ed8-aa5c-02f9-096143bd2ff8}">
+        <p14:section name="Neišplėtotos galimybės" id="{05d6923b-8679-f082-119f-21e3fb282ba4}">
           <p14:sldIdLst>
-            <p14:sldId id="266"/>
             <p14:sldId id="267"/>
             <p14:sldId id="268"/>
+            <p14:sldId id="269"/>
           </p14:sldIdLst>
         </p14:section>
-        <p14:section name="Toliau" id="{81540473-a26f-8eab-45ef-ac8331cac367}">
+        <p14:section name="Toliau" id="{a8cea322-522c-a39c-5fc7-190aed419c3c}">
           <p14:sldIdLst>
-            <p14:sldId id="269"/>
             <p14:sldId id="270"/>
             <p14:sldId id="271"/>
+            <p14:sldId id="272"/>
           </p14:sldIdLst>
         </p14:section>
       </p14:sectionLst>
@@ -1036,7 +1038,7 @@
           <a:p>
             <a:r>
               <a:rPr lang="en-US" dirty="0"/>
-              <a:t>Administracijai svarbiausia – ar rezultatais galima remtis. Turime keturis patikimumo sluoksnius: uždavinį su žinomu teisingu atsakymu, atitikimą originaliam Marxan kodui, tūkstančius automatinių testų ir galimybę gauti įrodytą optimumą. Pastarasis turi ir praktinę vertę – Kuršių marių pavyzdyje tas pats tikslas pasiekiamas 24 % pigiau.</a:t>
+              <a:t>Darbuotojui nereikia programuoti: viskas vyksta internetinėje programoje naršyklėje. Įkeliami duomenys, nustatomi tikslai, paleidžiamas skaičiavimas, palyginamos alternatyvos ir eksportuojami rezultatai. Dešinėje – programos upių skiltis: biudžetas, rezultatas ir jungtumo kreivė. Analitikai tą pačią logiką gali naudoti per Python, kad analizę būtų galima pakartoti ir dokumentuoti.</a:t>
             </a:r>
             <a:endParaRPr lang="en-US" dirty="0"/>
           </a:p>
@@ -1124,7 +1126,7 @@
           <a:p>
             <a:r>
               <a:rPr lang="en-US" dirty="0"/>
-              <a:t>Dabar – apie tai, ko dar nėra. Tai svarbiausia šio pristatymo dalis, nes būtent čia jūsų poreikiai turėtų nulemti tolesnio kūrimo prioritetus. Suskirsčiau trūkumus į dvi grupes: diegimą ir kasdienį naudojimą bei analitines galimybes.</a:t>
+              <a:t>Administracijai svarbiausia – ar rezultatais galima remtis. Turime keturis patikimumo sluoksnius: uždavinį su žinomu teisingu atsakymu, atitikimą originaliam Marxan kodui, tūkstančius automatinių testų ir galimybę gauti įrodytą optimumą. Pastarasis turi ir praktinę vertę – Kuršių marių pavyzdyje tas pats tikslas pasiekiamas 24 % pigiau.</a:t>
             </a:r>
             <a:endParaRPr lang="en-US" dirty="0"/>
           </a:p>
@@ -1212,7 +1214,7 @@
           <a:p>
             <a:r>
               <a:rPr lang="en-US" dirty="0"/>
-              <a:t>Pirmoji grupė – tai, kas trukdo įrankį naudoti be programuotojo. Įdiegimas kol kas reikalauja techninių žinių. Sąsaja angliška. Nėra naudotojų paskyrų ir projektų dalijimosi. Kai kurios galimybės, pavyzdžiui, kitokio tikslo pasirinkimas – kai norime ne pigiausio tinklo, o daugiausia apsaugos už fiksuotą biudžetą – jau veikia programiniame branduolyje, bet dar neprijungtos prie internetinės programos.</a:t>
+              <a:t>Dabar – apie tai, ko dar nėra. Tai svarbiausia šio pristatymo dalis, nes būtent čia jūsų poreikiai turėtų nulemti tolesnio kūrimo prioritetus. Suskirsčiau trūkumus į dvi grupes: diegimą ir kasdienį naudojimą bei analitines galimybes.</a:t>
             </a:r>
             <a:endParaRPr lang="en-US" dirty="0"/>
           </a:p>
@@ -1300,7 +1302,7 @@
           <a:p>
             <a:r>
               <a:rPr lang="en-US" dirty="0"/>
-              <a:t>Antroji grupė – analitinės galimybės. Artimiausias darbas – buveinės praradimo rizika: jau suprojektuota ir planuojama kitoje versijoje. Zonavimo uždaviniuose rizika dar nevertinama. Atkūrimo planavimui yra tik greitas apytikslis algoritmas ir vienas suskaidymo rodiklis; trūksta tinklo jungtumo indeksų ir buveinių būklių modelio. Taip pat yra eilė smulkesnių patobulinimų. Kurie iš jų jums svarbiausi – būtent tai norėtume išgirsti.</a:t>
+              <a:t>Pirmoji grupė – tai, kas trukdo įrankį naudoti be programuotojo. Įdiegimas kol kas reikalauja techninių žinių. Sąsaja angliška. Nėra naudotojų paskyrų ir projektų dalijimosi. Kai kurios galimybės, pavyzdžiui, kitokio tikslo pasirinkimas – kai norime ne pigiausio tinklo, o daugiausia apsaugos už fiksuotą biudžetą – jau veikia programiniame branduolyje, bet dar neprijungtos prie internetinės programos.</a:t>
             </a:r>
             <a:endParaRPr lang="en-US" dirty="0"/>
           </a:p>
@@ -1388,7 +1390,7 @@
           <a:p>
             <a:r>
               <a:rPr lang="en-US" dirty="0"/>
-              <a:t>Trys žingsniai. Pirmasis jau suplanuotas – buveinės praradimo rizika kitoje versijoje. Antrasis – padaryti įrankį prieinamą be programuotojo: standartinis paketas, lietuviška sąsaja, visų galimybių prijungimas prie internetinės programos. Trečiasis priklauso nuo jūsų – bandomasis projektas vienoje saugomoje teritorijoje, kuris parodytų, ko iš tikrųjų reikia.</a:t>
+              <a:t>Antroji grupė – analitinės galimybės. Artimiausias darbas – buveinės praradimo rizika: jau suprojektuota ir planuojama kitoje versijoje. Zonavimo uždaviniuose rizika dar nevertinama. Atkūrimo planavimui yra tik greitas apytikslis algoritmas ir vienas suskaidymo rodiklis; trūksta tinklo jungtumo indeksų ir buveinių būklių modelio. Taip pat yra eilė smulkesnių patobulinimų. Kurie iš jų jums svarbiausi – būtent tai norėtume išgirsti.</a:t>
             </a:r>
             <a:endParaRPr lang="en-US" dirty="0"/>
           </a:p>
@@ -1476,7 +1478,7 @@
           <a:p>
             <a:r>
               <a:rPr lang="en-US" dirty="0"/>
-              <a:t>Bandomajam projektui reikėtų keturių dalykų: duomenų apie saugotinas vertybes, sąnaudų ar spaudimo sluoksnių, galiojančių taisyklių ir – svarbiausia – vieno realaus klausimo. Rezultatas – ne vienas „teisingas“ žemėlapis, o skaidrus ir pakartojamas planas su alternatyvomis, kurį galima aptarti su suinteresuotomis šalimis.</a:t>
+              <a:t>Trys žingsniai. Pirmasis jau suplanuotas – buveinės praradimo rizika kitoje versijoje. Antrasis – padaryti įrankį prieinamą be programuotojo: standartinis paketas, lietuviška sąsaja, visų galimybių prijungimas prie internetinės programos. Trečiasis priklauso nuo jūsų – bandomasis projektas vienoje saugomoje teritorijoje, kuris parodytų, ko iš tikrųjų reikia.</a:t>
             </a:r>
             <a:endParaRPr lang="en-US" dirty="0"/>
           </a:p>
@@ -1564,7 +1566,7 @@
           <a:p>
             <a:r>
               <a:rPr lang="en-US" dirty="0"/>
-              <a:t>Ačiū. Labiausiai norėčiau išgirsti, kurie iš neišplėtotų dalykų jums būtų svarbiausi, ir ar yra teritorija, kurioje galėtume atlikti bandomąjį projektą.</a:t>
+              <a:t>Bandomajam projektui reikėtų keturių dalykų: duomenų apie saugotinas vertybes, sąnaudų ar spaudimo sluoksnių, galiojančių taisyklių ir – svarbiausia – vieno realaus klausimo. Rezultatas – ne vienas „teisingas“ žemėlapis, o skaidrus ir pakartojamas planas su alternatyvomis, kurį galima aptarti su suinteresuotomis šalimis.</a:t>
             </a:r>
             <a:endParaRPr lang="en-US" dirty="0"/>
           </a:p>
@@ -1588,6 +1590,94 @@
             <a:fld id="{F7021451-1387-4CA6-816F-3879F97B5CBC}" type="slidenum">
               <a:rPr lang="en-US"/>
               <a:t>16</a:t>
+            </a:fld>
+            <a:endParaRPr lang="en-US"/>
+          </a:p>
+        </p:txBody>
+      </p:sp>
+    </p:spTree>
+    <p:extLst>
+      <p:ext uri="{BB962C8B-B14F-4D97-AF65-F5344CB8AC3E}">
+        <p14:creationId xmlns:p14="http://schemas.microsoft.com/office/powerpoint/2010/main" val="1024086991"/>
+      </p:ext>
+    </p:extLst>
+  </p:cSld>
+  <p:clrMapOvr>
+    <a:masterClrMapping/>
+  </p:clrMapOvr>
+</p:notes>
+</file>
+
+<file path=ppt/notesSlides/notesSlide17.xml><?xml version="1.0" encoding="utf-8"?>
+<p:notes xmlns:a="http://schemas.openxmlformats.org/drawingml/2006/main" xmlns:r="http://schemas.openxmlformats.org/officeDocument/2006/relationships" xmlns:p="http://schemas.openxmlformats.org/presentationml/2006/main">
+  <p:cSld>
+    <p:spTree>
+      <p:nvGrpSpPr>
+        <p:cNvPr id="1" name=""/>
+        <p:cNvGrpSpPr/>
+        <p:nvPr/>
+      </p:nvGrpSpPr>
+      <p:grpSpPr>
+        <a:xfrm>
+          <a:off x="0" y="0"/>
+          <a:ext cx="0" cy="0"/>
+          <a:chOff x="0" y="0"/>
+          <a:chExt cx="0" cy="0"/>
+        </a:xfrm>
+      </p:grpSpPr>
+      <p:sp>
+        <p:nvSpPr>
+          <p:cNvPr id="2" name="Slide Image Placeholder 1"/>
+          <p:cNvSpPr>
+            <a:spLocks noGrp="1" noRot="1" noChangeAspect="1"/>
+          </p:cNvSpPr>
+          <p:nvPr>
+            <p:ph type="sldImg"/>
+          </p:nvPr>
+        </p:nvSpPr>
+        <p:spPr/>
+      </p:sp>
+      <p:sp>
+        <p:nvSpPr>
+          <p:cNvPr id="3" name="Notes Placeholder 2"/>
+          <p:cNvSpPr>
+            <a:spLocks noGrp="1"/>
+          </p:cNvSpPr>
+          <p:nvPr>
+            <p:ph type="body" idx="1"/>
+          </p:nvPr>
+        </p:nvSpPr>
+        <p:spPr/>
+        <p:txBody>
+          <a:bodyPr/>
+          <a:lstStyle/>
+          <a:p>
+            <a:r>
+              <a:rPr lang="en-US" dirty="0"/>
+              <a:t>Ačiū. Labiausiai norėčiau išgirsti, kurie iš neišplėtotų dalykų jums būtų svarbiausi, ir ar yra teritorija, kurioje galėtume atlikti bandomąjį projektą.</a:t>
+            </a:r>
+            <a:endParaRPr lang="en-US" dirty="0"/>
+          </a:p>
+        </p:txBody>
+      </p:sp>
+      <p:sp>
+        <p:nvSpPr>
+          <p:cNvPr id="4" name="Slide Number Placeholder 3"/>
+          <p:cNvSpPr>
+            <a:spLocks noGrp="1"/>
+          </p:cNvSpPr>
+          <p:nvPr>
+            <p:ph type="sldNum" sz="quarter" idx="10"/>
+          </p:nvPr>
+        </p:nvSpPr>
+        <p:spPr/>
+        <p:txBody>
+          <a:bodyPr/>
+          <a:lstStyle/>
+          <a:p>
+            <a:fld id="{F7021451-1387-4CA6-816F-3879F97B5CBC}" type="slidenum">
+              <a:rPr lang="en-US"/>
+              <a:t>17</a:t>
             </a:fld>
             <a:endParaRPr lang="en-US"/>
           </a:p>
@@ -2180,7 +2270,7 @@
           <a:p>
             <a:r>
               <a:rPr lang="en-US" dirty="0"/>
-              <a:t>Upių modulis atsako į klausimą, kurias užtvankas, slenksčius ar pralaidas šalinti pirmiausia. Kairėje – tinklas prieš ir po optimizavimo, dešinėje – kreivė, rodanti, kiek jungtumo padidėja didinant biudžetą. Tai padeda pagrįsti, kodėl verta investuoti būtent į tam tikrus objektus, ir parodyti, kur papildomos lėšos duoda mažai naudos.</a:t>
+              <a:t>Antras pavyzdys iš mūsų regiono – nendrynai Kuršių nerijos marių pakrantėje. Čia uždavinys priešingas klasikiniam Marxan: nendrynų biologinei įvairovei reikia ne vientisų plotų, o mozaikos, kurioje pjaunami ir nepjaunami ruožai kaitaliojasi. Pakrantę nuo Smiltynės iki sienos padalijome į 52 vieno kilometro ruožus; kiekvienas šį sezoną arba pjaunamas, arba paliekamas. Senos nendrės buveinė skaičiuojama tik nepjautuose ruožuose, jaunos nendrės mozaikos buveinė – tik pjautuose. Viršutinė juosta – pigiausias planas: pjaunama keliais ištisais blokais prie gyvenviečių. Apatinė – kai kiekviena pjauto ir nepjauto ruožo riba gauna premiją: ribų padaugėja nuo 7 iki 31, o ilgiausias vientisas nepjautas ruožas sutrumpėja nuo 15 iki 9 km. Tai kainuoja apie 12,6 tūkst. eurų daugiau. Premijos dydis – valdymo sprendimas: programa parodo, kiek kainuoja kiekviena papildoma riba. Duomenys sintetiniai, gyvenviečių padėtis apytikslė.</a:t>
             </a:r>
             <a:endParaRPr lang="en-US" dirty="0"/>
           </a:p>
@@ -2268,7 +2358,7 @@
           <a:p>
             <a:r>
               <a:rPr lang="en-US" dirty="0"/>
-              <a:t>Darbuotojui nereikia programuoti: viskas vyksta internetinėje programoje naršyklėje. Įkeliami duomenys, nustatomi tikslai, paleidžiamas skaičiavimas, palyginamos alternatyvos ir eksportuojami rezultatai. Dešinėje – programos upių skiltis: biudžetas, rezultatas ir jungtumo kreivė. Analitikai tą pačią logiką gali naudoti per Python, kad analizę būtų galima pakartoti ir dokumentuoti.</a:t>
+              <a:t>Upių modulis atsako į klausimą, kurias užtvankas, slenksčius ar pralaidas šalinti pirmiausia. Kairėje – tinklas prieš ir po optimizavimo, dešinėje – kreivė, rodanti, kiek jungtumo padidėja didinant biudžetą. Tai padeda pagrįsti, kodėl verta investuoti būtent į tam tikrus objektus, ir parodyti, kur papildomos lėšos duoda mažai naudos.</a:t>
             </a:r>
             <a:endParaRPr lang="en-US" dirty="0"/>
           </a:p>
@@ -3305,7 +3395,7 @@
                 <a:ea typeface="Cambria" pitchFamily="34" charset="-122"/>
                 <a:cs typeface="Cambria" pitchFamily="34" charset="-120"/>
               </a:rPr>
-              <a:t>Ar galima pasitikėti rezultatais?</a:t>
+              <a:t>Kaip tai atrodytų darbe</a:t>
             </a:r>
             <a:endParaRPr lang="en-US" sz="3200" dirty="0"/>
           </a:p>
@@ -3313,27 +3403,525 @@
       </p:sp>
       <p:sp>
         <p:nvSpPr>
-          <p:cNvPr id="3" name="trust-0-circle"/>
-          <p:cNvSpPr/>
-          <p:nvPr/>
-        </p:nvSpPr>
-        <p:spPr>
-          <a:xfrm>
-            <a:off x="548640" y="1371600"/>
-            <a:ext cx="685800" cy="685800"/>
+          <p:cNvPr id="3" name="wf-num-0"/>
+          <p:cNvSpPr/>
+          <p:nvPr/>
+        </p:nvSpPr>
+        <p:spPr>
+          <a:xfrm>
+            <a:off x="548640" y="1417320"/>
+            <a:ext cx="548640" cy="548640"/>
           </a:xfrm>
           <a:prstGeom prst="ellipse">
             <a:avLst/>
           </a:prstGeom>
           <a:solidFill>
             <a:schemeClr val="accent1"/>
+          </a:solidFill>
+          <a:ln/>
+        </p:spPr>
+      </p:sp>
+      <p:sp>
+        <p:nvSpPr>
+          <p:cNvPr id="4" name="Text 2"/>
+          <p:cNvSpPr txBox="1"/>
+          <p:nvPr/>
+        </p:nvSpPr>
+        <p:spPr>
+          <a:xfrm>
+            <a:off x="548640" y="1417320"/>
+            <a:ext cx="548640" cy="548640"/>
+          </a:xfrm>
+          <a:prstGeom prst="rect">
+            <a:avLst/>
+          </a:prstGeom>
+          <a:noFill/>
+          <a:ln/>
+        </p:spPr>
+        <p:txBody>
+          <a:bodyPr wrap="square" lIns="0" tIns="0" rIns="0" bIns="0" rtlCol="0" anchor="ctr"/>
+          <a:lstStyle/>
+          <a:p>
+            <a:pPr algn="ctr" indent="0" marL="0">
+              <a:buNone/>
+            </a:pPr>
+            <a:r>
+              <a:rPr lang="en-US" sz="1800" b="1" dirty="0">
+                <a:solidFill>
+                  <a:schemeClr val="bg1"/>
+                </a:solidFill>
+              </a:rPr>
+              <a:t>1</a:t>
+            </a:r>
+            <a:endParaRPr lang="en-US" sz="1800" dirty="0"/>
+          </a:p>
+        </p:txBody>
+      </p:sp>
+      <p:sp>
+        <p:nvSpPr>
+          <p:cNvPr id="5" name="Text 3"/>
+          <p:cNvSpPr txBox="1"/>
+          <p:nvPr/>
+        </p:nvSpPr>
+        <p:spPr>
+          <a:xfrm>
+            <a:off x="1325880" y="1417320"/>
+            <a:ext cx="4846320" cy="548640"/>
+          </a:xfrm>
+          <a:prstGeom prst="rect">
+            <a:avLst/>
+          </a:prstGeom>
+          <a:noFill/>
+          <a:ln/>
+        </p:spPr>
+        <p:txBody>
+          <a:bodyPr wrap="square" lIns="0" tIns="0" rIns="0" bIns="0" rtlCol="0" anchor="ctr"/>
+          <a:lstStyle/>
+          <a:p>
+            <a:pPr indent="0" marL="0">
+              <a:buNone/>
+            </a:pPr>
+            <a:r>
+              <a:rPr lang="en-US" sz="1600" dirty="0">
+                <a:solidFill>
+                  <a:schemeClr val="tx1"/>
+                </a:solidFill>
+              </a:rPr>
+              <a:t>Įkelti duomenis: Marxan failai, rastrai, GIS sluoksniai</a:t>
+            </a:r>
+            <a:endParaRPr lang="en-US" sz="1600" dirty="0"/>
+          </a:p>
+        </p:txBody>
+      </p:sp>
+      <p:sp>
+        <p:nvSpPr>
+          <p:cNvPr id="6" name="wf-num-1"/>
+          <p:cNvSpPr/>
+          <p:nvPr/>
+        </p:nvSpPr>
+        <p:spPr>
+          <a:xfrm>
+            <a:off x="548640" y="2286000"/>
+            <a:ext cx="548640" cy="548640"/>
+          </a:xfrm>
+          <a:prstGeom prst="ellipse">
+            <a:avLst/>
+          </a:prstGeom>
+          <a:solidFill>
+            <a:schemeClr val="accent1"/>
+          </a:solidFill>
+          <a:ln/>
+        </p:spPr>
+      </p:sp>
+      <p:sp>
+        <p:nvSpPr>
+          <p:cNvPr id="7" name="Text 5"/>
+          <p:cNvSpPr txBox="1"/>
+          <p:nvPr/>
+        </p:nvSpPr>
+        <p:spPr>
+          <a:xfrm>
+            <a:off x="548640" y="2286000"/>
+            <a:ext cx="548640" cy="548640"/>
+          </a:xfrm>
+          <a:prstGeom prst="rect">
+            <a:avLst/>
+          </a:prstGeom>
+          <a:noFill/>
+          <a:ln/>
+        </p:spPr>
+        <p:txBody>
+          <a:bodyPr wrap="square" lIns="0" tIns="0" rIns="0" bIns="0" rtlCol="0" anchor="ctr"/>
+          <a:lstStyle/>
+          <a:p>
+            <a:pPr algn="ctr" indent="0" marL="0">
+              <a:buNone/>
+            </a:pPr>
+            <a:r>
+              <a:rPr lang="en-US" sz="1800" b="1" dirty="0">
+                <a:solidFill>
+                  <a:schemeClr val="bg1"/>
+                </a:solidFill>
+              </a:rPr>
+              <a:t>2</a:t>
+            </a:r>
+            <a:endParaRPr lang="en-US" sz="1800" dirty="0"/>
+          </a:p>
+        </p:txBody>
+      </p:sp>
+      <p:sp>
+        <p:nvSpPr>
+          <p:cNvPr id="8" name="Text 6"/>
+          <p:cNvSpPr txBox="1"/>
+          <p:nvPr/>
+        </p:nvSpPr>
+        <p:spPr>
+          <a:xfrm>
+            <a:off x="1325880" y="2286000"/>
+            <a:ext cx="4846320" cy="548640"/>
+          </a:xfrm>
+          <a:prstGeom prst="rect">
+            <a:avLst/>
+          </a:prstGeom>
+          <a:noFill/>
+          <a:ln/>
+        </p:spPr>
+        <p:txBody>
+          <a:bodyPr wrap="square" lIns="0" tIns="0" rIns="0" bIns="0" rtlCol="0" anchor="ctr"/>
+          <a:lstStyle/>
+          <a:p>
+            <a:pPr indent="0" marL="0">
+              <a:buNone/>
+            </a:pPr>
+            <a:r>
+              <a:rPr lang="en-US" sz="1600" dirty="0">
+                <a:solidFill>
+                  <a:schemeClr val="tx1"/>
+                </a:solidFill>
+              </a:rPr>
+              <a:t>Nustatyti tikslus ir esamas saugomas teritorijas</a:t>
+            </a:r>
+            <a:endParaRPr lang="en-US" sz="1600" dirty="0"/>
+          </a:p>
+        </p:txBody>
+      </p:sp>
+      <p:sp>
+        <p:nvSpPr>
+          <p:cNvPr id="9" name="wf-num-2"/>
+          <p:cNvSpPr/>
+          <p:nvPr/>
+        </p:nvSpPr>
+        <p:spPr>
+          <a:xfrm>
+            <a:off x="548640" y="3154680"/>
+            <a:ext cx="548640" cy="548640"/>
+          </a:xfrm>
+          <a:prstGeom prst="ellipse">
+            <a:avLst/>
+          </a:prstGeom>
+          <a:solidFill>
+            <a:schemeClr val="accent1"/>
+          </a:solidFill>
+          <a:ln/>
+        </p:spPr>
+      </p:sp>
+      <p:sp>
+        <p:nvSpPr>
+          <p:cNvPr id="10" name="Text 8"/>
+          <p:cNvSpPr txBox="1"/>
+          <p:nvPr/>
+        </p:nvSpPr>
+        <p:spPr>
+          <a:xfrm>
+            <a:off x="548640" y="3154680"/>
+            <a:ext cx="548640" cy="548640"/>
+          </a:xfrm>
+          <a:prstGeom prst="rect">
+            <a:avLst/>
+          </a:prstGeom>
+          <a:noFill/>
+          <a:ln/>
+        </p:spPr>
+        <p:txBody>
+          <a:bodyPr wrap="square" lIns="0" tIns="0" rIns="0" bIns="0" rtlCol="0" anchor="ctr"/>
+          <a:lstStyle/>
+          <a:p>
+            <a:pPr algn="ctr" indent="0" marL="0">
+              <a:buNone/>
+            </a:pPr>
+            <a:r>
+              <a:rPr lang="en-US" sz="1800" b="1" dirty="0">
+                <a:solidFill>
+                  <a:schemeClr val="bg1"/>
+                </a:solidFill>
+              </a:rPr>
+              <a:t>3</a:t>
+            </a:r>
+            <a:endParaRPr lang="en-US" sz="1800" dirty="0"/>
+          </a:p>
+        </p:txBody>
+      </p:sp>
+      <p:sp>
+        <p:nvSpPr>
+          <p:cNvPr id="11" name="Text 9"/>
+          <p:cNvSpPr txBox="1"/>
+          <p:nvPr/>
+        </p:nvSpPr>
+        <p:spPr>
+          <a:xfrm>
+            <a:off x="1325880" y="3154680"/>
+            <a:ext cx="4846320" cy="548640"/>
+          </a:xfrm>
+          <a:prstGeom prst="rect">
+            <a:avLst/>
+          </a:prstGeom>
+          <a:noFill/>
+          <a:ln/>
+        </p:spPr>
+        <p:txBody>
+          <a:bodyPr wrap="square" lIns="0" tIns="0" rIns="0" bIns="0" rtlCol="0" anchor="ctr"/>
+          <a:lstStyle/>
+          <a:p>
+            <a:pPr indent="0" marL="0">
+              <a:buNone/>
+            </a:pPr>
+            <a:r>
+              <a:rPr lang="en-US" sz="1600" dirty="0">
+                <a:solidFill>
+                  <a:schemeClr val="tx1"/>
+                </a:solidFill>
+              </a:rPr>
+              <a:t>Paleisti skaičiavimą internetinėje programoje</a:t>
+            </a:r>
+            <a:endParaRPr lang="en-US" sz="1600" dirty="0"/>
+          </a:p>
+        </p:txBody>
+      </p:sp>
+      <p:sp>
+        <p:nvSpPr>
+          <p:cNvPr id="12" name="wf-num-3"/>
+          <p:cNvSpPr/>
+          <p:nvPr/>
+        </p:nvSpPr>
+        <p:spPr>
+          <a:xfrm>
+            <a:off x="548640" y="4023360"/>
+            <a:ext cx="548640" cy="548640"/>
+          </a:xfrm>
+          <a:prstGeom prst="ellipse">
+            <a:avLst/>
+          </a:prstGeom>
+          <a:solidFill>
+            <a:schemeClr val="accent1"/>
+          </a:solidFill>
+          <a:ln/>
+        </p:spPr>
+      </p:sp>
+      <p:sp>
+        <p:nvSpPr>
+          <p:cNvPr id="13" name="Text 11"/>
+          <p:cNvSpPr txBox="1"/>
+          <p:nvPr/>
+        </p:nvSpPr>
+        <p:spPr>
+          <a:xfrm>
+            <a:off x="548640" y="4023360"/>
+            <a:ext cx="548640" cy="548640"/>
+          </a:xfrm>
+          <a:prstGeom prst="rect">
+            <a:avLst/>
+          </a:prstGeom>
+          <a:noFill/>
+          <a:ln/>
+        </p:spPr>
+        <p:txBody>
+          <a:bodyPr wrap="square" lIns="0" tIns="0" rIns="0" bIns="0" rtlCol="0" anchor="ctr"/>
+          <a:lstStyle/>
+          <a:p>
+            <a:pPr algn="ctr" indent="0" marL="0">
+              <a:buNone/>
+            </a:pPr>
+            <a:r>
+              <a:rPr lang="en-US" sz="1800" b="1" dirty="0">
+                <a:solidFill>
+                  <a:schemeClr val="bg1"/>
+                </a:solidFill>
+              </a:rPr>
+              <a:t>4</a:t>
+            </a:r>
+            <a:endParaRPr lang="en-US" sz="1800" dirty="0"/>
+          </a:p>
+        </p:txBody>
+      </p:sp>
+      <p:sp>
+        <p:nvSpPr>
+          <p:cNvPr id="14" name="Text 12"/>
+          <p:cNvSpPr txBox="1"/>
+          <p:nvPr/>
+        </p:nvSpPr>
+        <p:spPr>
+          <a:xfrm>
+            <a:off x="1325880" y="4023360"/>
+            <a:ext cx="4846320" cy="548640"/>
+          </a:xfrm>
+          <a:prstGeom prst="rect">
+            <a:avLst/>
+          </a:prstGeom>
+          <a:noFill/>
+          <a:ln/>
+        </p:spPr>
+        <p:txBody>
+          <a:bodyPr wrap="square" lIns="0" tIns="0" rIns="0" bIns="0" rtlCol="0" anchor="ctr"/>
+          <a:lstStyle/>
+          <a:p>
+            <a:pPr indent="0" marL="0">
+              <a:buNone/>
+            </a:pPr>
+            <a:r>
+              <a:rPr lang="en-US" sz="1600" dirty="0">
+                <a:solidFill>
+                  <a:schemeClr val="tx1"/>
+                </a:solidFill>
+              </a:rPr>
+              <a:t>Palyginti alternatyvas ir scenarijus</a:t>
+            </a:r>
+            <a:endParaRPr lang="en-US" sz="1600" dirty="0"/>
+          </a:p>
+        </p:txBody>
+      </p:sp>
+      <p:sp>
+        <p:nvSpPr>
+          <p:cNvPr id="15" name="wf-num-4"/>
+          <p:cNvSpPr/>
+          <p:nvPr/>
+        </p:nvSpPr>
+        <p:spPr>
+          <a:xfrm>
+            <a:off x="548640" y="4892040"/>
+            <a:ext cx="548640" cy="548640"/>
+          </a:xfrm>
+          <a:prstGeom prst="ellipse">
+            <a:avLst/>
+          </a:prstGeom>
+          <a:solidFill>
+            <a:schemeClr val="accent1"/>
+          </a:solidFill>
+          <a:ln/>
+        </p:spPr>
+      </p:sp>
+      <p:sp>
+        <p:nvSpPr>
+          <p:cNvPr id="16" name="Text 14"/>
+          <p:cNvSpPr txBox="1"/>
+          <p:nvPr/>
+        </p:nvSpPr>
+        <p:spPr>
+          <a:xfrm>
+            <a:off x="548640" y="4892040"/>
+            <a:ext cx="548640" cy="548640"/>
+          </a:xfrm>
+          <a:prstGeom prst="rect">
+            <a:avLst/>
+          </a:prstGeom>
+          <a:noFill/>
+          <a:ln/>
+        </p:spPr>
+        <p:txBody>
+          <a:bodyPr wrap="square" lIns="0" tIns="0" rIns="0" bIns="0" rtlCol="0" anchor="ctr"/>
+          <a:lstStyle/>
+          <a:p>
+            <a:pPr algn="ctr" indent="0" marL="0">
+              <a:buNone/>
+            </a:pPr>
+            <a:r>
+              <a:rPr lang="en-US" sz="1800" b="1" dirty="0">
+                <a:solidFill>
+                  <a:schemeClr val="bg1"/>
+                </a:solidFill>
+              </a:rPr>
+              <a:t>5</a:t>
+            </a:r>
+            <a:endParaRPr lang="en-US" sz="1800" dirty="0"/>
+          </a:p>
+        </p:txBody>
+      </p:sp>
+      <p:sp>
+        <p:nvSpPr>
+          <p:cNvPr id="17" name="Text 15"/>
+          <p:cNvSpPr txBox="1"/>
+          <p:nvPr/>
+        </p:nvSpPr>
+        <p:spPr>
+          <a:xfrm>
+            <a:off x="1325880" y="4892040"/>
+            <a:ext cx="4846320" cy="548640"/>
+          </a:xfrm>
+          <a:prstGeom prst="rect">
+            <a:avLst/>
+          </a:prstGeom>
+          <a:noFill/>
+          <a:ln/>
+        </p:spPr>
+        <p:txBody>
+          <a:bodyPr wrap="square" lIns="0" tIns="0" rIns="0" bIns="0" rtlCol="0" anchor="ctr"/>
+          <a:lstStyle/>
+          <a:p>
+            <a:pPr indent="0" marL="0">
+              <a:buNone/>
+            </a:pPr>
+            <a:r>
+              <a:rPr lang="en-US" sz="1600" dirty="0">
+                <a:solidFill>
+                  <a:schemeClr val="tx1"/>
+                </a:solidFill>
+              </a:rPr>
+              <a:t>Eksportuoti žemėlapius ir ataskaitas sprendimams</a:t>
+            </a:r>
+            <a:endParaRPr lang="en-US" sz="1600" dirty="0"/>
+          </a:p>
+        </p:txBody>
+      </p:sp>
+      <p:sp>
+        <p:nvSpPr>
+          <p:cNvPr id="18" name="Text 16"/>
+          <p:cNvSpPr txBox="1"/>
+          <p:nvPr/>
+        </p:nvSpPr>
+        <p:spPr>
+          <a:xfrm>
+            <a:off x="548640" y="5760720"/>
+            <a:ext cx="5669280" cy="457200"/>
+          </a:xfrm>
+          <a:prstGeom prst="rect">
+            <a:avLst/>
+          </a:prstGeom>
+          <a:noFill/>
+          <a:ln/>
+        </p:spPr>
+        <p:txBody>
+          <a:bodyPr wrap="square" lIns="0" tIns="0" rIns="0" bIns="0" rtlCol="0" anchor="t"/>
+          <a:lstStyle/>
+          <a:p>
+            <a:pPr indent="0" marL="0">
+              <a:buNone/>
+            </a:pPr>
+            <a:r>
+              <a:rPr lang="en-US" sz="1400" i="1" dirty="0">
+                <a:solidFill>
+                  <a:schemeClr val="tx2"/>
+                </a:solidFill>
+              </a:rPr>
+              <a:t>Analitikai tą patį gali atlikti Python skriptuose – pakartojamai ir dokumentuotai.</a:t>
+            </a:r>
+            <a:endParaRPr lang="en-US" sz="1400" dirty="0"/>
+          </a:p>
+        </p:txBody>
+      </p:sp>
+      <p:sp>
+        <p:nvSpPr>
+          <p:cNvPr id="19" name="app-frame"/>
+          <p:cNvSpPr/>
+          <p:nvPr/>
+        </p:nvSpPr>
+        <p:spPr>
+          <a:xfrm>
+            <a:off x="6583680" y="1280160"/>
+            <a:ext cx="5029200" cy="4892040"/>
+          </a:xfrm>
+          <a:prstGeom prst="roundRect">
+            <a:avLst>
+              <a:gd name="adj" fmla="val 2243"/>
+            </a:avLst>
+          </a:prstGeom>
+          <a:solidFill>
+            <a:schemeClr val="bg2"/>
           </a:solidFill>
           <a:ln/>
         </p:spPr>
       </p:sp>
       <p:pic>
         <p:nvPicPr>
-          <p:cNvPr id="4" name="trust-0-icon" descr="preencoded.png">    </p:cNvPr>
+          <p:cNvPr id="20" name="app-screenshot" descr="/home/razinka/marxan/docs/presentations/2026-10-20-saugomos-teritorijos/rivers_tab_crop.png">    </p:cNvPr>
           <p:cNvPicPr>
             <a:picLocks noChangeAspect="1"/>
           </p:cNvPicPr>
@@ -3347,543 +3935,14 @@
         </p:blipFill>
         <p:spPr>
           <a:xfrm>
-            <a:off x="713232" y="1536192"/>
-            <a:ext cx="356616" cy="356616"/>
+            <a:off x="7334504" y="1444752"/>
+            <a:ext cx="3527552" cy="4572000"/>
           </a:xfrm>
           <a:prstGeom prst="rect">
             <a:avLst/>
           </a:prstGeom>
         </p:spPr>
       </p:pic>
-      <p:sp>
-        <p:nvSpPr>
-          <p:cNvPr id="5" name="Text 2"/>
-          <p:cNvSpPr txBox="1"/>
-          <p:nvPr/>
-        </p:nvSpPr>
-        <p:spPr>
-          <a:xfrm>
-            <a:off x="1463040" y="1353312"/>
-            <a:ext cx="5760720" cy="365760"/>
-          </a:xfrm>
-          <a:prstGeom prst="rect">
-            <a:avLst/>
-          </a:prstGeom>
-          <a:noFill/>
-          <a:ln/>
-        </p:spPr>
-        <p:txBody>
-          <a:bodyPr wrap="square" lIns="0" tIns="0" rIns="0" bIns="0" rtlCol="0" anchor="t"/>
-          <a:lstStyle/>
-          <a:p>
-            <a:pPr indent="0" marL="0">
-              <a:buNone/>
-            </a:pPr>
-            <a:r>
-              <a:rPr lang="en-US" sz="1800" b="1" dirty="0">
-                <a:solidFill>
-                  <a:schemeClr val="tx1"/>
-                </a:solidFill>
-                <a:latin typeface="Cambria" pitchFamily="34" charset="0"/>
-                <a:ea typeface="Cambria" pitchFamily="34" charset="-122"/>
-                <a:cs typeface="Cambria" pitchFamily="34" charset="-120"/>
-              </a:rPr>
-              <a:t>Patikrinta su žinomu atsakymu</a:t>
-            </a:r>
-            <a:endParaRPr lang="en-US" sz="1800" dirty="0"/>
-          </a:p>
-        </p:txBody>
-      </p:sp>
-      <p:sp>
-        <p:nvSpPr>
-          <p:cNvPr id="6" name="Text 3"/>
-          <p:cNvSpPr txBox="1"/>
-          <p:nvPr/>
-        </p:nvSpPr>
-        <p:spPr>
-          <a:xfrm>
-            <a:off x="1463040" y="1755648"/>
-            <a:ext cx="5760720" cy="640080"/>
-          </a:xfrm>
-          <a:prstGeom prst="rect">
-            <a:avLst/>
-          </a:prstGeom>
-          <a:noFill/>
-          <a:ln/>
-        </p:spPr>
-        <p:txBody>
-          <a:bodyPr wrap="square" lIns="0" tIns="0" rIns="0" bIns="0" rtlCol="0" anchor="t"/>
-          <a:lstStyle/>
-          <a:p>
-            <a:pPr indent="0" marL="0">
-              <a:buNone/>
-            </a:pPr>
-            <a:r>
-              <a:rPr lang="en-US" sz="1400" dirty="0">
-                <a:solidFill>
-                  <a:schemeClr val="tx1"/>
-                </a:solidFill>
-              </a:rPr>
-              <a:t>Testinis uždavinys turi rankomis išvestą optimumą – tikslusis sprendiklis privalo jį pasiekti.</a:t>
-            </a:r>
-            <a:endParaRPr lang="en-US" sz="1400" dirty="0"/>
-          </a:p>
-        </p:txBody>
-      </p:sp>
-      <p:sp>
-        <p:nvSpPr>
-          <p:cNvPr id="7" name="trust-1-circle"/>
-          <p:cNvSpPr/>
-          <p:nvPr/>
-        </p:nvSpPr>
-        <p:spPr>
-          <a:xfrm>
-            <a:off x="548640" y="2560320"/>
-            <a:ext cx="685800" cy="685800"/>
-          </a:xfrm>
-          <a:prstGeom prst="ellipse">
-            <a:avLst/>
-          </a:prstGeom>
-          <a:solidFill>
-            <a:schemeClr val="accent1"/>
-          </a:solidFill>
-          <a:ln/>
-        </p:spPr>
-      </p:sp>
-      <p:pic>
-        <p:nvPicPr>
-          <p:cNvPr id="8" name="trust-1-icon" descr="preencoded.png">    </p:cNvPr>
-          <p:cNvPicPr>
-            <a:picLocks noChangeAspect="1"/>
-          </p:cNvPicPr>
-          <p:nvPr/>
-        </p:nvPicPr>
-        <p:blipFill>
-          <a:blip r:embed="rId2"/>
-          <a:stretch>
-            <a:fillRect/>
-          </a:stretch>
-        </p:blipFill>
-        <p:spPr>
-          <a:xfrm>
-            <a:off x="713232" y="2724912"/>
-            <a:ext cx="356616" cy="356616"/>
-          </a:xfrm>
-          <a:prstGeom prst="rect">
-            <a:avLst/>
-          </a:prstGeom>
-        </p:spPr>
-      </p:pic>
-      <p:sp>
-        <p:nvSpPr>
-          <p:cNvPr id="9" name="Text 5"/>
-          <p:cNvSpPr txBox="1"/>
-          <p:nvPr/>
-        </p:nvSpPr>
-        <p:spPr>
-          <a:xfrm>
-            <a:off x="1463040" y="2542032"/>
-            <a:ext cx="5760720" cy="365760"/>
-          </a:xfrm>
-          <a:prstGeom prst="rect">
-            <a:avLst/>
-          </a:prstGeom>
-          <a:noFill/>
-          <a:ln/>
-        </p:spPr>
-        <p:txBody>
-          <a:bodyPr wrap="square" lIns="0" tIns="0" rIns="0" bIns="0" rtlCol="0" anchor="t"/>
-          <a:lstStyle/>
-          <a:p>
-            <a:pPr indent="0" marL="0">
-              <a:buNone/>
-            </a:pPr>
-            <a:r>
-              <a:rPr lang="en-US" sz="1800" b="1" dirty="0">
-                <a:solidFill>
-                  <a:schemeClr val="tx1"/>
-                </a:solidFill>
-                <a:latin typeface="Cambria" pitchFamily="34" charset="0"/>
-                <a:ea typeface="Cambria" pitchFamily="34" charset="-122"/>
-                <a:cs typeface="Cambria" pitchFamily="34" charset="-120"/>
-              </a:rPr>
-              <a:t>Sutampa su originaliu Marxan</a:t>
-            </a:r>
-            <a:endParaRPr lang="en-US" sz="1800" dirty="0"/>
-          </a:p>
-        </p:txBody>
-      </p:sp>
-      <p:sp>
-        <p:nvSpPr>
-          <p:cNvPr id="10" name="Text 6"/>
-          <p:cNvSpPr txBox="1"/>
-          <p:nvPr/>
-        </p:nvSpPr>
-        <p:spPr>
-          <a:xfrm>
-            <a:off x="1463040" y="2944368"/>
-            <a:ext cx="5760720" cy="640080"/>
-          </a:xfrm>
-          <a:prstGeom prst="rect">
-            <a:avLst/>
-          </a:prstGeom>
-          <a:noFill/>
-          <a:ln/>
-        </p:spPr>
-        <p:txBody>
-          <a:bodyPr wrap="square" lIns="0" tIns="0" rIns="0" bIns="0" rtlCol="0" anchor="t"/>
-          <a:lstStyle/>
-          <a:p>
-            <a:pPr indent="0" marL="0">
-              <a:buNone/>
-            </a:pPr>
-            <a:r>
-              <a:rPr lang="en-US" sz="1400" dirty="0">
-                <a:solidFill>
-                  <a:schemeClr val="tx1"/>
-                </a:solidFill>
-              </a:rPr>
-              <a:t>Baudų, tikslų ir parametrų logika atkartoja originalų Marxan C++ kodą.</a:t>
-            </a:r>
-            <a:endParaRPr lang="en-US" sz="1400" dirty="0"/>
-          </a:p>
-        </p:txBody>
-      </p:sp>
-      <p:sp>
-        <p:nvSpPr>
-          <p:cNvPr id="11" name="trust-2-circle"/>
-          <p:cNvSpPr/>
-          <p:nvPr/>
-        </p:nvSpPr>
-        <p:spPr>
-          <a:xfrm>
-            <a:off x="548640" y="3749040"/>
-            <a:ext cx="685800" cy="685800"/>
-          </a:xfrm>
-          <a:prstGeom prst="ellipse">
-            <a:avLst/>
-          </a:prstGeom>
-          <a:solidFill>
-            <a:schemeClr val="accent1"/>
-          </a:solidFill>
-          <a:ln/>
-        </p:spPr>
-      </p:sp>
-      <p:pic>
-        <p:nvPicPr>
-          <p:cNvPr id="12" name="trust-2-icon" descr="preencoded.png">    </p:cNvPr>
-          <p:cNvPicPr>
-            <a:picLocks noChangeAspect="1"/>
-          </p:cNvPicPr>
-          <p:nvPr/>
-        </p:nvPicPr>
-        <p:blipFill>
-          <a:blip r:embed="rId3"/>
-          <a:stretch>
-            <a:fillRect/>
-          </a:stretch>
-        </p:blipFill>
-        <p:spPr>
-          <a:xfrm>
-            <a:off x="713232" y="3913632"/>
-            <a:ext cx="356616" cy="356616"/>
-          </a:xfrm>
-          <a:prstGeom prst="rect">
-            <a:avLst/>
-          </a:prstGeom>
-        </p:spPr>
-      </p:pic>
-      <p:sp>
-        <p:nvSpPr>
-          <p:cNvPr id="13" name="Text 8"/>
-          <p:cNvSpPr txBox="1"/>
-          <p:nvPr/>
-        </p:nvSpPr>
-        <p:spPr>
-          <a:xfrm>
-            <a:off x="1463040" y="3730752"/>
-            <a:ext cx="5760720" cy="365760"/>
-          </a:xfrm>
-          <a:prstGeom prst="rect">
-            <a:avLst/>
-          </a:prstGeom>
-          <a:noFill/>
-          <a:ln/>
-        </p:spPr>
-        <p:txBody>
-          <a:bodyPr wrap="square" lIns="0" tIns="0" rIns="0" bIns="0" rtlCol="0" anchor="t"/>
-          <a:lstStyle/>
-          <a:p>
-            <a:pPr indent="0" marL="0">
-              <a:buNone/>
-            </a:pPr>
-            <a:r>
-              <a:rPr lang="en-US" sz="1800" b="1" dirty="0">
-                <a:solidFill>
-                  <a:schemeClr val="tx1"/>
-                </a:solidFill>
-                <a:latin typeface="Cambria" pitchFamily="34" charset="0"/>
-                <a:ea typeface="Cambria" pitchFamily="34" charset="-122"/>
-                <a:cs typeface="Cambria" pitchFamily="34" charset="-120"/>
-              </a:rPr>
-              <a:t>Automatiniai testai</a:t>
-            </a:r>
-            <a:endParaRPr lang="en-US" sz="1800" dirty="0"/>
-          </a:p>
-        </p:txBody>
-      </p:sp>
-      <p:sp>
-        <p:nvSpPr>
-          <p:cNvPr id="14" name="Text 9"/>
-          <p:cNvSpPr txBox="1"/>
-          <p:nvPr/>
-        </p:nvSpPr>
-        <p:spPr>
-          <a:xfrm>
-            <a:off x="1463040" y="4133088"/>
-            <a:ext cx="5760720" cy="640080"/>
-          </a:xfrm>
-          <a:prstGeom prst="rect">
-            <a:avLst/>
-          </a:prstGeom>
-          <a:noFill/>
-          <a:ln/>
-        </p:spPr>
-        <p:txBody>
-          <a:bodyPr wrap="square" lIns="0" tIns="0" rIns="0" bIns="0" rtlCol="0" anchor="t"/>
-          <a:lstStyle/>
-          <a:p>
-            <a:pPr indent="0" marL="0">
-              <a:buNone/>
-            </a:pPr>
-            <a:r>
-              <a:rPr lang="en-US" sz="1400" dirty="0">
-                <a:solidFill>
-                  <a:schemeClr val="tx1"/>
-                </a:solidFill>
-              </a:rPr>
-              <a:t>3 700+ testų paleidžiama po kiekvieno pakeitimo; dabartinė versija juos visus praeina.</a:t>
-            </a:r>
-            <a:endParaRPr lang="en-US" sz="1400" dirty="0"/>
-          </a:p>
-        </p:txBody>
-      </p:sp>
-      <p:sp>
-        <p:nvSpPr>
-          <p:cNvPr id="15" name="trust-3-circle"/>
-          <p:cNvSpPr/>
-          <p:nvPr/>
-        </p:nvSpPr>
-        <p:spPr>
-          <a:xfrm>
-            <a:off x="548640" y="4937760"/>
-            <a:ext cx="685800" cy="685800"/>
-          </a:xfrm>
-          <a:prstGeom prst="ellipse">
-            <a:avLst/>
-          </a:prstGeom>
-          <a:solidFill>
-            <a:schemeClr val="accent1"/>
-          </a:solidFill>
-          <a:ln/>
-        </p:spPr>
-      </p:sp>
-      <p:pic>
-        <p:nvPicPr>
-          <p:cNvPr id="16" name="trust-3-icon" descr="preencoded.png">    </p:cNvPr>
-          <p:cNvPicPr>
-            <a:picLocks noChangeAspect="1"/>
-          </p:cNvPicPr>
-          <p:nvPr/>
-        </p:nvPicPr>
-        <p:blipFill>
-          <a:blip r:embed="rId4"/>
-          <a:stretch>
-            <a:fillRect/>
-          </a:stretch>
-        </p:blipFill>
-        <p:spPr>
-          <a:xfrm>
-            <a:off x="713232" y="5102352"/>
-            <a:ext cx="356616" cy="356616"/>
-          </a:xfrm>
-          <a:prstGeom prst="rect">
-            <a:avLst/>
-          </a:prstGeom>
-        </p:spPr>
-      </p:pic>
-      <p:sp>
-        <p:nvSpPr>
-          <p:cNvPr id="17" name="Text 11"/>
-          <p:cNvSpPr txBox="1"/>
-          <p:nvPr/>
-        </p:nvSpPr>
-        <p:spPr>
-          <a:xfrm>
-            <a:off x="1463040" y="4919472"/>
-            <a:ext cx="5760720" cy="365760"/>
-          </a:xfrm>
-          <a:prstGeom prst="rect">
-            <a:avLst/>
-          </a:prstGeom>
-          <a:noFill/>
-          <a:ln/>
-        </p:spPr>
-        <p:txBody>
-          <a:bodyPr wrap="square" lIns="0" tIns="0" rIns="0" bIns="0" rtlCol="0" anchor="t"/>
-          <a:lstStyle/>
-          <a:p>
-            <a:pPr indent="0" marL="0">
-              <a:buNone/>
-            </a:pPr>
-            <a:r>
-              <a:rPr lang="en-US" sz="1800" b="1" dirty="0">
-                <a:solidFill>
-                  <a:schemeClr val="tx1"/>
-                </a:solidFill>
-                <a:latin typeface="Cambria" pitchFamily="34" charset="0"/>
-                <a:ea typeface="Cambria" pitchFamily="34" charset="-122"/>
-                <a:cs typeface="Cambria" pitchFamily="34" charset="-120"/>
-              </a:rPr>
-              <a:t>Įrodytas optimumas</a:t>
-            </a:r>
-            <a:endParaRPr lang="en-US" sz="1800" dirty="0"/>
-          </a:p>
-        </p:txBody>
-      </p:sp>
-      <p:sp>
-        <p:nvSpPr>
-          <p:cNvPr id="18" name="Text 12"/>
-          <p:cNvSpPr txBox="1"/>
-          <p:nvPr/>
-        </p:nvSpPr>
-        <p:spPr>
-          <a:xfrm>
-            <a:off x="1463040" y="5321808"/>
-            <a:ext cx="5760720" cy="640080"/>
-          </a:xfrm>
-          <a:prstGeom prst="rect">
-            <a:avLst/>
-          </a:prstGeom>
-          <a:noFill/>
-          <a:ln/>
-        </p:spPr>
-        <p:txBody>
-          <a:bodyPr wrap="square" lIns="0" tIns="0" rIns="0" bIns="0" rtlCol="0" anchor="t"/>
-          <a:lstStyle/>
-          <a:p>
-            <a:pPr indent="0" marL="0">
-              <a:buNone/>
-            </a:pPr>
-            <a:r>
-              <a:rPr lang="en-US" sz="1400" dirty="0">
-                <a:solidFill>
-                  <a:schemeClr val="tx1"/>
-                </a:solidFill>
-              </a:rPr>
-              <a:t>Galima gauti tikslų sprendimą ir palyginti jį su klasikiniu Marxan algoritmu.</a:t>
-            </a:r>
-            <a:endParaRPr lang="en-US" sz="1400" dirty="0"/>
-          </a:p>
-        </p:txBody>
-      </p:sp>
-      <p:sp>
-        <p:nvSpPr>
-          <p:cNvPr id="19" name="trust-stat"/>
-          <p:cNvSpPr/>
-          <p:nvPr/>
-        </p:nvSpPr>
-        <p:spPr>
-          <a:xfrm>
-            <a:off x="7863840" y="1371600"/>
-            <a:ext cx="3749040" cy="4434840"/>
-          </a:xfrm>
-          <a:prstGeom prst="roundRect">
-            <a:avLst>
-              <a:gd name="adj" fmla="val 2927"/>
-            </a:avLst>
-          </a:prstGeom>
-          <a:solidFill>
-            <a:schemeClr val="tx2"/>
-          </a:solidFill>
-          <a:ln/>
-        </p:spPr>
-      </p:sp>
-      <p:sp>
-        <p:nvSpPr>
-          <p:cNvPr id="20" name="Text 14"/>
-          <p:cNvSpPr txBox="1"/>
-          <p:nvPr/>
-        </p:nvSpPr>
-        <p:spPr>
-          <a:xfrm>
-            <a:off x="8138160" y="2011680"/>
-            <a:ext cx="3200400" cy="1188720"/>
-          </a:xfrm>
-          <a:prstGeom prst="rect">
-            <a:avLst/>
-          </a:prstGeom>
-          <a:noFill/>
-          <a:ln/>
-        </p:spPr>
-        <p:txBody>
-          <a:bodyPr wrap="square" lIns="0" tIns="0" rIns="0" bIns="0" rtlCol="0" anchor="ctr"/>
-          <a:lstStyle/>
-          <a:p>
-            <a:pPr algn="ctr" indent="0" marL="0">
-              <a:buNone/>
-            </a:pPr>
-            <a:r>
-              <a:rPr lang="en-US" sz="6600" b="1" dirty="0">
-                <a:solidFill>
-                  <a:schemeClr val="accent3"/>
-                </a:solidFill>
-                <a:latin typeface="Cambria" pitchFamily="34" charset="0"/>
-                <a:ea typeface="Cambria" pitchFamily="34" charset="-122"/>
-                <a:cs typeface="Cambria" pitchFamily="34" charset="-120"/>
-              </a:rPr>
-              <a:t>24 %</a:t>
-            </a:r>
-            <a:endParaRPr lang="en-US" sz="6600" dirty="0"/>
-          </a:p>
-        </p:txBody>
-      </p:sp>
-      <p:sp>
-        <p:nvSpPr>
-          <p:cNvPr id="21" name="Text 15"/>
-          <p:cNvSpPr txBox="1"/>
-          <p:nvPr/>
-        </p:nvSpPr>
-        <p:spPr>
-          <a:xfrm>
-            <a:off x="8138160" y="3383280"/>
-            <a:ext cx="3200400" cy="1463040"/>
-          </a:xfrm>
-          <a:prstGeom prst="rect">
-            <a:avLst/>
-          </a:prstGeom>
-          <a:noFill/>
-          <a:ln/>
-        </p:spPr>
-        <p:txBody>
-          <a:bodyPr wrap="square" lIns="0" tIns="0" rIns="0" bIns="0" rtlCol="0" anchor="t"/>
-          <a:lstStyle/>
-          <a:p>
-            <a:pPr algn="ctr" indent="0" marL="0">
-              <a:buNone/>
-            </a:pPr>
-            <a:r>
-              <a:rPr lang="en-US" sz="1600" dirty="0">
-                <a:solidFill>
-                  <a:schemeClr val="bg1"/>
-                </a:solidFill>
-              </a:rPr>
-              <a:t>tiek pigesnis tikslusis sprendimas Kuršių marių pavyzdyje, tenkinant tuos pačius tikslus</a:t>
-            </a:r>
-            <a:endParaRPr lang="en-US" sz="1600" dirty="0"/>
-          </a:p>
-        </p:txBody>
-      </p:sp>
       <p:sp>
         <p:nvSpPr>
           <p:cNvPr id="25" name="Slide Number Placeholder 0"/>
@@ -3964,8 +4023,8 @@
         </p:nvSpPr>
         <p:spPr>
           <a:xfrm>
-            <a:off x="731520" y="2377440"/>
-            <a:ext cx="10698480" cy="1188720"/>
+            <a:off x="548640" y="320040"/>
+            <a:ext cx="11064240" cy="777240"/>
           </a:xfrm>
           <a:prstGeom prst="rect">
             <a:avLst/>
@@ -3974,88 +4033,50 @@
           <a:ln/>
         </p:spPr>
         <p:txBody>
-          <a:bodyPr wrap="square" rtlCol="0" anchor="b"/>
+          <a:bodyPr wrap="square" lIns="0" tIns="0" rIns="0" bIns="0" rtlCol="0" anchor="ctr"/>
           <a:lstStyle/>
           <a:p>
             <a:pPr algn="l" indent="0" marL="0">
               <a:buNone/>
             </a:pPr>
             <a:r>
-              <a:rPr lang="en-US" sz="4000" b="1" dirty="0">
-                <a:solidFill>
-                  <a:schemeClr val="bg1"/>
+              <a:rPr lang="en-US" sz="3200" b="1" dirty="0">
+                <a:solidFill>
+                  <a:schemeClr val="tx1"/>
                 </a:solidFill>
                 <a:latin typeface="Cambria" pitchFamily="34" charset="0"/>
                 <a:ea typeface="Cambria" pitchFamily="34" charset="-122"/>
                 <a:cs typeface="Cambria" pitchFamily="34" charset="-120"/>
               </a:rPr>
-              <a:t>Dar neišplėtotos galimybės</a:t>
-            </a:r>
-            <a:endParaRPr lang="en-US" sz="4000" dirty="0"/>
-          </a:p>
-        </p:txBody>
-      </p:sp>
-      <p:sp>
-        <p:nvSpPr>
-          <p:cNvPr id="3" name="Text 0"/>
-          <p:cNvSpPr/>
-          <p:nvPr>
-            <p:ph idx="101" type="body" hasCustomPrompt="1"/>
-          </p:nvPr>
-        </p:nvSpPr>
-        <p:spPr>
-          <a:xfrm>
-            <a:off x="731520" y="3657600"/>
-            <a:ext cx="10698480" cy="914400"/>
-          </a:xfrm>
-          <a:prstGeom prst="rect">
-            <a:avLst/>
-          </a:prstGeom>
-          <a:noFill/>
-          <a:ln/>
-        </p:spPr>
-        <p:txBody>
-          <a:bodyPr wrap="square" rtlCol="0" anchor="t"/>
-          <a:lstStyle/>
-          <a:p>
-            <a:pPr indent="0" marL="0">
-              <a:buNone/>
-            </a:pPr>
-            <a:r>
-              <a:rPr lang="en-US" sz="2000" dirty="0">
-                <a:solidFill>
-                  <a:schemeClr val="accent5"/>
-                </a:solidFill>
-              </a:rPr>
-              <a:t>Ko dar trūksta ir ką tai reiškia praktikoje</a:t>
-            </a:r>
-            <a:endParaRPr lang="en-US" sz="2000" dirty="0"/>
-          </a:p>
-        </p:txBody>
-      </p:sp>
-      <p:sp>
-        <p:nvSpPr>
-          <p:cNvPr id="4" name="section-gap-circle"/>
-          <p:cNvSpPr/>
-          <p:nvPr/>
-        </p:nvSpPr>
-        <p:spPr>
-          <a:xfrm>
-            <a:off x="731520" y="1188720"/>
-            <a:ext cx="822960" cy="822960"/>
+              <a:t>Ar galima pasitikėti rezultatais?</a:t>
+            </a:r>
+            <a:endParaRPr lang="en-US" sz="3200" dirty="0"/>
+          </a:p>
+        </p:txBody>
+      </p:sp>
+      <p:sp>
+        <p:nvSpPr>
+          <p:cNvPr id="3" name="trust-0-circle"/>
+          <p:cNvSpPr/>
+          <p:nvPr/>
+        </p:nvSpPr>
+        <p:spPr>
+          <a:xfrm>
+            <a:off x="548640" y="1371600"/>
+            <a:ext cx="685800" cy="685800"/>
           </a:xfrm>
           <a:prstGeom prst="ellipse">
             <a:avLst/>
           </a:prstGeom>
           <a:solidFill>
-            <a:schemeClr val="accent2"/>
+            <a:schemeClr val="accent1"/>
           </a:solidFill>
           <a:ln/>
         </p:spPr>
       </p:sp>
       <p:pic>
         <p:nvPicPr>
-          <p:cNvPr id="5" name="section-gap-icon" descr="preencoded.png">    </p:cNvPr>
+          <p:cNvPr id="4" name="trust-0-icon" descr="preencoded.png">    </p:cNvPr>
           <p:cNvPicPr>
             <a:picLocks noChangeAspect="1"/>
           </p:cNvPicPr>
@@ -4069,14 +4090,543 @@
         </p:blipFill>
         <p:spPr>
           <a:xfrm>
-            <a:off x="929030" y="1386230"/>
-            <a:ext cx="427939" cy="427939"/>
+            <a:off x="713232" y="1536192"/>
+            <a:ext cx="356616" cy="356616"/>
           </a:xfrm>
           <a:prstGeom prst="rect">
             <a:avLst/>
           </a:prstGeom>
         </p:spPr>
       </p:pic>
+      <p:sp>
+        <p:nvSpPr>
+          <p:cNvPr id="5" name="Text 2"/>
+          <p:cNvSpPr txBox="1"/>
+          <p:nvPr/>
+        </p:nvSpPr>
+        <p:spPr>
+          <a:xfrm>
+            <a:off x="1463040" y="1353312"/>
+            <a:ext cx="5760720" cy="365760"/>
+          </a:xfrm>
+          <a:prstGeom prst="rect">
+            <a:avLst/>
+          </a:prstGeom>
+          <a:noFill/>
+          <a:ln/>
+        </p:spPr>
+        <p:txBody>
+          <a:bodyPr wrap="square" lIns="0" tIns="0" rIns="0" bIns="0" rtlCol="0" anchor="t"/>
+          <a:lstStyle/>
+          <a:p>
+            <a:pPr indent="0" marL="0">
+              <a:buNone/>
+            </a:pPr>
+            <a:r>
+              <a:rPr lang="en-US" sz="1800" b="1" dirty="0">
+                <a:solidFill>
+                  <a:schemeClr val="tx1"/>
+                </a:solidFill>
+                <a:latin typeface="Cambria" pitchFamily="34" charset="0"/>
+                <a:ea typeface="Cambria" pitchFamily="34" charset="-122"/>
+                <a:cs typeface="Cambria" pitchFamily="34" charset="-120"/>
+              </a:rPr>
+              <a:t>Patikrinta su žinomu atsakymu</a:t>
+            </a:r>
+            <a:endParaRPr lang="en-US" sz="1800" dirty="0"/>
+          </a:p>
+        </p:txBody>
+      </p:sp>
+      <p:sp>
+        <p:nvSpPr>
+          <p:cNvPr id="6" name="Text 3"/>
+          <p:cNvSpPr txBox="1"/>
+          <p:nvPr/>
+        </p:nvSpPr>
+        <p:spPr>
+          <a:xfrm>
+            <a:off x="1463040" y="1755648"/>
+            <a:ext cx="5760720" cy="640080"/>
+          </a:xfrm>
+          <a:prstGeom prst="rect">
+            <a:avLst/>
+          </a:prstGeom>
+          <a:noFill/>
+          <a:ln/>
+        </p:spPr>
+        <p:txBody>
+          <a:bodyPr wrap="square" lIns="0" tIns="0" rIns="0" bIns="0" rtlCol="0" anchor="t"/>
+          <a:lstStyle/>
+          <a:p>
+            <a:pPr indent="0" marL="0">
+              <a:buNone/>
+            </a:pPr>
+            <a:r>
+              <a:rPr lang="en-US" sz="1400" dirty="0">
+                <a:solidFill>
+                  <a:schemeClr val="tx1"/>
+                </a:solidFill>
+              </a:rPr>
+              <a:t>Testinis uždavinys turi rankomis išvestą optimumą – tikslusis sprendiklis privalo jį pasiekti.</a:t>
+            </a:r>
+            <a:endParaRPr lang="en-US" sz="1400" dirty="0"/>
+          </a:p>
+        </p:txBody>
+      </p:sp>
+      <p:sp>
+        <p:nvSpPr>
+          <p:cNvPr id="7" name="trust-1-circle"/>
+          <p:cNvSpPr/>
+          <p:nvPr/>
+        </p:nvSpPr>
+        <p:spPr>
+          <a:xfrm>
+            <a:off x="548640" y="2560320"/>
+            <a:ext cx="685800" cy="685800"/>
+          </a:xfrm>
+          <a:prstGeom prst="ellipse">
+            <a:avLst/>
+          </a:prstGeom>
+          <a:solidFill>
+            <a:schemeClr val="accent1"/>
+          </a:solidFill>
+          <a:ln/>
+        </p:spPr>
+      </p:sp>
+      <p:pic>
+        <p:nvPicPr>
+          <p:cNvPr id="8" name="trust-1-icon" descr="preencoded.png">    </p:cNvPr>
+          <p:cNvPicPr>
+            <a:picLocks noChangeAspect="1"/>
+          </p:cNvPicPr>
+          <p:nvPr/>
+        </p:nvPicPr>
+        <p:blipFill>
+          <a:blip r:embed="rId2"/>
+          <a:stretch>
+            <a:fillRect/>
+          </a:stretch>
+        </p:blipFill>
+        <p:spPr>
+          <a:xfrm>
+            <a:off x="713232" y="2724912"/>
+            <a:ext cx="356616" cy="356616"/>
+          </a:xfrm>
+          <a:prstGeom prst="rect">
+            <a:avLst/>
+          </a:prstGeom>
+        </p:spPr>
+      </p:pic>
+      <p:sp>
+        <p:nvSpPr>
+          <p:cNvPr id="9" name="Text 5"/>
+          <p:cNvSpPr txBox="1"/>
+          <p:nvPr/>
+        </p:nvSpPr>
+        <p:spPr>
+          <a:xfrm>
+            <a:off x="1463040" y="2542032"/>
+            <a:ext cx="5760720" cy="365760"/>
+          </a:xfrm>
+          <a:prstGeom prst="rect">
+            <a:avLst/>
+          </a:prstGeom>
+          <a:noFill/>
+          <a:ln/>
+        </p:spPr>
+        <p:txBody>
+          <a:bodyPr wrap="square" lIns="0" tIns="0" rIns="0" bIns="0" rtlCol="0" anchor="t"/>
+          <a:lstStyle/>
+          <a:p>
+            <a:pPr indent="0" marL="0">
+              <a:buNone/>
+            </a:pPr>
+            <a:r>
+              <a:rPr lang="en-US" sz="1800" b="1" dirty="0">
+                <a:solidFill>
+                  <a:schemeClr val="tx1"/>
+                </a:solidFill>
+                <a:latin typeface="Cambria" pitchFamily="34" charset="0"/>
+                <a:ea typeface="Cambria" pitchFamily="34" charset="-122"/>
+                <a:cs typeface="Cambria" pitchFamily="34" charset="-120"/>
+              </a:rPr>
+              <a:t>Sutampa su originaliu Marxan</a:t>
+            </a:r>
+            <a:endParaRPr lang="en-US" sz="1800" dirty="0"/>
+          </a:p>
+        </p:txBody>
+      </p:sp>
+      <p:sp>
+        <p:nvSpPr>
+          <p:cNvPr id="10" name="Text 6"/>
+          <p:cNvSpPr txBox="1"/>
+          <p:nvPr/>
+        </p:nvSpPr>
+        <p:spPr>
+          <a:xfrm>
+            <a:off x="1463040" y="2944368"/>
+            <a:ext cx="5760720" cy="640080"/>
+          </a:xfrm>
+          <a:prstGeom prst="rect">
+            <a:avLst/>
+          </a:prstGeom>
+          <a:noFill/>
+          <a:ln/>
+        </p:spPr>
+        <p:txBody>
+          <a:bodyPr wrap="square" lIns="0" tIns="0" rIns="0" bIns="0" rtlCol="0" anchor="t"/>
+          <a:lstStyle/>
+          <a:p>
+            <a:pPr indent="0" marL="0">
+              <a:buNone/>
+            </a:pPr>
+            <a:r>
+              <a:rPr lang="en-US" sz="1400" dirty="0">
+                <a:solidFill>
+                  <a:schemeClr val="tx1"/>
+                </a:solidFill>
+              </a:rPr>
+              <a:t>Baudų, tikslų ir parametrų logika atkartoja originalų Marxan C++ kodą.</a:t>
+            </a:r>
+            <a:endParaRPr lang="en-US" sz="1400" dirty="0"/>
+          </a:p>
+        </p:txBody>
+      </p:sp>
+      <p:sp>
+        <p:nvSpPr>
+          <p:cNvPr id="11" name="trust-2-circle"/>
+          <p:cNvSpPr/>
+          <p:nvPr/>
+        </p:nvSpPr>
+        <p:spPr>
+          <a:xfrm>
+            <a:off x="548640" y="3749040"/>
+            <a:ext cx="685800" cy="685800"/>
+          </a:xfrm>
+          <a:prstGeom prst="ellipse">
+            <a:avLst/>
+          </a:prstGeom>
+          <a:solidFill>
+            <a:schemeClr val="accent1"/>
+          </a:solidFill>
+          <a:ln/>
+        </p:spPr>
+      </p:sp>
+      <p:pic>
+        <p:nvPicPr>
+          <p:cNvPr id="12" name="trust-2-icon" descr="preencoded.png">    </p:cNvPr>
+          <p:cNvPicPr>
+            <a:picLocks noChangeAspect="1"/>
+          </p:cNvPicPr>
+          <p:nvPr/>
+        </p:nvPicPr>
+        <p:blipFill>
+          <a:blip r:embed="rId3"/>
+          <a:stretch>
+            <a:fillRect/>
+          </a:stretch>
+        </p:blipFill>
+        <p:spPr>
+          <a:xfrm>
+            <a:off x="713232" y="3913632"/>
+            <a:ext cx="356616" cy="356616"/>
+          </a:xfrm>
+          <a:prstGeom prst="rect">
+            <a:avLst/>
+          </a:prstGeom>
+        </p:spPr>
+      </p:pic>
+      <p:sp>
+        <p:nvSpPr>
+          <p:cNvPr id="13" name="Text 8"/>
+          <p:cNvSpPr txBox="1"/>
+          <p:nvPr/>
+        </p:nvSpPr>
+        <p:spPr>
+          <a:xfrm>
+            <a:off x="1463040" y="3730752"/>
+            <a:ext cx="5760720" cy="365760"/>
+          </a:xfrm>
+          <a:prstGeom prst="rect">
+            <a:avLst/>
+          </a:prstGeom>
+          <a:noFill/>
+          <a:ln/>
+        </p:spPr>
+        <p:txBody>
+          <a:bodyPr wrap="square" lIns="0" tIns="0" rIns="0" bIns="0" rtlCol="0" anchor="t"/>
+          <a:lstStyle/>
+          <a:p>
+            <a:pPr indent="0" marL="0">
+              <a:buNone/>
+            </a:pPr>
+            <a:r>
+              <a:rPr lang="en-US" sz="1800" b="1" dirty="0">
+                <a:solidFill>
+                  <a:schemeClr val="tx1"/>
+                </a:solidFill>
+                <a:latin typeface="Cambria" pitchFamily="34" charset="0"/>
+                <a:ea typeface="Cambria" pitchFamily="34" charset="-122"/>
+                <a:cs typeface="Cambria" pitchFamily="34" charset="-120"/>
+              </a:rPr>
+              <a:t>Automatiniai testai</a:t>
+            </a:r>
+            <a:endParaRPr lang="en-US" sz="1800" dirty="0"/>
+          </a:p>
+        </p:txBody>
+      </p:sp>
+      <p:sp>
+        <p:nvSpPr>
+          <p:cNvPr id="14" name="Text 9"/>
+          <p:cNvSpPr txBox="1"/>
+          <p:nvPr/>
+        </p:nvSpPr>
+        <p:spPr>
+          <a:xfrm>
+            <a:off x="1463040" y="4133088"/>
+            <a:ext cx="5760720" cy="640080"/>
+          </a:xfrm>
+          <a:prstGeom prst="rect">
+            <a:avLst/>
+          </a:prstGeom>
+          <a:noFill/>
+          <a:ln/>
+        </p:spPr>
+        <p:txBody>
+          <a:bodyPr wrap="square" lIns="0" tIns="0" rIns="0" bIns="0" rtlCol="0" anchor="t"/>
+          <a:lstStyle/>
+          <a:p>
+            <a:pPr indent="0" marL="0">
+              <a:buNone/>
+            </a:pPr>
+            <a:r>
+              <a:rPr lang="en-US" sz="1400" dirty="0">
+                <a:solidFill>
+                  <a:schemeClr val="tx1"/>
+                </a:solidFill>
+              </a:rPr>
+              <a:t>3 700+ testų paleidžiama po kiekvieno pakeitimo; dabartinė versija juos visus praeina.</a:t>
+            </a:r>
+            <a:endParaRPr lang="en-US" sz="1400" dirty="0"/>
+          </a:p>
+        </p:txBody>
+      </p:sp>
+      <p:sp>
+        <p:nvSpPr>
+          <p:cNvPr id="15" name="trust-3-circle"/>
+          <p:cNvSpPr/>
+          <p:nvPr/>
+        </p:nvSpPr>
+        <p:spPr>
+          <a:xfrm>
+            <a:off x="548640" y="4937760"/>
+            <a:ext cx="685800" cy="685800"/>
+          </a:xfrm>
+          <a:prstGeom prst="ellipse">
+            <a:avLst/>
+          </a:prstGeom>
+          <a:solidFill>
+            <a:schemeClr val="accent1"/>
+          </a:solidFill>
+          <a:ln/>
+        </p:spPr>
+      </p:sp>
+      <p:pic>
+        <p:nvPicPr>
+          <p:cNvPr id="16" name="trust-3-icon" descr="preencoded.png">    </p:cNvPr>
+          <p:cNvPicPr>
+            <a:picLocks noChangeAspect="1"/>
+          </p:cNvPicPr>
+          <p:nvPr/>
+        </p:nvPicPr>
+        <p:blipFill>
+          <a:blip r:embed="rId4"/>
+          <a:stretch>
+            <a:fillRect/>
+          </a:stretch>
+        </p:blipFill>
+        <p:spPr>
+          <a:xfrm>
+            <a:off x="713232" y="5102352"/>
+            <a:ext cx="356616" cy="356616"/>
+          </a:xfrm>
+          <a:prstGeom prst="rect">
+            <a:avLst/>
+          </a:prstGeom>
+        </p:spPr>
+      </p:pic>
+      <p:sp>
+        <p:nvSpPr>
+          <p:cNvPr id="17" name="Text 11"/>
+          <p:cNvSpPr txBox="1"/>
+          <p:nvPr/>
+        </p:nvSpPr>
+        <p:spPr>
+          <a:xfrm>
+            <a:off x="1463040" y="4919472"/>
+            <a:ext cx="5760720" cy="365760"/>
+          </a:xfrm>
+          <a:prstGeom prst="rect">
+            <a:avLst/>
+          </a:prstGeom>
+          <a:noFill/>
+          <a:ln/>
+        </p:spPr>
+        <p:txBody>
+          <a:bodyPr wrap="square" lIns="0" tIns="0" rIns="0" bIns="0" rtlCol="0" anchor="t"/>
+          <a:lstStyle/>
+          <a:p>
+            <a:pPr indent="0" marL="0">
+              <a:buNone/>
+            </a:pPr>
+            <a:r>
+              <a:rPr lang="en-US" sz="1800" b="1" dirty="0">
+                <a:solidFill>
+                  <a:schemeClr val="tx1"/>
+                </a:solidFill>
+                <a:latin typeface="Cambria" pitchFamily="34" charset="0"/>
+                <a:ea typeface="Cambria" pitchFamily="34" charset="-122"/>
+                <a:cs typeface="Cambria" pitchFamily="34" charset="-120"/>
+              </a:rPr>
+              <a:t>Įrodytas optimumas</a:t>
+            </a:r>
+            <a:endParaRPr lang="en-US" sz="1800" dirty="0"/>
+          </a:p>
+        </p:txBody>
+      </p:sp>
+      <p:sp>
+        <p:nvSpPr>
+          <p:cNvPr id="18" name="Text 12"/>
+          <p:cNvSpPr txBox="1"/>
+          <p:nvPr/>
+        </p:nvSpPr>
+        <p:spPr>
+          <a:xfrm>
+            <a:off x="1463040" y="5321808"/>
+            <a:ext cx="5760720" cy="640080"/>
+          </a:xfrm>
+          <a:prstGeom prst="rect">
+            <a:avLst/>
+          </a:prstGeom>
+          <a:noFill/>
+          <a:ln/>
+        </p:spPr>
+        <p:txBody>
+          <a:bodyPr wrap="square" lIns="0" tIns="0" rIns="0" bIns="0" rtlCol="0" anchor="t"/>
+          <a:lstStyle/>
+          <a:p>
+            <a:pPr indent="0" marL="0">
+              <a:buNone/>
+            </a:pPr>
+            <a:r>
+              <a:rPr lang="en-US" sz="1400" dirty="0">
+                <a:solidFill>
+                  <a:schemeClr val="tx1"/>
+                </a:solidFill>
+              </a:rPr>
+              <a:t>Galima gauti tikslų sprendimą ir palyginti jį su klasikiniu Marxan algoritmu.</a:t>
+            </a:r>
+            <a:endParaRPr lang="en-US" sz="1400" dirty="0"/>
+          </a:p>
+        </p:txBody>
+      </p:sp>
+      <p:sp>
+        <p:nvSpPr>
+          <p:cNvPr id="19" name="trust-stat"/>
+          <p:cNvSpPr/>
+          <p:nvPr/>
+        </p:nvSpPr>
+        <p:spPr>
+          <a:xfrm>
+            <a:off x="7863840" y="1371600"/>
+            <a:ext cx="3749040" cy="4434840"/>
+          </a:xfrm>
+          <a:prstGeom prst="roundRect">
+            <a:avLst>
+              <a:gd name="adj" fmla="val 2927"/>
+            </a:avLst>
+          </a:prstGeom>
+          <a:solidFill>
+            <a:schemeClr val="tx2"/>
+          </a:solidFill>
+          <a:ln/>
+        </p:spPr>
+      </p:sp>
+      <p:sp>
+        <p:nvSpPr>
+          <p:cNvPr id="20" name="Text 14"/>
+          <p:cNvSpPr txBox="1"/>
+          <p:nvPr/>
+        </p:nvSpPr>
+        <p:spPr>
+          <a:xfrm>
+            <a:off x="8138160" y="2011680"/>
+            <a:ext cx="3200400" cy="1188720"/>
+          </a:xfrm>
+          <a:prstGeom prst="rect">
+            <a:avLst/>
+          </a:prstGeom>
+          <a:noFill/>
+          <a:ln/>
+        </p:spPr>
+        <p:txBody>
+          <a:bodyPr wrap="square" lIns="0" tIns="0" rIns="0" bIns="0" rtlCol="0" anchor="ctr"/>
+          <a:lstStyle/>
+          <a:p>
+            <a:pPr algn="ctr" indent="0" marL="0">
+              <a:buNone/>
+            </a:pPr>
+            <a:r>
+              <a:rPr lang="en-US" sz="6600" b="1" dirty="0">
+                <a:solidFill>
+                  <a:schemeClr val="accent3"/>
+                </a:solidFill>
+                <a:latin typeface="Cambria" pitchFamily="34" charset="0"/>
+                <a:ea typeface="Cambria" pitchFamily="34" charset="-122"/>
+                <a:cs typeface="Cambria" pitchFamily="34" charset="-120"/>
+              </a:rPr>
+              <a:t>24 %</a:t>
+            </a:r>
+            <a:endParaRPr lang="en-US" sz="6600" dirty="0"/>
+          </a:p>
+        </p:txBody>
+      </p:sp>
+      <p:sp>
+        <p:nvSpPr>
+          <p:cNvPr id="21" name="Text 15"/>
+          <p:cNvSpPr txBox="1"/>
+          <p:nvPr/>
+        </p:nvSpPr>
+        <p:spPr>
+          <a:xfrm>
+            <a:off x="8138160" y="3383280"/>
+            <a:ext cx="3200400" cy="1463040"/>
+          </a:xfrm>
+          <a:prstGeom prst="rect">
+            <a:avLst/>
+          </a:prstGeom>
+          <a:noFill/>
+          <a:ln/>
+        </p:spPr>
+        <p:txBody>
+          <a:bodyPr wrap="square" lIns="0" tIns="0" rIns="0" bIns="0" rtlCol="0" anchor="t"/>
+          <a:lstStyle/>
+          <a:p>
+            <a:pPr algn="ctr" indent="0" marL="0">
+              <a:buNone/>
+            </a:pPr>
+            <a:r>
+              <a:rPr lang="en-US" sz="1600" dirty="0">
+                <a:solidFill>
+                  <a:schemeClr val="bg1"/>
+                </a:solidFill>
+              </a:rPr>
+              <a:t>tiek pigesnis tikslusis sprendimas Kuršių marių pavyzdyje, tenkinant tuos pačius tikslus</a:t>
+            </a:r>
+            <a:endParaRPr lang="en-US" sz="1600" dirty="0"/>
+          </a:p>
+        </p:txBody>
+      </p:sp>
       <p:sp>
         <p:nvSpPr>
           <p:cNvPr id="25" name="Slide Number Placeholder 0"/>
@@ -4089,7 +4639,7 @@
         </p:nvSpPr>
         <p:spPr>
           <a:xfrm>
-            <a:off x="11247120" y="6355080"/>
+            <a:off x="11064240" y="6355080"/>
             <a:ext cx="548640" cy="274320"/>
           </a:xfrm>
           <a:prstGeom prst="rect">
@@ -4107,7 +4657,7 @@
             <a:lvl1pPr>
               <a:defRPr sz="1000">
                 <a:solidFill>
-                  <a:schemeClr val="accent5"/>
+                  <a:schemeClr val="accent4"/>
                 </a:solidFill>
               </a:defRPr>
             </a:lvl1pPr>
@@ -4157,6 +4707,199 @@
         </p:nvSpPr>
         <p:spPr>
           <a:xfrm>
+            <a:off x="731520" y="2377440"/>
+            <a:ext cx="10698480" cy="1188720"/>
+          </a:xfrm>
+          <a:prstGeom prst="rect">
+            <a:avLst/>
+          </a:prstGeom>
+          <a:noFill/>
+          <a:ln/>
+        </p:spPr>
+        <p:txBody>
+          <a:bodyPr wrap="square" rtlCol="0" anchor="b"/>
+          <a:lstStyle/>
+          <a:p>
+            <a:pPr algn="l" indent="0" marL="0">
+              <a:buNone/>
+            </a:pPr>
+            <a:r>
+              <a:rPr lang="en-US" sz="4000" b="1" dirty="0">
+                <a:solidFill>
+                  <a:schemeClr val="bg1"/>
+                </a:solidFill>
+                <a:latin typeface="Cambria" pitchFamily="34" charset="0"/>
+                <a:ea typeface="Cambria" pitchFamily="34" charset="-122"/>
+                <a:cs typeface="Cambria" pitchFamily="34" charset="-120"/>
+              </a:rPr>
+              <a:t>Dar neišplėtotos galimybės</a:t>
+            </a:r>
+            <a:endParaRPr lang="en-US" sz="4000" dirty="0"/>
+          </a:p>
+        </p:txBody>
+      </p:sp>
+      <p:sp>
+        <p:nvSpPr>
+          <p:cNvPr id="3" name="Text 0"/>
+          <p:cNvSpPr/>
+          <p:nvPr>
+            <p:ph idx="101" type="body" hasCustomPrompt="1"/>
+          </p:nvPr>
+        </p:nvSpPr>
+        <p:spPr>
+          <a:xfrm>
+            <a:off x="731520" y="3657600"/>
+            <a:ext cx="10698480" cy="914400"/>
+          </a:xfrm>
+          <a:prstGeom prst="rect">
+            <a:avLst/>
+          </a:prstGeom>
+          <a:noFill/>
+          <a:ln/>
+        </p:spPr>
+        <p:txBody>
+          <a:bodyPr wrap="square" rtlCol="0" anchor="t"/>
+          <a:lstStyle/>
+          <a:p>
+            <a:pPr indent="0" marL="0">
+              <a:buNone/>
+            </a:pPr>
+            <a:r>
+              <a:rPr lang="en-US" sz="2000" dirty="0">
+                <a:solidFill>
+                  <a:schemeClr val="accent5"/>
+                </a:solidFill>
+              </a:rPr>
+              <a:t>Ko dar trūksta ir ką tai reiškia praktikoje</a:t>
+            </a:r>
+            <a:endParaRPr lang="en-US" sz="2000" dirty="0"/>
+          </a:p>
+        </p:txBody>
+      </p:sp>
+      <p:sp>
+        <p:nvSpPr>
+          <p:cNvPr id="4" name="section-gap-circle"/>
+          <p:cNvSpPr/>
+          <p:nvPr/>
+        </p:nvSpPr>
+        <p:spPr>
+          <a:xfrm>
+            <a:off x="731520" y="1188720"/>
+            <a:ext cx="822960" cy="822960"/>
+          </a:xfrm>
+          <a:prstGeom prst="ellipse">
+            <a:avLst/>
+          </a:prstGeom>
+          <a:solidFill>
+            <a:schemeClr val="accent2"/>
+          </a:solidFill>
+          <a:ln/>
+        </p:spPr>
+      </p:sp>
+      <p:pic>
+        <p:nvPicPr>
+          <p:cNvPr id="5" name="section-gap-icon" descr="preencoded.png">    </p:cNvPr>
+          <p:cNvPicPr>
+            <a:picLocks noChangeAspect="1"/>
+          </p:cNvPicPr>
+          <p:nvPr/>
+        </p:nvPicPr>
+        <p:blipFill>
+          <a:blip r:embed="rId1"/>
+          <a:stretch>
+            <a:fillRect/>
+          </a:stretch>
+        </p:blipFill>
+        <p:spPr>
+          <a:xfrm>
+            <a:off x="929030" y="1386230"/>
+            <a:ext cx="427939" cy="427939"/>
+          </a:xfrm>
+          <a:prstGeom prst="rect">
+            <a:avLst/>
+          </a:prstGeom>
+        </p:spPr>
+      </p:pic>
+      <p:sp>
+        <p:nvSpPr>
+          <p:cNvPr id="25" name="Slide Number Placeholder 0"/>
+          <p:cNvSpPr>
+            <a:spLocks noGrp="1"/>
+          </p:cNvSpPr>
+          <p:nvPr>
+            <p:ph type="sldNum" sz="quarter" idx="4294967295"/>
+          </p:nvPr>
+        </p:nvSpPr>
+        <p:spPr>
+          <a:xfrm>
+            <a:off x="11247120" y="6355080"/>
+            <a:ext cx="548640" cy="274320"/>
+          </a:xfrm>
+          <a:prstGeom prst="rect">
+            <a:avLst/>
+          </a:prstGeom>
+          <a:extLst>
+            <a:ext uri="{C572A759-6A51-4108-AA02-DFA0A04FC94B}">
+              <ma14:wrappingTextBoxFlag xmlns:ma14="http://schemas.microsoft.com/office/mac/drawingml/2011/main" val="0"/>
+            </a:ext>
+          </a:extLst>
+        </p:spPr>
+        <p:txBody>
+          <a:bodyPr/>
+          <a:lstStyle>
+            <a:lvl1pPr>
+              <a:defRPr sz="1000">
+                <a:solidFill>
+                  <a:schemeClr val="accent5"/>
+                </a:solidFill>
+              </a:defRPr>
+            </a:lvl1pPr>
+          </a:lstStyle>
+          <a:p>
+            <a:pPr algn="r"/>
+            <a:fld id="{F7021451-1387-4CA6-816F-3879F97B5CBC}" type="slidenum">
+              <a:rPr b="0" lang="en-US"/>
+              <a:t>12</a:t>
+            </a:fld>
+            <a:endParaRPr lang="en-US"/>
+          </a:p>
+        </p:txBody>
+      </p:sp>
+    </p:spTree>
+  </p:cSld>
+  <p:clrMapOvr>
+    <a:masterClrMapping/>
+  </p:clrMapOvr>
+</p:sld>
+</file>
+
+<file path=ppt/slides/slide13.xml><?xml version="1.0" encoding="utf-8"?>
+<p:sld xmlns:a="http://schemas.openxmlformats.org/drawingml/2006/main" xmlns:r="http://schemas.openxmlformats.org/officeDocument/2006/relationships" xmlns:p="http://schemas.openxmlformats.org/presentationml/2006/main">
+  <p:cSld name="Slide 13">
+    <p:spTree>
+      <p:nvGrpSpPr>
+        <p:cNvPr id="1" name=""/>
+        <p:cNvGrpSpPr/>
+        <p:nvPr/>
+      </p:nvGrpSpPr>
+      <p:grpSpPr>
+        <a:xfrm>
+          <a:off x="0" y="0"/>
+          <a:ext cx="0" cy="0"/>
+          <a:chOff x="0" y="0"/>
+          <a:chExt cx="0" cy="0"/>
+        </a:xfrm>
+      </p:grpSpPr>
+      <p:sp>
+        <p:nvSpPr>
+          <p:cNvPr id="2" name="Text 0"/>
+          <p:cNvSpPr/>
+          <p:nvPr>
+            <p:ph idx="100" type="title" hasCustomPrompt="1"/>
+          </p:nvPr>
+        </p:nvSpPr>
+        <p:spPr>
+          <a:xfrm>
             <a:off x="548640" y="320040"/>
             <a:ext cx="11064240" cy="777240"/>
           </a:xfrm>
@@ -4190,7 +4933,7 @@
       </p:sp>
       <p:graphicFrame>
         <p:nvGraphicFramePr>
-          <p:cNvPr id="13" name="gap-table"/>
+          <p:cNvPr id="14" name="gap-table"/>
           <p:cNvGraphicFramePr>
             <a:graphicFrameLocks noGrp="1"/>
           </p:cNvGraphicFramePr>
@@ -5062,7 +5805,7 @@
             <a:pPr algn="r"/>
             <a:fld id="{F7021451-1387-4CA6-816F-3879F97B5CBC}" type="slidenum">
               <a:rPr b="0" lang="en-US"/>
-              <a:t>12</a:t>
+              <a:t>13</a:t>
             </a:fld>
             <a:endParaRPr lang="en-US"/>
           </a:p>
@@ -5076,9 +5819,9 @@
 </p:sld>
 </file>
 
-<file path=ppt/slides/slide13.xml><?xml version="1.0" encoding="utf-8"?>
+<file path=ppt/slides/slide14.xml><?xml version="1.0" encoding="utf-8"?>
 <p:sld xmlns:a="http://schemas.openxmlformats.org/drawingml/2006/main" xmlns:r="http://schemas.openxmlformats.org/officeDocument/2006/relationships" xmlns:p="http://schemas.openxmlformats.org/presentationml/2006/main">
-  <p:cSld name="Slide 13">
+  <p:cSld name="Slide 14">
     <p:spTree>
       <p:nvGrpSpPr>
         <p:cNvPr id="1" name=""/>
@@ -5136,7 +5879,7 @@
       </p:sp>
       <p:graphicFrame>
         <p:nvGraphicFramePr>
-          <p:cNvPr id="14" name="gap-table"/>
+          <p:cNvPr id="15" name="gap-table"/>
           <p:cNvGraphicFramePr>
             <a:graphicFrameLocks noGrp="1"/>
           </p:cNvGraphicFramePr>
@@ -6044,806 +6787,6 @@
             <a:pPr algn="r"/>
             <a:fld id="{F7021451-1387-4CA6-816F-3879F97B5CBC}" type="slidenum">
               <a:rPr b="0" lang="en-US"/>
-              <a:t>13</a:t>
-            </a:fld>
-            <a:endParaRPr lang="en-US"/>
-          </a:p>
-        </p:txBody>
-      </p:sp>
-    </p:spTree>
-  </p:cSld>
-  <p:clrMapOvr>
-    <a:masterClrMapping/>
-  </p:clrMapOvr>
-</p:sld>
-</file>
-
-<file path=ppt/slides/slide14.xml><?xml version="1.0" encoding="utf-8"?>
-<p:sld xmlns:a="http://schemas.openxmlformats.org/drawingml/2006/main" xmlns:r="http://schemas.openxmlformats.org/officeDocument/2006/relationships" xmlns:p="http://schemas.openxmlformats.org/presentationml/2006/main">
-  <p:cSld name="Slide 14">
-    <p:spTree>
-      <p:nvGrpSpPr>
-        <p:cNvPr id="1" name=""/>
-        <p:cNvGrpSpPr/>
-        <p:nvPr/>
-      </p:nvGrpSpPr>
-      <p:grpSpPr>
-        <a:xfrm>
-          <a:off x="0" y="0"/>
-          <a:ext cx="0" cy="0"/>
-          <a:chOff x="0" y="0"/>
-          <a:chExt cx="0" cy="0"/>
-        </a:xfrm>
-      </p:grpSpPr>
-      <p:sp>
-        <p:nvSpPr>
-          <p:cNvPr id="2" name="Text 0"/>
-          <p:cNvSpPr/>
-          <p:nvPr>
-            <p:ph idx="100" type="title" hasCustomPrompt="1"/>
-          </p:nvPr>
-        </p:nvSpPr>
-        <p:spPr>
-          <a:xfrm>
-            <a:off x="548640" y="320040"/>
-            <a:ext cx="11064240" cy="777240"/>
-          </a:xfrm>
-          <a:prstGeom prst="rect">
-            <a:avLst/>
-          </a:prstGeom>
-          <a:noFill/>
-          <a:ln/>
-        </p:spPr>
-        <p:txBody>
-          <a:bodyPr wrap="square" lIns="0" tIns="0" rIns="0" bIns="0" rtlCol="0" anchor="ctr"/>
-          <a:lstStyle/>
-          <a:p>
-            <a:pPr algn="l" indent="0" marL="0">
-              <a:buNone/>
-            </a:pPr>
-            <a:r>
-              <a:rPr lang="en-US" sz="3200" b="1" dirty="0">
-                <a:solidFill>
-                  <a:schemeClr val="tx1"/>
-                </a:solidFill>
-                <a:latin typeface="Cambria" pitchFamily="34" charset="0"/>
-                <a:ea typeface="Cambria" pitchFamily="34" charset="-122"/>
-                <a:cs typeface="Cambria" pitchFamily="34" charset="-120"/>
-              </a:rPr>
-              <a:t>Kelias į priekį</a:t>
-            </a:r>
-            <a:endParaRPr lang="en-US" sz="3200" dirty="0"/>
-          </a:p>
-        </p:txBody>
-      </p:sp>
-      <p:sp>
-        <p:nvSpPr>
-          <p:cNvPr id="3" name="road-line"/>
-          <p:cNvSpPr/>
-          <p:nvPr/>
-        </p:nvSpPr>
-        <p:spPr>
-          <a:xfrm>
-            <a:off x="914400" y="1874520"/>
-            <a:ext cx="10332720" cy="0"/>
-          </a:xfrm>
-          <a:prstGeom prst="line">
-            <a:avLst/>
-          </a:prstGeom>
-          <a:noFill/>
-          <a:ln w="25400">
-            <a:solidFill>
-              <a:schemeClr val="accent5"/>
-            </a:solidFill>
-            <a:prstDash val="solid"/>
-          </a:ln>
-        </p:spPr>
-      </p:sp>
-      <p:sp>
-        <p:nvSpPr>
-          <p:cNvPr id="4" name="road-dot-0"/>
-          <p:cNvSpPr/>
-          <p:nvPr/>
-        </p:nvSpPr>
-        <p:spPr>
-          <a:xfrm>
-            <a:off x="640080" y="1554480"/>
-            <a:ext cx="640080" cy="640080"/>
-          </a:xfrm>
-          <a:prstGeom prst="ellipse">
-            <a:avLst/>
-          </a:prstGeom>
-          <a:solidFill>
-            <a:schemeClr val="accent1"/>
-          </a:solidFill>
-          <a:ln w="38100">
-            <a:solidFill>
-              <a:schemeClr val="bg1"/>
-            </a:solidFill>
-            <a:prstDash val="solid"/>
-          </a:ln>
-        </p:spPr>
-      </p:sp>
-      <p:sp>
-        <p:nvSpPr>
-          <p:cNvPr id="5" name="Text 3"/>
-          <p:cNvSpPr txBox="1"/>
-          <p:nvPr/>
-        </p:nvSpPr>
-        <p:spPr>
-          <a:xfrm>
-            <a:off x="640080" y="1554480"/>
-            <a:ext cx="640080" cy="640080"/>
-          </a:xfrm>
-          <a:prstGeom prst="rect">
-            <a:avLst/>
-          </a:prstGeom>
-          <a:noFill/>
-          <a:ln/>
-        </p:spPr>
-        <p:txBody>
-          <a:bodyPr wrap="square" lIns="0" tIns="0" rIns="0" bIns="0" rtlCol="0" anchor="ctr"/>
-          <a:lstStyle/>
-          <a:p>
-            <a:pPr algn="ctr" indent="0" marL="0">
-              <a:buNone/>
-            </a:pPr>
-            <a:r>
-              <a:rPr lang="en-US" sz="1800" b="1" dirty="0">
-                <a:solidFill>
-                  <a:schemeClr val="bg1"/>
-                </a:solidFill>
-              </a:rPr>
-              <a:t>1</a:t>
-            </a:r>
-            <a:endParaRPr lang="en-US" sz="1800" dirty="0"/>
-          </a:p>
-        </p:txBody>
-      </p:sp>
-      <p:sp>
-        <p:nvSpPr>
-          <p:cNvPr id="6" name="road-card-0"/>
-          <p:cNvSpPr/>
-          <p:nvPr/>
-        </p:nvSpPr>
-        <p:spPr>
-          <a:xfrm>
-            <a:off x="548640" y="2514600"/>
-            <a:ext cx="3474720" cy="2651760"/>
-          </a:xfrm>
-          <a:prstGeom prst="roundRect">
-            <a:avLst>
-              <a:gd name="adj" fmla="val 4138"/>
-            </a:avLst>
-          </a:prstGeom>
-          <a:solidFill>
-            <a:schemeClr val="bg2"/>
-          </a:solidFill>
-          <a:ln/>
-        </p:spPr>
-      </p:sp>
-      <p:sp>
-        <p:nvSpPr>
-          <p:cNvPr id="7" name="Text 5"/>
-          <p:cNvSpPr txBox="1"/>
-          <p:nvPr/>
-        </p:nvSpPr>
-        <p:spPr>
-          <a:xfrm>
-            <a:off x="822960" y="2697480"/>
-            <a:ext cx="2926080" cy="411480"/>
-          </a:xfrm>
-          <a:prstGeom prst="rect">
-            <a:avLst/>
-          </a:prstGeom>
-          <a:noFill/>
-          <a:ln/>
-        </p:spPr>
-        <p:txBody>
-          <a:bodyPr wrap="square" lIns="0" tIns="0" rIns="0" bIns="0" rtlCol="0" anchor="t"/>
-          <a:lstStyle/>
-          <a:p>
-            <a:pPr indent="0" marL="0">
-              <a:buNone/>
-            </a:pPr>
-            <a:r>
-              <a:rPr lang="en-US" sz="2000" b="1" dirty="0">
-                <a:solidFill>
-                  <a:schemeClr val="tx1"/>
-                </a:solidFill>
-                <a:latin typeface="Cambria" pitchFamily="34" charset="0"/>
-                <a:ea typeface="Cambria" pitchFamily="34" charset="-122"/>
-                <a:cs typeface="Cambria" pitchFamily="34" charset="-120"/>
-              </a:rPr>
-              <a:t>Artimiausia versija</a:t>
-            </a:r>
-            <a:endParaRPr lang="en-US" sz="2000" dirty="0"/>
-          </a:p>
-        </p:txBody>
-      </p:sp>
-      <p:sp>
-        <p:nvSpPr>
-          <p:cNvPr id="8" name="Text 6"/>
-          <p:cNvSpPr txBox="1"/>
-          <p:nvPr/>
-        </p:nvSpPr>
-        <p:spPr>
-          <a:xfrm>
-            <a:off x="822960" y="3108960"/>
-            <a:ext cx="2926080" cy="365760"/>
-          </a:xfrm>
-          <a:prstGeom prst="rect">
-            <a:avLst/>
-          </a:prstGeom>
-          <a:noFill/>
-          <a:ln/>
-        </p:spPr>
-        <p:txBody>
-          <a:bodyPr wrap="square" lIns="0" tIns="0" rIns="0" bIns="0" rtlCol="0" anchor="t"/>
-          <a:lstStyle/>
-          <a:p>
-            <a:pPr indent="0" marL="0">
-              <a:buNone/>
-            </a:pPr>
-            <a:r>
-              <a:rPr lang="en-US" sz="1400" i="1" dirty="0">
-                <a:solidFill>
-                  <a:schemeClr val="accent4"/>
-                </a:solidFill>
-              </a:rPr>
-              <a:t>v0.46</a:t>
-            </a:r>
-            <a:endParaRPr lang="en-US" sz="1400" dirty="0"/>
-          </a:p>
-        </p:txBody>
-      </p:sp>
-      <p:sp>
-        <p:nvSpPr>
-          <p:cNvPr id="9" name="Text 7"/>
-          <p:cNvSpPr txBox="1"/>
-          <p:nvPr/>
-        </p:nvSpPr>
-        <p:spPr>
-          <a:xfrm>
-            <a:off x="822960" y="3611880"/>
-            <a:ext cx="2926080" cy="2011680"/>
-          </a:xfrm>
-          <a:prstGeom prst="rect">
-            <a:avLst/>
-          </a:prstGeom>
-          <a:noFill/>
-          <a:ln/>
-        </p:spPr>
-        <p:txBody>
-          <a:bodyPr wrap="square" lIns="0" tIns="0" rIns="0" bIns="0" rtlCol="0" anchor="t"/>
-          <a:lstStyle/>
-          <a:p>
-            <a:pPr marL="342900" indent="-342900">
-              <a:spcAft>
-                <a:spcPts val="600"/>
-              </a:spcAft>
-              <a:buSzPct val="100000"/>
-              <a:buChar char="•"/>
-            </a:pPr>
-            <a:r>
-              <a:rPr lang="en-US" sz="1400" dirty="0">
-                <a:solidFill>
-                  <a:schemeClr val="tx1"/>
-                </a:solidFill>
-              </a:rPr>
-              <a:t>Buveinės praradimo rizika (Probability 1D)</a:t>
-            </a:r>
-            <a:endParaRPr lang="en-US" sz="1400" dirty="0"/>
-          </a:p>
-          <a:p>
-            <a:pPr marL="342900" indent="-342900">
-              <a:spcAft>
-                <a:spcPts val="600"/>
-              </a:spcAft>
-              <a:buSzPct val="100000"/>
-              <a:buChar char="•"/>
-            </a:pPr>
-            <a:r>
-              <a:rPr lang="en-US" sz="1400" dirty="0">
-                <a:solidFill>
-                  <a:schemeClr val="tx1"/>
-                </a:solidFill>
-              </a:rPr>
-              <a:t>Suderinimas su Marxan 3 tikimybių logika</a:t>
-            </a:r>
-            <a:endParaRPr lang="en-US" sz="1400" dirty="0"/>
-          </a:p>
-        </p:txBody>
-      </p:sp>
-      <p:sp>
-        <p:nvSpPr>
-          <p:cNvPr id="10" name="road-dot-1"/>
-          <p:cNvSpPr/>
-          <p:nvPr/>
-        </p:nvSpPr>
-        <p:spPr>
-          <a:xfrm>
-            <a:off x="4389120" y="1554480"/>
-            <a:ext cx="640080" cy="640080"/>
-          </a:xfrm>
-          <a:prstGeom prst="ellipse">
-            <a:avLst/>
-          </a:prstGeom>
-          <a:solidFill>
-            <a:schemeClr val="accent1"/>
-          </a:solidFill>
-          <a:ln w="38100">
-            <a:solidFill>
-              <a:schemeClr val="bg1"/>
-            </a:solidFill>
-            <a:prstDash val="solid"/>
-          </a:ln>
-        </p:spPr>
-      </p:sp>
-      <p:sp>
-        <p:nvSpPr>
-          <p:cNvPr id="11" name="Text 9"/>
-          <p:cNvSpPr txBox="1"/>
-          <p:nvPr/>
-        </p:nvSpPr>
-        <p:spPr>
-          <a:xfrm>
-            <a:off x="4389120" y="1554480"/>
-            <a:ext cx="640080" cy="640080"/>
-          </a:xfrm>
-          <a:prstGeom prst="rect">
-            <a:avLst/>
-          </a:prstGeom>
-          <a:noFill/>
-          <a:ln/>
-        </p:spPr>
-        <p:txBody>
-          <a:bodyPr wrap="square" lIns="0" tIns="0" rIns="0" bIns="0" rtlCol="0" anchor="ctr"/>
-          <a:lstStyle/>
-          <a:p>
-            <a:pPr algn="ctr" indent="0" marL="0">
-              <a:buNone/>
-            </a:pPr>
-            <a:r>
-              <a:rPr lang="en-US" sz="1800" b="1" dirty="0">
-                <a:solidFill>
-                  <a:schemeClr val="bg1"/>
-                </a:solidFill>
-              </a:rPr>
-              <a:t>2</a:t>
-            </a:r>
-            <a:endParaRPr lang="en-US" sz="1800" dirty="0"/>
-          </a:p>
-        </p:txBody>
-      </p:sp>
-      <p:sp>
-        <p:nvSpPr>
-          <p:cNvPr id="12" name="road-card-1"/>
-          <p:cNvSpPr/>
-          <p:nvPr/>
-        </p:nvSpPr>
-        <p:spPr>
-          <a:xfrm>
-            <a:off x="4297680" y="2514600"/>
-            <a:ext cx="3474720" cy="2651760"/>
-          </a:xfrm>
-          <a:prstGeom prst="roundRect">
-            <a:avLst>
-              <a:gd name="adj" fmla="val 4138"/>
-            </a:avLst>
-          </a:prstGeom>
-          <a:solidFill>
-            <a:schemeClr val="bg2"/>
-          </a:solidFill>
-          <a:ln/>
-        </p:spPr>
-      </p:sp>
-      <p:sp>
-        <p:nvSpPr>
-          <p:cNvPr id="13" name="Text 11"/>
-          <p:cNvSpPr txBox="1"/>
-          <p:nvPr/>
-        </p:nvSpPr>
-        <p:spPr>
-          <a:xfrm>
-            <a:off x="4572000" y="2697480"/>
-            <a:ext cx="2926080" cy="411480"/>
-          </a:xfrm>
-          <a:prstGeom prst="rect">
-            <a:avLst/>
-          </a:prstGeom>
-          <a:noFill/>
-          <a:ln/>
-        </p:spPr>
-        <p:txBody>
-          <a:bodyPr wrap="square" lIns="0" tIns="0" rIns="0" bIns="0" rtlCol="0" anchor="t"/>
-          <a:lstStyle/>
-          <a:p>
-            <a:pPr indent="0" marL="0">
-              <a:buNone/>
-            </a:pPr>
-            <a:r>
-              <a:rPr lang="en-US" sz="2000" b="1" dirty="0">
-                <a:solidFill>
-                  <a:schemeClr val="tx1"/>
-                </a:solidFill>
-                <a:latin typeface="Cambria" pitchFamily="34" charset="0"/>
-                <a:ea typeface="Cambria" pitchFamily="34" charset="-122"/>
-                <a:cs typeface="Cambria" pitchFamily="34" charset="-120"/>
-              </a:rPr>
-              <a:t>Platinimui</a:t>
-            </a:r>
-            <a:endParaRPr lang="en-US" sz="2000" dirty="0"/>
-          </a:p>
-        </p:txBody>
-      </p:sp>
-      <p:sp>
-        <p:nvSpPr>
-          <p:cNvPr id="14" name="Text 12"/>
-          <p:cNvSpPr txBox="1"/>
-          <p:nvPr/>
-        </p:nvSpPr>
-        <p:spPr>
-          <a:xfrm>
-            <a:off x="4572000" y="3108960"/>
-            <a:ext cx="2926080" cy="365760"/>
-          </a:xfrm>
-          <a:prstGeom prst="rect">
-            <a:avLst/>
-          </a:prstGeom>
-          <a:noFill/>
-          <a:ln/>
-        </p:spPr>
-        <p:txBody>
-          <a:bodyPr wrap="square" lIns="0" tIns="0" rIns="0" bIns="0" rtlCol="0" anchor="t"/>
-          <a:lstStyle/>
-          <a:p>
-            <a:pPr indent="0" marL="0">
-              <a:buNone/>
-            </a:pPr>
-            <a:r>
-              <a:rPr lang="en-US" sz="1400" i="1" dirty="0">
-                <a:solidFill>
-                  <a:schemeClr val="accent4"/>
-                </a:solidFill>
-              </a:rPr>
-              <a:t>diegimas</a:t>
-            </a:r>
-            <a:endParaRPr lang="en-US" sz="1400" dirty="0"/>
-          </a:p>
-        </p:txBody>
-      </p:sp>
-      <p:sp>
-        <p:nvSpPr>
-          <p:cNvPr id="15" name="Text 13"/>
-          <p:cNvSpPr txBox="1"/>
-          <p:nvPr/>
-        </p:nvSpPr>
-        <p:spPr>
-          <a:xfrm>
-            <a:off x="4572000" y="3611880"/>
-            <a:ext cx="2926080" cy="2011680"/>
-          </a:xfrm>
-          <a:prstGeom prst="rect">
-            <a:avLst/>
-          </a:prstGeom>
-          <a:noFill/>
-          <a:ln/>
-        </p:spPr>
-        <p:txBody>
-          <a:bodyPr wrap="square" lIns="0" tIns="0" rIns="0" bIns="0" rtlCol="0" anchor="t"/>
-          <a:lstStyle/>
-          <a:p>
-            <a:pPr marL="342900" indent="-342900">
-              <a:spcAft>
-                <a:spcPts val="600"/>
-              </a:spcAft>
-              <a:buSzPct val="100000"/>
-              <a:buChar char="•"/>
-            </a:pPr>
-            <a:r>
-              <a:rPr lang="en-US" sz="1400" dirty="0">
-                <a:solidFill>
-                  <a:schemeClr val="tx1"/>
-                </a:solidFill>
-              </a:rPr>
-              <a:t>Paketas PyPI kataloge</a:t>
-            </a:r>
-            <a:endParaRPr lang="en-US" sz="1400" dirty="0"/>
-          </a:p>
-          <a:p>
-            <a:pPr marL="342900" indent="-342900">
-              <a:spcAft>
-                <a:spcPts val="600"/>
-              </a:spcAft>
-              <a:buSzPct val="100000"/>
-              <a:buChar char="•"/>
-            </a:pPr>
-            <a:r>
-              <a:rPr lang="en-US" sz="1400" dirty="0">
-                <a:solidFill>
-                  <a:schemeClr val="tx1"/>
-                </a:solidFill>
-              </a:rPr>
-              <a:t>Lietuviška sąsaja</a:t>
-            </a:r>
-            <a:endParaRPr lang="en-US" sz="1400" dirty="0"/>
-          </a:p>
-          <a:p>
-            <a:pPr marL="342900" indent="-342900">
-              <a:spcAft>
-                <a:spcPts val="600"/>
-              </a:spcAft>
-              <a:buSzPct val="100000"/>
-              <a:buChar char="•"/>
-            </a:pPr>
-            <a:r>
-              <a:rPr lang="en-US" sz="1400" dirty="0">
-                <a:solidFill>
-                  <a:schemeClr val="tx1"/>
-                </a:solidFill>
-              </a:rPr>
-              <a:t>Tikslo pasirinkimas internetinėje programoje</a:t>
-            </a:r>
-            <a:endParaRPr lang="en-US" sz="1400" dirty="0"/>
-          </a:p>
-        </p:txBody>
-      </p:sp>
-      <p:sp>
-        <p:nvSpPr>
-          <p:cNvPr id="16" name="road-dot-2"/>
-          <p:cNvSpPr/>
-          <p:nvPr/>
-        </p:nvSpPr>
-        <p:spPr>
-          <a:xfrm>
-            <a:off x="8138160" y="1554480"/>
-            <a:ext cx="640080" cy="640080"/>
-          </a:xfrm>
-          <a:prstGeom prst="ellipse">
-            <a:avLst/>
-          </a:prstGeom>
-          <a:solidFill>
-            <a:schemeClr val="accent2"/>
-          </a:solidFill>
-          <a:ln w="38100">
-            <a:solidFill>
-              <a:schemeClr val="bg1"/>
-            </a:solidFill>
-            <a:prstDash val="solid"/>
-          </a:ln>
-        </p:spPr>
-      </p:sp>
-      <p:sp>
-        <p:nvSpPr>
-          <p:cNvPr id="17" name="Text 15"/>
-          <p:cNvSpPr txBox="1"/>
-          <p:nvPr/>
-        </p:nvSpPr>
-        <p:spPr>
-          <a:xfrm>
-            <a:off x="8138160" y="1554480"/>
-            <a:ext cx="640080" cy="640080"/>
-          </a:xfrm>
-          <a:prstGeom prst="rect">
-            <a:avLst/>
-          </a:prstGeom>
-          <a:noFill/>
-          <a:ln/>
-        </p:spPr>
-        <p:txBody>
-          <a:bodyPr wrap="square" lIns="0" tIns="0" rIns="0" bIns="0" rtlCol="0" anchor="ctr"/>
-          <a:lstStyle/>
-          <a:p>
-            <a:pPr algn="ctr" indent="0" marL="0">
-              <a:buNone/>
-            </a:pPr>
-            <a:r>
-              <a:rPr lang="en-US" sz="1800" b="1" dirty="0">
-                <a:solidFill>
-                  <a:schemeClr val="bg1"/>
-                </a:solidFill>
-              </a:rPr>
-              <a:t>3</a:t>
-            </a:r>
-            <a:endParaRPr lang="en-US" sz="1800" dirty="0"/>
-          </a:p>
-        </p:txBody>
-      </p:sp>
-      <p:sp>
-        <p:nvSpPr>
-          <p:cNvPr id="18" name="road-card-2"/>
-          <p:cNvSpPr/>
-          <p:nvPr/>
-        </p:nvSpPr>
-        <p:spPr>
-          <a:xfrm>
-            <a:off x="8046720" y="2514600"/>
-            <a:ext cx="3474720" cy="2651760"/>
-          </a:xfrm>
-          <a:prstGeom prst="roundRect">
-            <a:avLst>
-              <a:gd name="adj" fmla="val 4138"/>
-            </a:avLst>
-          </a:prstGeom>
-          <a:solidFill>
-            <a:schemeClr val="bg2"/>
-          </a:solidFill>
-          <a:ln/>
-        </p:spPr>
-      </p:sp>
-      <p:sp>
-        <p:nvSpPr>
-          <p:cNvPr id="19" name="Text 17"/>
-          <p:cNvSpPr txBox="1"/>
-          <p:nvPr/>
-        </p:nvSpPr>
-        <p:spPr>
-          <a:xfrm>
-            <a:off x="8321040" y="2697480"/>
-            <a:ext cx="2926080" cy="411480"/>
-          </a:xfrm>
-          <a:prstGeom prst="rect">
-            <a:avLst/>
-          </a:prstGeom>
-          <a:noFill/>
-          <a:ln/>
-        </p:spPr>
-        <p:txBody>
-          <a:bodyPr wrap="square" lIns="0" tIns="0" rIns="0" bIns="0" rtlCol="0" anchor="t"/>
-          <a:lstStyle/>
-          <a:p>
-            <a:pPr indent="0" marL="0">
-              <a:buNone/>
-            </a:pPr>
-            <a:r>
-              <a:rPr lang="en-US" sz="2000" b="1" dirty="0">
-                <a:solidFill>
-                  <a:schemeClr val="tx1"/>
-                </a:solidFill>
-                <a:latin typeface="Cambria" pitchFamily="34" charset="0"/>
-                <a:ea typeface="Cambria" pitchFamily="34" charset="-122"/>
-                <a:cs typeface="Cambria" pitchFamily="34" charset="-120"/>
-              </a:rPr>
-              <a:t>Kartu su jumis</a:t>
-            </a:r>
-            <a:endParaRPr lang="en-US" sz="2000" dirty="0"/>
-          </a:p>
-        </p:txBody>
-      </p:sp>
-      <p:sp>
-        <p:nvSpPr>
-          <p:cNvPr id="20" name="Text 18"/>
-          <p:cNvSpPr txBox="1"/>
-          <p:nvPr/>
-        </p:nvSpPr>
-        <p:spPr>
-          <a:xfrm>
-            <a:off x="8321040" y="3108960"/>
-            <a:ext cx="2926080" cy="365760"/>
-          </a:xfrm>
-          <a:prstGeom prst="rect">
-            <a:avLst/>
-          </a:prstGeom>
-          <a:noFill/>
-          <a:ln/>
-        </p:spPr>
-        <p:txBody>
-          <a:bodyPr wrap="square" lIns="0" tIns="0" rIns="0" bIns="0" rtlCol="0" anchor="t"/>
-          <a:lstStyle/>
-          <a:p>
-            <a:pPr indent="0" marL="0">
-              <a:buNone/>
-            </a:pPr>
-            <a:r>
-              <a:rPr lang="en-US" sz="1400" i="1" dirty="0">
-                <a:solidFill>
-                  <a:schemeClr val="accent4"/>
-                </a:solidFill>
-              </a:rPr>
-              <a:t>pilotas</a:t>
-            </a:r>
-            <a:endParaRPr lang="en-US" sz="1400" dirty="0"/>
-          </a:p>
-        </p:txBody>
-      </p:sp>
-      <p:sp>
-        <p:nvSpPr>
-          <p:cNvPr id="21" name="Text 19"/>
-          <p:cNvSpPr txBox="1"/>
-          <p:nvPr/>
-        </p:nvSpPr>
-        <p:spPr>
-          <a:xfrm>
-            <a:off x="8321040" y="3611880"/>
-            <a:ext cx="2926080" cy="2011680"/>
-          </a:xfrm>
-          <a:prstGeom prst="rect">
-            <a:avLst/>
-          </a:prstGeom>
-          <a:noFill/>
-          <a:ln/>
-        </p:spPr>
-        <p:txBody>
-          <a:bodyPr wrap="square" lIns="0" tIns="0" rIns="0" bIns="0" rtlCol="0" anchor="t"/>
-          <a:lstStyle/>
-          <a:p>
-            <a:pPr marL="342900" indent="-342900">
-              <a:spcAft>
-                <a:spcPts val="600"/>
-              </a:spcAft>
-              <a:buSzPct val="100000"/>
-              <a:buChar char="•"/>
-            </a:pPr>
-            <a:r>
-              <a:rPr lang="en-US" sz="1400" dirty="0">
-                <a:solidFill>
-                  <a:schemeClr val="tx1"/>
-                </a:solidFill>
-              </a:rPr>
-              <a:t>Bandomasis projektas vienoje teritorijoje</a:t>
-            </a:r>
-            <a:endParaRPr lang="en-US" sz="1400" dirty="0"/>
-          </a:p>
-          <a:p>
-            <a:pPr marL="342900" indent="-342900">
-              <a:spcAft>
-                <a:spcPts val="600"/>
-              </a:spcAft>
-              <a:buSzPct val="100000"/>
-              <a:buChar char="•"/>
-            </a:pPr>
-            <a:r>
-              <a:rPr lang="en-US" sz="1400" dirty="0">
-                <a:solidFill>
-                  <a:schemeClr val="tx1"/>
-                </a:solidFill>
-              </a:rPr>
-              <a:t>Tolesnių funkcijų eiliškumas pagal jūsų poreikius</a:t>
-            </a:r>
-            <a:endParaRPr lang="en-US" sz="1400" dirty="0"/>
-          </a:p>
-        </p:txBody>
-      </p:sp>
-      <p:sp>
-        <p:nvSpPr>
-          <p:cNvPr id="25" name="Slide Number Placeholder 0"/>
-          <p:cNvSpPr>
-            <a:spLocks noGrp="1"/>
-          </p:cNvSpPr>
-          <p:nvPr>
-            <p:ph type="sldNum" sz="quarter" idx="4294967295"/>
-          </p:nvPr>
-        </p:nvSpPr>
-        <p:spPr>
-          <a:xfrm>
-            <a:off x="11064240" y="6355080"/>
-            <a:ext cx="548640" cy="274320"/>
-          </a:xfrm>
-          <a:prstGeom prst="rect">
-            <a:avLst/>
-          </a:prstGeom>
-          <a:extLst>
-            <a:ext uri="{C572A759-6A51-4108-AA02-DFA0A04FC94B}">
-              <ma14:wrappingTextBoxFlag xmlns:ma14="http://schemas.microsoft.com/office/mac/drawingml/2011/main" val="0"/>
-            </a:ext>
-          </a:extLst>
-        </p:spPr>
-        <p:txBody>
-          <a:bodyPr/>
-          <a:lstStyle>
-            <a:lvl1pPr>
-              <a:defRPr sz="1000">
-                <a:solidFill>
-                  <a:schemeClr val="accent4"/>
-                </a:solidFill>
-              </a:defRPr>
-            </a:lvl1pPr>
-          </a:lstStyle>
-          <a:p>
-            <a:pPr algn="r"/>
-            <a:fld id="{F7021451-1387-4CA6-816F-3879F97B5CBC}" type="slidenum">
-              <a:rPr b="0" lang="en-US"/>
               <a:t>14</a:t>
             </a:fld>
             <a:endParaRPr lang="en-US"/>
@@ -6910,7 +6853,7 @@
                 <a:ea typeface="Cambria" pitchFamily="34" charset="-122"/>
                 <a:cs typeface="Cambria" pitchFamily="34" charset="-120"/>
               </a:rPr>
-              <a:t>Ko reikėtų bandomajam projektui</a:t>
+              <a:t>Kelias į priekį</a:t>
             </a:r>
             <a:endParaRPr lang="en-US" sz="3200" dirty="0"/>
           </a:p>
@@ -6918,18 +6861,102 @@
       </p:sp>
       <p:sp>
         <p:nvSpPr>
-          <p:cNvPr id="3" name="need-card-0"/>
-          <p:cNvSpPr/>
-          <p:nvPr/>
-        </p:nvSpPr>
-        <p:spPr>
-          <a:xfrm>
-            <a:off x="548640" y="1371600"/>
-            <a:ext cx="3474720" cy="2148840"/>
+          <p:cNvPr id="3" name="road-line"/>
+          <p:cNvSpPr/>
+          <p:nvPr/>
+        </p:nvSpPr>
+        <p:spPr>
+          <a:xfrm>
+            <a:off x="914400" y="1874520"/>
+            <a:ext cx="10332720" cy="0"/>
+          </a:xfrm>
+          <a:prstGeom prst="line">
+            <a:avLst/>
+          </a:prstGeom>
+          <a:noFill/>
+          <a:ln w="25400">
+            <a:solidFill>
+              <a:schemeClr val="accent5"/>
+            </a:solidFill>
+            <a:prstDash val="solid"/>
+          </a:ln>
+        </p:spPr>
+      </p:sp>
+      <p:sp>
+        <p:nvSpPr>
+          <p:cNvPr id="4" name="road-dot-0"/>
+          <p:cNvSpPr/>
+          <p:nvPr/>
+        </p:nvSpPr>
+        <p:spPr>
+          <a:xfrm>
+            <a:off x="640080" y="1554480"/>
+            <a:ext cx="640080" cy="640080"/>
+          </a:xfrm>
+          <a:prstGeom prst="ellipse">
+            <a:avLst/>
+          </a:prstGeom>
+          <a:solidFill>
+            <a:schemeClr val="accent1"/>
+          </a:solidFill>
+          <a:ln w="38100">
+            <a:solidFill>
+              <a:schemeClr val="bg1"/>
+            </a:solidFill>
+            <a:prstDash val="solid"/>
+          </a:ln>
+        </p:spPr>
+      </p:sp>
+      <p:sp>
+        <p:nvSpPr>
+          <p:cNvPr id="5" name="Text 3"/>
+          <p:cNvSpPr txBox="1"/>
+          <p:nvPr/>
+        </p:nvSpPr>
+        <p:spPr>
+          <a:xfrm>
+            <a:off x="640080" y="1554480"/>
+            <a:ext cx="640080" cy="640080"/>
+          </a:xfrm>
+          <a:prstGeom prst="rect">
+            <a:avLst/>
+          </a:prstGeom>
+          <a:noFill/>
+          <a:ln/>
+        </p:spPr>
+        <p:txBody>
+          <a:bodyPr wrap="square" lIns="0" tIns="0" rIns="0" bIns="0" rtlCol="0" anchor="ctr"/>
+          <a:lstStyle/>
+          <a:p>
+            <a:pPr algn="ctr" indent="0" marL="0">
+              <a:buNone/>
+            </a:pPr>
+            <a:r>
+              <a:rPr lang="en-US" sz="1800" b="1" dirty="0">
+                <a:solidFill>
+                  <a:schemeClr val="bg1"/>
+                </a:solidFill>
+              </a:rPr>
+              <a:t>1</a:t>
+            </a:r>
+            <a:endParaRPr lang="en-US" sz="1800" dirty="0"/>
+          </a:p>
+        </p:txBody>
+      </p:sp>
+      <p:sp>
+        <p:nvSpPr>
+          <p:cNvPr id="6" name="road-card-0"/>
+          <p:cNvSpPr/>
+          <p:nvPr/>
+        </p:nvSpPr>
+        <p:spPr>
+          <a:xfrm>
+            <a:off x="548640" y="2514600"/>
+            <a:ext cx="3474720" cy="2651760"/>
           </a:xfrm>
           <a:prstGeom prst="roundRect">
             <a:avLst>
-              <a:gd name="adj" fmla="val 5106"/>
+              <a:gd name="adj" fmla="val 4138"/>
             </a:avLst>
           </a:prstGeom>
           <a:solidFill>
@@ -6940,58 +6967,14 @@
       </p:sp>
       <p:sp>
         <p:nvSpPr>
-          <p:cNvPr id="4" name="need-0-circle"/>
-          <p:cNvSpPr/>
-          <p:nvPr/>
-        </p:nvSpPr>
-        <p:spPr>
-          <a:xfrm>
-            <a:off x="777240" y="1645920"/>
-            <a:ext cx="640080" cy="640080"/>
-          </a:xfrm>
-          <a:prstGeom prst="ellipse">
-            <a:avLst/>
-          </a:prstGeom>
-          <a:solidFill>
-            <a:schemeClr val="accent1"/>
-          </a:solidFill>
-          <a:ln/>
-        </p:spPr>
-      </p:sp>
-      <p:pic>
-        <p:nvPicPr>
-          <p:cNvPr id="5" name="need-0-icon" descr="preencoded.png">    </p:cNvPr>
-          <p:cNvPicPr>
-            <a:picLocks noChangeAspect="1"/>
-          </p:cNvPicPr>
-          <p:nvPr/>
-        </p:nvPicPr>
-        <p:blipFill>
-          <a:blip r:embed="rId1"/>
-          <a:stretch>
-            <a:fillRect/>
-          </a:stretch>
-        </p:blipFill>
-        <p:spPr>
-          <a:xfrm>
-            <a:off x="930859" y="1799539"/>
-            <a:ext cx="332842" cy="332842"/>
-          </a:xfrm>
-          <a:prstGeom prst="rect">
-            <a:avLst/>
-          </a:prstGeom>
-        </p:spPr>
-      </p:pic>
-      <p:sp>
-        <p:nvSpPr>
-          <p:cNvPr id="6" name="Text 3"/>
+          <p:cNvPr id="7" name="Text 5"/>
           <p:cNvSpPr txBox="1"/>
           <p:nvPr/>
         </p:nvSpPr>
         <p:spPr>
           <a:xfrm>
-            <a:off x="1600200" y="1645920"/>
-            <a:ext cx="2240280" cy="640080"/>
+            <a:off x="822960" y="2697480"/>
+            <a:ext cx="2926080" cy="411480"/>
           </a:xfrm>
           <a:prstGeom prst="rect">
             <a:avLst/>
@@ -7000,14 +6983,14 @@
           <a:ln/>
         </p:spPr>
         <p:txBody>
-          <a:bodyPr wrap="square" lIns="0" tIns="0" rIns="0" bIns="0" rtlCol="0" anchor="ctr"/>
+          <a:bodyPr wrap="square" lIns="0" tIns="0" rIns="0" bIns="0" rtlCol="0" anchor="t"/>
           <a:lstStyle/>
           <a:p>
             <a:pPr indent="0" marL="0">
               <a:buNone/>
             </a:pPr>
             <a:r>
-              <a:rPr lang="en-US" sz="1800" b="1" dirty="0">
+              <a:rPr lang="en-US" sz="2000" b="1" dirty="0">
                 <a:solidFill>
                   <a:schemeClr val="tx1"/>
                 </a:solidFill>
@@ -7015,22 +6998,22 @@
                 <a:ea typeface="Cambria" pitchFamily="34" charset="-122"/>
                 <a:cs typeface="Cambria" pitchFamily="34" charset="-120"/>
               </a:rPr>
-              <a:t>Vertybių duomenys</a:t>
-            </a:r>
-            <a:endParaRPr lang="en-US" sz="1800" dirty="0"/>
-          </a:p>
-        </p:txBody>
-      </p:sp>
-      <p:sp>
-        <p:nvSpPr>
-          <p:cNvPr id="7" name="Text 4"/>
+              <a:t>Artimiausia versija</a:t>
+            </a:r>
+            <a:endParaRPr lang="en-US" sz="2000" dirty="0"/>
+          </a:p>
+        </p:txBody>
+      </p:sp>
+      <p:sp>
+        <p:nvSpPr>
+          <p:cNvPr id="8" name="Text 6"/>
           <p:cNvSpPr txBox="1"/>
           <p:nvPr/>
         </p:nvSpPr>
         <p:spPr>
           <a:xfrm>
-            <a:off x="777240" y="2423160"/>
-            <a:ext cx="3017520" cy="960120"/>
+            <a:off x="822960" y="3108960"/>
+            <a:ext cx="2926080" cy="365760"/>
           </a:xfrm>
           <a:prstGeom prst="rect">
             <a:avLst/>
@@ -7046,31 +7029,150 @@
               <a:buNone/>
             </a:pPr>
             <a:r>
+              <a:rPr lang="en-US" sz="1400" i="1" dirty="0">
+                <a:solidFill>
+                  <a:schemeClr val="accent4"/>
+                </a:solidFill>
+              </a:rPr>
+              <a:t>v0.46</a:t>
+            </a:r>
+            <a:endParaRPr lang="en-US" sz="1400" dirty="0"/>
+          </a:p>
+        </p:txBody>
+      </p:sp>
+      <p:sp>
+        <p:nvSpPr>
+          <p:cNvPr id="9" name="Text 7"/>
+          <p:cNvSpPr txBox="1"/>
+          <p:nvPr/>
+        </p:nvSpPr>
+        <p:spPr>
+          <a:xfrm>
+            <a:off x="822960" y="3611880"/>
+            <a:ext cx="2926080" cy="2011680"/>
+          </a:xfrm>
+          <a:prstGeom prst="rect">
+            <a:avLst/>
+          </a:prstGeom>
+          <a:noFill/>
+          <a:ln/>
+        </p:spPr>
+        <p:txBody>
+          <a:bodyPr wrap="square" lIns="0" tIns="0" rIns="0" bIns="0" rtlCol="0" anchor="t"/>
+          <a:lstStyle/>
+          <a:p>
+            <a:pPr marL="342900" indent="-342900">
+              <a:spcAft>
+                <a:spcPts val="600"/>
+              </a:spcAft>
+              <a:buSzPct val="100000"/>
+              <a:buChar char="•"/>
+            </a:pPr>
+            <a:r>
               <a:rPr lang="en-US" sz="1400" dirty="0">
                 <a:solidFill>
                   <a:schemeClr val="tx1"/>
                 </a:solidFill>
               </a:rPr>
-              <a:t>Buveinių ir rūšių žemėlapiai, Natura 2000 vertybės, inventorizacijos</a:t>
+              <a:t>Buveinės praradimo rizika (Probability 1D)</a:t>
             </a:r>
             <a:endParaRPr lang="en-US" sz="1400" dirty="0"/>
           </a:p>
-        </p:txBody>
-      </p:sp>
-      <p:sp>
-        <p:nvSpPr>
-          <p:cNvPr id="8" name="need-card-1"/>
-          <p:cNvSpPr/>
-          <p:nvPr/>
-        </p:nvSpPr>
-        <p:spPr>
-          <a:xfrm>
-            <a:off x="4251960" y="1371600"/>
-            <a:ext cx="3474720" cy="2148840"/>
+          <a:p>
+            <a:pPr marL="342900" indent="-342900">
+              <a:spcAft>
+                <a:spcPts val="600"/>
+              </a:spcAft>
+              <a:buSzPct val="100000"/>
+              <a:buChar char="•"/>
+            </a:pPr>
+            <a:r>
+              <a:rPr lang="en-US" sz="1400" dirty="0">
+                <a:solidFill>
+                  <a:schemeClr val="tx1"/>
+                </a:solidFill>
+              </a:rPr>
+              <a:t>Suderinimas su Marxan 3 tikimybių logika</a:t>
+            </a:r>
+            <a:endParaRPr lang="en-US" sz="1400" dirty="0"/>
+          </a:p>
+        </p:txBody>
+      </p:sp>
+      <p:sp>
+        <p:nvSpPr>
+          <p:cNvPr id="10" name="road-dot-1"/>
+          <p:cNvSpPr/>
+          <p:nvPr/>
+        </p:nvSpPr>
+        <p:spPr>
+          <a:xfrm>
+            <a:off x="4389120" y="1554480"/>
+            <a:ext cx="640080" cy="640080"/>
+          </a:xfrm>
+          <a:prstGeom prst="ellipse">
+            <a:avLst/>
+          </a:prstGeom>
+          <a:solidFill>
+            <a:schemeClr val="accent1"/>
+          </a:solidFill>
+          <a:ln w="38100">
+            <a:solidFill>
+              <a:schemeClr val="bg1"/>
+            </a:solidFill>
+            <a:prstDash val="solid"/>
+          </a:ln>
+        </p:spPr>
+      </p:sp>
+      <p:sp>
+        <p:nvSpPr>
+          <p:cNvPr id="11" name="Text 9"/>
+          <p:cNvSpPr txBox="1"/>
+          <p:nvPr/>
+        </p:nvSpPr>
+        <p:spPr>
+          <a:xfrm>
+            <a:off x="4389120" y="1554480"/>
+            <a:ext cx="640080" cy="640080"/>
+          </a:xfrm>
+          <a:prstGeom prst="rect">
+            <a:avLst/>
+          </a:prstGeom>
+          <a:noFill/>
+          <a:ln/>
+        </p:spPr>
+        <p:txBody>
+          <a:bodyPr wrap="square" lIns="0" tIns="0" rIns="0" bIns="0" rtlCol="0" anchor="ctr"/>
+          <a:lstStyle/>
+          <a:p>
+            <a:pPr algn="ctr" indent="0" marL="0">
+              <a:buNone/>
+            </a:pPr>
+            <a:r>
+              <a:rPr lang="en-US" sz="1800" b="1" dirty="0">
+                <a:solidFill>
+                  <a:schemeClr val="bg1"/>
+                </a:solidFill>
+              </a:rPr>
+              <a:t>2</a:t>
+            </a:r>
+            <a:endParaRPr lang="en-US" sz="1800" dirty="0"/>
+          </a:p>
+        </p:txBody>
+      </p:sp>
+      <p:sp>
+        <p:nvSpPr>
+          <p:cNvPr id="12" name="road-card-1"/>
+          <p:cNvSpPr/>
+          <p:nvPr/>
+        </p:nvSpPr>
+        <p:spPr>
+          <a:xfrm>
+            <a:off x="4297680" y="2514600"/>
+            <a:ext cx="3474720" cy="2651760"/>
           </a:xfrm>
           <a:prstGeom prst="roundRect">
             <a:avLst>
-              <a:gd name="adj" fmla="val 5106"/>
+              <a:gd name="adj" fmla="val 4138"/>
             </a:avLst>
           </a:prstGeom>
           <a:solidFill>
@@ -7081,58 +7183,14 @@
       </p:sp>
       <p:sp>
         <p:nvSpPr>
-          <p:cNvPr id="9" name="need-1-circle"/>
-          <p:cNvSpPr/>
-          <p:nvPr/>
-        </p:nvSpPr>
-        <p:spPr>
-          <a:xfrm>
-            <a:off x="4480560" y="1645920"/>
-            <a:ext cx="640080" cy="640080"/>
-          </a:xfrm>
-          <a:prstGeom prst="ellipse">
-            <a:avLst/>
-          </a:prstGeom>
-          <a:solidFill>
-            <a:schemeClr val="accent1"/>
-          </a:solidFill>
-          <a:ln/>
-        </p:spPr>
-      </p:sp>
-      <p:pic>
-        <p:nvPicPr>
-          <p:cNvPr id="10" name="need-1-icon" descr="preencoded.png">    </p:cNvPr>
-          <p:cNvPicPr>
-            <a:picLocks noChangeAspect="1"/>
-          </p:cNvPicPr>
-          <p:nvPr/>
-        </p:nvPicPr>
-        <p:blipFill>
-          <a:blip r:embed="rId2"/>
-          <a:stretch>
-            <a:fillRect/>
-          </a:stretch>
-        </p:blipFill>
-        <p:spPr>
-          <a:xfrm>
-            <a:off x="4634179" y="1799539"/>
-            <a:ext cx="332842" cy="332842"/>
-          </a:xfrm>
-          <a:prstGeom prst="rect">
-            <a:avLst/>
-          </a:prstGeom>
-        </p:spPr>
-      </p:pic>
-      <p:sp>
-        <p:nvSpPr>
-          <p:cNvPr id="11" name="Text 7"/>
+          <p:cNvPr id="13" name="Text 11"/>
           <p:cNvSpPr txBox="1"/>
           <p:nvPr/>
         </p:nvSpPr>
         <p:spPr>
           <a:xfrm>
-            <a:off x="5303520" y="1645920"/>
-            <a:ext cx="2240280" cy="640080"/>
+            <a:off x="4572000" y="2697480"/>
+            <a:ext cx="2926080" cy="411480"/>
           </a:xfrm>
           <a:prstGeom prst="rect">
             <a:avLst/>
@@ -7141,14 +7199,14 @@
           <a:ln/>
         </p:spPr>
         <p:txBody>
-          <a:bodyPr wrap="square" lIns="0" tIns="0" rIns="0" bIns="0" rtlCol="0" anchor="ctr"/>
+          <a:bodyPr wrap="square" lIns="0" tIns="0" rIns="0" bIns="0" rtlCol="0" anchor="t"/>
           <a:lstStyle/>
           <a:p>
             <a:pPr indent="0" marL="0">
               <a:buNone/>
             </a:pPr>
             <a:r>
-              <a:rPr lang="en-US" sz="1800" b="1" dirty="0">
+              <a:rPr lang="en-US" sz="2000" b="1" dirty="0">
                 <a:solidFill>
                   <a:schemeClr val="tx1"/>
                 </a:solidFill>
@@ -7156,22 +7214,22 @@
                 <a:ea typeface="Cambria" pitchFamily="34" charset="-122"/>
                 <a:cs typeface="Cambria" pitchFamily="34" charset="-120"/>
               </a:rPr>
-              <a:t>Sąnaudos ir spaudimas</a:t>
-            </a:r>
-            <a:endParaRPr lang="en-US" sz="1800" dirty="0"/>
-          </a:p>
-        </p:txBody>
-      </p:sp>
-      <p:sp>
-        <p:nvSpPr>
-          <p:cNvPr id="12" name="Text 8"/>
+              <a:t>Platinimui</a:t>
+            </a:r>
+            <a:endParaRPr lang="en-US" sz="2000" dirty="0"/>
+          </a:p>
+        </p:txBody>
+      </p:sp>
+      <p:sp>
+        <p:nvSpPr>
+          <p:cNvPr id="14" name="Text 12"/>
           <p:cNvSpPr txBox="1"/>
           <p:nvPr/>
         </p:nvSpPr>
         <p:spPr>
           <a:xfrm>
-            <a:off x="4480560" y="2423160"/>
-            <a:ext cx="3017520" cy="960120"/>
+            <a:off x="4572000" y="3108960"/>
+            <a:ext cx="2926080" cy="365760"/>
           </a:xfrm>
           <a:prstGeom prst="rect">
             <a:avLst/>
@@ -7187,31 +7245,168 @@
               <a:buNone/>
             </a:pPr>
             <a:r>
+              <a:rPr lang="en-US" sz="1400" i="1" dirty="0">
+                <a:solidFill>
+                  <a:schemeClr val="accent4"/>
+                </a:solidFill>
+              </a:rPr>
+              <a:t>diegimas</a:t>
+            </a:r>
+            <a:endParaRPr lang="en-US" sz="1400" dirty="0"/>
+          </a:p>
+        </p:txBody>
+      </p:sp>
+      <p:sp>
+        <p:nvSpPr>
+          <p:cNvPr id="15" name="Text 13"/>
+          <p:cNvSpPr txBox="1"/>
+          <p:nvPr/>
+        </p:nvSpPr>
+        <p:spPr>
+          <a:xfrm>
+            <a:off x="4572000" y="3611880"/>
+            <a:ext cx="2926080" cy="2011680"/>
+          </a:xfrm>
+          <a:prstGeom prst="rect">
+            <a:avLst/>
+          </a:prstGeom>
+          <a:noFill/>
+          <a:ln/>
+        </p:spPr>
+        <p:txBody>
+          <a:bodyPr wrap="square" lIns="0" tIns="0" rIns="0" bIns="0" rtlCol="0" anchor="t"/>
+          <a:lstStyle/>
+          <a:p>
+            <a:pPr marL="342900" indent="-342900">
+              <a:spcAft>
+                <a:spcPts val="600"/>
+              </a:spcAft>
+              <a:buSzPct val="100000"/>
+              <a:buChar char="•"/>
+            </a:pPr>
+            <a:r>
               <a:rPr lang="en-US" sz="1400" dirty="0">
                 <a:solidFill>
                   <a:schemeClr val="tx1"/>
                 </a:solidFill>
               </a:rPr>
-              <a:t>Žemės vertė, ūkinė veikla, grėsmių ir spaudimo sluoksniai</a:t>
+              <a:t>Paketas PyPI kataloge</a:t>
             </a:r>
             <a:endParaRPr lang="en-US" sz="1400" dirty="0"/>
           </a:p>
-        </p:txBody>
-      </p:sp>
-      <p:sp>
-        <p:nvSpPr>
-          <p:cNvPr id="13" name="need-card-2"/>
-          <p:cNvSpPr/>
-          <p:nvPr/>
-        </p:nvSpPr>
-        <p:spPr>
-          <a:xfrm>
-            <a:off x="548640" y="3749040"/>
-            <a:ext cx="3474720" cy="2148840"/>
+          <a:p>
+            <a:pPr marL="342900" indent="-342900">
+              <a:spcAft>
+                <a:spcPts val="600"/>
+              </a:spcAft>
+              <a:buSzPct val="100000"/>
+              <a:buChar char="•"/>
+            </a:pPr>
+            <a:r>
+              <a:rPr lang="en-US" sz="1400" dirty="0">
+                <a:solidFill>
+                  <a:schemeClr val="tx1"/>
+                </a:solidFill>
+              </a:rPr>
+              <a:t>Lietuviška sąsaja</a:t>
+            </a:r>
+            <a:endParaRPr lang="en-US" sz="1400" dirty="0"/>
+          </a:p>
+          <a:p>
+            <a:pPr marL="342900" indent="-342900">
+              <a:spcAft>
+                <a:spcPts val="600"/>
+              </a:spcAft>
+              <a:buSzPct val="100000"/>
+              <a:buChar char="•"/>
+            </a:pPr>
+            <a:r>
+              <a:rPr lang="en-US" sz="1400" dirty="0">
+                <a:solidFill>
+                  <a:schemeClr val="tx1"/>
+                </a:solidFill>
+              </a:rPr>
+              <a:t>Tikslo pasirinkimas internetinėje programoje</a:t>
+            </a:r>
+            <a:endParaRPr lang="en-US" sz="1400" dirty="0"/>
+          </a:p>
+        </p:txBody>
+      </p:sp>
+      <p:sp>
+        <p:nvSpPr>
+          <p:cNvPr id="16" name="road-dot-2"/>
+          <p:cNvSpPr/>
+          <p:nvPr/>
+        </p:nvSpPr>
+        <p:spPr>
+          <a:xfrm>
+            <a:off x="8138160" y="1554480"/>
+            <a:ext cx="640080" cy="640080"/>
+          </a:xfrm>
+          <a:prstGeom prst="ellipse">
+            <a:avLst/>
+          </a:prstGeom>
+          <a:solidFill>
+            <a:schemeClr val="accent2"/>
+          </a:solidFill>
+          <a:ln w="38100">
+            <a:solidFill>
+              <a:schemeClr val="bg1"/>
+            </a:solidFill>
+            <a:prstDash val="solid"/>
+          </a:ln>
+        </p:spPr>
+      </p:sp>
+      <p:sp>
+        <p:nvSpPr>
+          <p:cNvPr id="17" name="Text 15"/>
+          <p:cNvSpPr txBox="1"/>
+          <p:nvPr/>
+        </p:nvSpPr>
+        <p:spPr>
+          <a:xfrm>
+            <a:off x="8138160" y="1554480"/>
+            <a:ext cx="640080" cy="640080"/>
+          </a:xfrm>
+          <a:prstGeom prst="rect">
+            <a:avLst/>
+          </a:prstGeom>
+          <a:noFill/>
+          <a:ln/>
+        </p:spPr>
+        <p:txBody>
+          <a:bodyPr wrap="square" lIns="0" tIns="0" rIns="0" bIns="0" rtlCol="0" anchor="ctr"/>
+          <a:lstStyle/>
+          <a:p>
+            <a:pPr algn="ctr" indent="0" marL="0">
+              <a:buNone/>
+            </a:pPr>
+            <a:r>
+              <a:rPr lang="en-US" sz="1800" b="1" dirty="0">
+                <a:solidFill>
+                  <a:schemeClr val="bg1"/>
+                </a:solidFill>
+              </a:rPr>
+              <a:t>3</a:t>
+            </a:r>
+            <a:endParaRPr lang="en-US" sz="1800" dirty="0"/>
+          </a:p>
+        </p:txBody>
+      </p:sp>
+      <p:sp>
+        <p:nvSpPr>
+          <p:cNvPr id="18" name="road-card-2"/>
+          <p:cNvSpPr/>
+          <p:nvPr/>
+        </p:nvSpPr>
+        <p:spPr>
+          <a:xfrm>
+            <a:off x="8046720" y="2514600"/>
+            <a:ext cx="3474720" cy="2651760"/>
           </a:xfrm>
           <a:prstGeom prst="roundRect">
             <a:avLst>
-              <a:gd name="adj" fmla="val 5106"/>
+              <a:gd name="adj" fmla="val 4138"/>
             </a:avLst>
           </a:prstGeom>
           <a:solidFill>
@@ -7222,58 +7417,14 @@
       </p:sp>
       <p:sp>
         <p:nvSpPr>
-          <p:cNvPr id="14" name="need-2-circle"/>
-          <p:cNvSpPr/>
-          <p:nvPr/>
-        </p:nvSpPr>
-        <p:spPr>
-          <a:xfrm>
-            <a:off x="777240" y="4023360"/>
-            <a:ext cx="640080" cy="640080"/>
-          </a:xfrm>
-          <a:prstGeom prst="ellipse">
-            <a:avLst/>
-          </a:prstGeom>
-          <a:solidFill>
-            <a:schemeClr val="accent1"/>
-          </a:solidFill>
-          <a:ln/>
-        </p:spPr>
-      </p:sp>
-      <p:pic>
-        <p:nvPicPr>
-          <p:cNvPr id="15" name="need-2-icon" descr="preencoded.png">    </p:cNvPr>
-          <p:cNvPicPr>
-            <a:picLocks noChangeAspect="1"/>
-          </p:cNvPicPr>
-          <p:nvPr/>
-        </p:nvPicPr>
-        <p:blipFill>
-          <a:blip r:embed="rId3"/>
-          <a:stretch>
-            <a:fillRect/>
-          </a:stretch>
-        </p:blipFill>
-        <p:spPr>
-          <a:xfrm>
-            <a:off x="930859" y="4176979"/>
-            <a:ext cx="332842" cy="332842"/>
-          </a:xfrm>
-          <a:prstGeom prst="rect">
-            <a:avLst/>
-          </a:prstGeom>
-        </p:spPr>
-      </p:pic>
-      <p:sp>
-        <p:nvSpPr>
-          <p:cNvPr id="16" name="Text 11"/>
+          <p:cNvPr id="19" name="Text 17"/>
           <p:cNvSpPr txBox="1"/>
           <p:nvPr/>
         </p:nvSpPr>
         <p:spPr>
           <a:xfrm>
-            <a:off x="1600200" y="4023360"/>
-            <a:ext cx="2240280" cy="640080"/>
+            <a:off x="8321040" y="2697480"/>
+            <a:ext cx="2926080" cy="411480"/>
           </a:xfrm>
           <a:prstGeom prst="rect">
             <a:avLst/>
@@ -7282,14 +7433,14 @@
           <a:ln/>
         </p:spPr>
         <p:txBody>
-          <a:bodyPr wrap="square" lIns="0" tIns="0" rIns="0" bIns="0" rtlCol="0" anchor="ctr"/>
+          <a:bodyPr wrap="square" lIns="0" tIns="0" rIns="0" bIns="0" rtlCol="0" anchor="t"/>
           <a:lstStyle/>
           <a:p>
             <a:pPr indent="0" marL="0">
               <a:buNone/>
             </a:pPr>
             <a:r>
-              <a:rPr lang="en-US" sz="1800" b="1" dirty="0">
+              <a:rPr lang="en-US" sz="2000" b="1" dirty="0">
                 <a:solidFill>
                   <a:schemeClr val="tx1"/>
                 </a:solidFill>
@@ -7297,22 +7448,22 @@
                 <a:ea typeface="Cambria" pitchFamily="34" charset="-122"/>
                 <a:cs typeface="Cambria" pitchFamily="34" charset="-120"/>
               </a:rPr>
-              <a:t>Taisyklės</a:t>
-            </a:r>
-            <a:endParaRPr lang="en-US" sz="1800" dirty="0"/>
-          </a:p>
-        </p:txBody>
-      </p:sp>
-      <p:sp>
-        <p:nvSpPr>
-          <p:cNvPr id="17" name="Text 12"/>
+              <a:t>Kartu su jumis</a:t>
+            </a:r>
+            <a:endParaRPr lang="en-US" sz="2000" dirty="0"/>
+          </a:p>
+        </p:txBody>
+      </p:sp>
+      <p:sp>
+        <p:nvSpPr>
+          <p:cNvPr id="20" name="Text 18"/>
           <p:cNvSpPr txBox="1"/>
           <p:nvPr/>
         </p:nvSpPr>
         <p:spPr>
           <a:xfrm>
-            <a:off x="777240" y="4800600"/>
-            <a:ext cx="3017520" cy="960120"/>
+            <a:off x="8321040" y="3108960"/>
+            <a:ext cx="2926080" cy="365760"/>
           </a:xfrm>
           <a:prstGeom prst="rect">
             <a:avLst/>
@@ -7328,296 +7479,72 @@
               <a:buNone/>
             </a:pPr>
             <a:r>
+              <a:rPr lang="en-US" sz="1400" i="1" dirty="0">
+                <a:solidFill>
+                  <a:schemeClr val="accent4"/>
+                </a:solidFill>
+              </a:rPr>
+              <a:t>pilotas</a:t>
+            </a:r>
+            <a:endParaRPr lang="en-US" sz="1400" dirty="0"/>
+          </a:p>
+        </p:txBody>
+      </p:sp>
+      <p:sp>
+        <p:nvSpPr>
+          <p:cNvPr id="21" name="Text 19"/>
+          <p:cNvSpPr txBox="1"/>
+          <p:nvPr/>
+        </p:nvSpPr>
+        <p:spPr>
+          <a:xfrm>
+            <a:off x="8321040" y="3611880"/>
+            <a:ext cx="2926080" cy="2011680"/>
+          </a:xfrm>
+          <a:prstGeom prst="rect">
+            <a:avLst/>
+          </a:prstGeom>
+          <a:noFill/>
+          <a:ln/>
+        </p:spPr>
+        <p:txBody>
+          <a:bodyPr wrap="square" lIns="0" tIns="0" rIns="0" bIns="0" rtlCol="0" anchor="t"/>
+          <a:lstStyle/>
+          <a:p>
+            <a:pPr marL="342900" indent="-342900">
+              <a:spcAft>
+                <a:spcPts val="600"/>
+              </a:spcAft>
+              <a:buSzPct val="100000"/>
+              <a:buChar char="•"/>
+            </a:pPr>
+            <a:r>
               <a:rPr lang="en-US" sz="1400" dirty="0">
                 <a:solidFill>
                   <a:schemeClr val="tx1"/>
                 </a:solidFill>
               </a:rPr>
-              <a:t>Esamų teritorijų ribos, zonų reikalavimai, ko negalima keisti</a:t>
+              <a:t>Bandomasis projektas vienoje teritorijoje</a:t>
             </a:r>
             <a:endParaRPr lang="en-US" sz="1400" dirty="0"/>
           </a:p>
-        </p:txBody>
-      </p:sp>
-      <p:sp>
-        <p:nvSpPr>
-          <p:cNvPr id="18" name="need-card-3"/>
-          <p:cNvSpPr/>
-          <p:nvPr/>
-        </p:nvSpPr>
-        <p:spPr>
-          <a:xfrm>
-            <a:off x="4251960" y="3749040"/>
-            <a:ext cx="3474720" cy="2148840"/>
-          </a:xfrm>
-          <a:prstGeom prst="roundRect">
-            <a:avLst>
-              <a:gd name="adj" fmla="val 5106"/>
-            </a:avLst>
-          </a:prstGeom>
-          <a:solidFill>
-            <a:schemeClr val="bg2"/>
-          </a:solidFill>
-          <a:ln/>
-        </p:spPr>
-      </p:sp>
-      <p:sp>
-        <p:nvSpPr>
-          <p:cNvPr id="19" name="need-3-circle"/>
-          <p:cNvSpPr/>
-          <p:nvPr/>
-        </p:nvSpPr>
-        <p:spPr>
-          <a:xfrm>
-            <a:off x="4480560" y="4023360"/>
-            <a:ext cx="640080" cy="640080"/>
-          </a:xfrm>
-          <a:prstGeom prst="ellipse">
-            <a:avLst/>
-          </a:prstGeom>
-          <a:solidFill>
-            <a:schemeClr val="accent1"/>
-          </a:solidFill>
-          <a:ln/>
-        </p:spPr>
-      </p:sp>
-      <p:pic>
-        <p:nvPicPr>
-          <p:cNvPr id="20" name="need-3-icon" descr="preencoded.png">    </p:cNvPr>
-          <p:cNvPicPr>
-            <a:picLocks noChangeAspect="1"/>
-          </p:cNvPicPr>
-          <p:nvPr/>
-        </p:nvPicPr>
-        <p:blipFill>
-          <a:blip r:embed="rId4"/>
-          <a:stretch>
-            <a:fillRect/>
-          </a:stretch>
-        </p:blipFill>
-        <p:spPr>
-          <a:xfrm>
-            <a:off x="4634179" y="4176979"/>
-            <a:ext cx="332842" cy="332842"/>
-          </a:xfrm>
-          <a:prstGeom prst="rect">
-            <a:avLst/>
-          </a:prstGeom>
-        </p:spPr>
-      </p:pic>
-      <p:sp>
-        <p:nvSpPr>
-          <p:cNvPr id="21" name="Text 15"/>
-          <p:cNvSpPr txBox="1"/>
-          <p:nvPr/>
-        </p:nvSpPr>
-        <p:spPr>
-          <a:xfrm>
-            <a:off x="5303520" y="4023360"/>
-            <a:ext cx="2240280" cy="640080"/>
-          </a:xfrm>
-          <a:prstGeom prst="rect">
-            <a:avLst/>
-          </a:prstGeom>
-          <a:noFill/>
-          <a:ln/>
-        </p:spPr>
-        <p:txBody>
-          <a:bodyPr wrap="square" lIns="0" tIns="0" rIns="0" bIns="0" rtlCol="0" anchor="ctr"/>
-          <a:lstStyle/>
-          <a:p>
-            <a:pPr indent="0" marL="0">
-              <a:buNone/>
-            </a:pPr>
-            <a:r>
-              <a:rPr lang="en-US" sz="1800" b="1" dirty="0">
+          <a:p>
+            <a:pPr marL="342900" indent="-342900">
+              <a:spcAft>
+                <a:spcPts val="600"/>
+              </a:spcAft>
+              <a:buSzPct val="100000"/>
+              <a:buChar char="•"/>
+            </a:pPr>
+            <a:r>
+              <a:rPr lang="en-US" sz="1400" dirty="0">
                 <a:solidFill>
                   <a:schemeClr val="tx1"/>
                 </a:solidFill>
-                <a:latin typeface="Cambria" pitchFamily="34" charset="0"/>
-                <a:ea typeface="Cambria" pitchFamily="34" charset="-122"/>
-                <a:cs typeface="Cambria" pitchFamily="34" charset="-120"/>
               </a:rPr>
-              <a:t>Konkretus klausimas</a:t>
-            </a:r>
-            <a:endParaRPr lang="en-US" sz="1800" dirty="0"/>
-          </a:p>
-        </p:txBody>
-      </p:sp>
-      <p:sp>
-        <p:nvSpPr>
-          <p:cNvPr id="22" name="Text 16"/>
-          <p:cNvSpPr txBox="1"/>
-          <p:nvPr/>
-        </p:nvSpPr>
-        <p:spPr>
-          <a:xfrm>
-            <a:off x="4480560" y="4800600"/>
-            <a:ext cx="3017520" cy="960120"/>
-          </a:xfrm>
-          <a:prstGeom prst="rect">
-            <a:avLst/>
-          </a:prstGeom>
-          <a:noFill/>
-          <a:ln/>
-        </p:spPr>
-        <p:txBody>
-          <a:bodyPr wrap="square" lIns="0" tIns="0" rIns="0" bIns="0" rtlCol="0" anchor="t"/>
-          <a:lstStyle/>
-          <a:p>
-            <a:pPr indent="0" marL="0">
-              <a:buNone/>
-            </a:pPr>
-            <a:r>
-              <a:rPr lang="en-US" sz="1400" dirty="0">
-                <a:solidFill>
-                  <a:schemeClr val="tx1"/>
-                </a:solidFill>
-              </a:rPr>
-              <a:t>Vienas realus sprendimas: tinklo plėtra, zonavimas ar atkūrimas</a:t>
+              <a:t>Tolesnių funkcijų eiliškumas pagal jūsų poreikius</a:t>
             </a:r>
             <a:endParaRPr lang="en-US" sz="1400" dirty="0"/>
-          </a:p>
-        </p:txBody>
-      </p:sp>
-      <p:sp>
-        <p:nvSpPr>
-          <p:cNvPr id="23" name="pilot-result"/>
-          <p:cNvSpPr/>
-          <p:nvPr/>
-        </p:nvSpPr>
-        <p:spPr>
-          <a:xfrm>
-            <a:off x="8092440" y="1371600"/>
-            <a:ext cx="3520440" cy="4526280"/>
-          </a:xfrm>
-          <a:prstGeom prst="roundRect">
-            <a:avLst>
-              <a:gd name="adj" fmla="val 3117"/>
-            </a:avLst>
-          </a:prstGeom>
-          <a:solidFill>
-            <a:schemeClr val="tx2"/>
-          </a:solidFill>
-          <a:ln/>
-        </p:spPr>
-      </p:sp>
-      <p:sp>
-        <p:nvSpPr>
-          <p:cNvPr id="24" name="pilot-circle"/>
-          <p:cNvSpPr/>
-          <p:nvPr/>
-        </p:nvSpPr>
-        <p:spPr>
-          <a:xfrm>
-            <a:off x="8366760" y="1691640"/>
-            <a:ext cx="731520" cy="731520"/>
-          </a:xfrm>
-          <a:prstGeom prst="ellipse">
-            <a:avLst/>
-          </a:prstGeom>
-          <a:solidFill>
-            <a:schemeClr val="accent3"/>
-          </a:solidFill>
-          <a:ln/>
-        </p:spPr>
-      </p:sp>
-      <p:pic>
-        <p:nvPicPr>
-          <p:cNvPr id="25" name="pilot-icon" descr="preencoded.png">    </p:cNvPr>
-          <p:cNvPicPr>
-            <a:picLocks noChangeAspect="1"/>
-          </p:cNvPicPr>
-          <p:nvPr/>
-        </p:nvPicPr>
-        <p:blipFill>
-          <a:blip r:embed="rId5"/>
-          <a:stretch>
-            <a:fillRect/>
-          </a:stretch>
-        </p:blipFill>
-        <p:spPr>
-          <a:xfrm>
-            <a:off x="8542325" y="1867205"/>
-            <a:ext cx="380390" cy="380390"/>
-          </a:xfrm>
-          <a:prstGeom prst="rect">
-            <a:avLst/>
-          </a:prstGeom>
-        </p:spPr>
-      </p:pic>
-      <p:sp>
-        <p:nvSpPr>
-          <p:cNvPr id="26" name="Text 19"/>
-          <p:cNvSpPr txBox="1"/>
-          <p:nvPr/>
-        </p:nvSpPr>
-        <p:spPr>
-          <a:xfrm>
-            <a:off x="8366760" y="2651760"/>
-            <a:ext cx="2971800" cy="457200"/>
-          </a:xfrm>
-          <a:prstGeom prst="rect">
-            <a:avLst/>
-          </a:prstGeom>
-          <a:noFill/>
-          <a:ln/>
-        </p:spPr>
-        <p:txBody>
-          <a:bodyPr wrap="square" lIns="0" tIns="0" rIns="0" bIns="0" rtlCol="0" anchor="t"/>
-          <a:lstStyle/>
-          <a:p>
-            <a:pPr indent="0" marL="0">
-              <a:buNone/>
-            </a:pPr>
-            <a:r>
-              <a:rPr lang="en-US" sz="2000" b="1" dirty="0">
-                <a:solidFill>
-                  <a:schemeClr val="bg1"/>
-                </a:solidFill>
-                <a:latin typeface="Cambria" pitchFamily="34" charset="0"/>
-                <a:ea typeface="Cambria" pitchFamily="34" charset="-122"/>
-                <a:cs typeface="Cambria" pitchFamily="34" charset="-120"/>
-              </a:rPr>
-              <a:t>Rezultatas</a:t>
-            </a:r>
-            <a:endParaRPr lang="en-US" sz="2000" dirty="0"/>
-          </a:p>
-        </p:txBody>
-      </p:sp>
-      <p:sp>
-        <p:nvSpPr>
-          <p:cNvPr id="27" name="Text 20"/>
-          <p:cNvSpPr txBox="1"/>
-          <p:nvPr/>
-        </p:nvSpPr>
-        <p:spPr>
-          <a:xfrm>
-            <a:off x="8366760" y="3154680"/>
-            <a:ext cx="2971800" cy="2377440"/>
-          </a:xfrm>
-          <a:prstGeom prst="rect">
-            <a:avLst/>
-          </a:prstGeom>
-          <a:noFill/>
-          <a:ln/>
-        </p:spPr>
-        <p:txBody>
-          <a:bodyPr wrap="square" lIns="0" tIns="0" rIns="0" bIns="0" rtlCol="0" anchor="t"/>
-          <a:lstStyle/>
-          <a:p>
-            <a:pPr indent="0" marL="0">
-              <a:buNone/>
-            </a:pPr>
-            <a:r>
-              <a:rPr lang="en-US" sz="1600" dirty="0">
-                <a:solidFill>
-                  <a:schemeClr val="bg1"/>
-                </a:solidFill>
-              </a:rPr>
-              <a:t>Skaidrus, pakartojamas ir argumentuotas planas su alternatyvomis, kurį galima aptarti su savivaldybėmis, naudotojais ir bendruomene.</a:t>
-            </a:r>
-            <a:endParaRPr lang="en-US" sz="1600" dirty="0"/>
           </a:p>
         </p:txBody>
       </p:sp>
@@ -7677,6 +7604,822 @@
 <file path=ppt/slides/slide16.xml><?xml version="1.0" encoding="utf-8"?>
 <p:sld xmlns:a="http://schemas.openxmlformats.org/drawingml/2006/main" xmlns:r="http://schemas.openxmlformats.org/officeDocument/2006/relationships" xmlns:p="http://schemas.openxmlformats.org/presentationml/2006/main">
   <p:cSld name="Slide 16">
+    <p:spTree>
+      <p:nvGrpSpPr>
+        <p:cNvPr id="1" name=""/>
+        <p:cNvGrpSpPr/>
+        <p:nvPr/>
+      </p:nvGrpSpPr>
+      <p:grpSpPr>
+        <a:xfrm>
+          <a:off x="0" y="0"/>
+          <a:ext cx="0" cy="0"/>
+          <a:chOff x="0" y="0"/>
+          <a:chExt cx="0" cy="0"/>
+        </a:xfrm>
+      </p:grpSpPr>
+      <p:sp>
+        <p:nvSpPr>
+          <p:cNvPr id="2" name="Text 0"/>
+          <p:cNvSpPr/>
+          <p:nvPr>
+            <p:ph idx="100" type="title" hasCustomPrompt="1"/>
+          </p:nvPr>
+        </p:nvSpPr>
+        <p:spPr>
+          <a:xfrm>
+            <a:off x="548640" y="320040"/>
+            <a:ext cx="11064240" cy="777240"/>
+          </a:xfrm>
+          <a:prstGeom prst="rect">
+            <a:avLst/>
+          </a:prstGeom>
+          <a:noFill/>
+          <a:ln/>
+        </p:spPr>
+        <p:txBody>
+          <a:bodyPr wrap="square" lIns="0" tIns="0" rIns="0" bIns="0" rtlCol="0" anchor="ctr"/>
+          <a:lstStyle/>
+          <a:p>
+            <a:pPr algn="l" indent="0" marL="0">
+              <a:buNone/>
+            </a:pPr>
+            <a:r>
+              <a:rPr lang="en-US" sz="3200" b="1" dirty="0">
+                <a:solidFill>
+                  <a:schemeClr val="tx1"/>
+                </a:solidFill>
+                <a:latin typeface="Cambria" pitchFamily="34" charset="0"/>
+                <a:ea typeface="Cambria" pitchFamily="34" charset="-122"/>
+                <a:cs typeface="Cambria" pitchFamily="34" charset="-120"/>
+              </a:rPr>
+              <a:t>Ko reikėtų bandomajam projektui</a:t>
+            </a:r>
+            <a:endParaRPr lang="en-US" sz="3200" dirty="0"/>
+          </a:p>
+        </p:txBody>
+      </p:sp>
+      <p:sp>
+        <p:nvSpPr>
+          <p:cNvPr id="3" name="need-card-0"/>
+          <p:cNvSpPr/>
+          <p:nvPr/>
+        </p:nvSpPr>
+        <p:spPr>
+          <a:xfrm>
+            <a:off x="548640" y="1371600"/>
+            <a:ext cx="3474720" cy="2148840"/>
+          </a:xfrm>
+          <a:prstGeom prst="roundRect">
+            <a:avLst>
+              <a:gd name="adj" fmla="val 5106"/>
+            </a:avLst>
+          </a:prstGeom>
+          <a:solidFill>
+            <a:schemeClr val="bg2"/>
+          </a:solidFill>
+          <a:ln/>
+        </p:spPr>
+      </p:sp>
+      <p:sp>
+        <p:nvSpPr>
+          <p:cNvPr id="4" name="need-0-circle"/>
+          <p:cNvSpPr/>
+          <p:nvPr/>
+        </p:nvSpPr>
+        <p:spPr>
+          <a:xfrm>
+            <a:off x="777240" y="1645920"/>
+            <a:ext cx="640080" cy="640080"/>
+          </a:xfrm>
+          <a:prstGeom prst="ellipse">
+            <a:avLst/>
+          </a:prstGeom>
+          <a:solidFill>
+            <a:schemeClr val="accent1"/>
+          </a:solidFill>
+          <a:ln/>
+        </p:spPr>
+      </p:sp>
+      <p:pic>
+        <p:nvPicPr>
+          <p:cNvPr id="5" name="need-0-icon" descr="preencoded.png">    </p:cNvPr>
+          <p:cNvPicPr>
+            <a:picLocks noChangeAspect="1"/>
+          </p:cNvPicPr>
+          <p:nvPr/>
+        </p:nvPicPr>
+        <p:blipFill>
+          <a:blip r:embed="rId1"/>
+          <a:stretch>
+            <a:fillRect/>
+          </a:stretch>
+        </p:blipFill>
+        <p:spPr>
+          <a:xfrm>
+            <a:off x="930859" y="1799539"/>
+            <a:ext cx="332842" cy="332842"/>
+          </a:xfrm>
+          <a:prstGeom prst="rect">
+            <a:avLst/>
+          </a:prstGeom>
+        </p:spPr>
+      </p:pic>
+      <p:sp>
+        <p:nvSpPr>
+          <p:cNvPr id="6" name="Text 3"/>
+          <p:cNvSpPr txBox="1"/>
+          <p:nvPr/>
+        </p:nvSpPr>
+        <p:spPr>
+          <a:xfrm>
+            <a:off x="1600200" y="1645920"/>
+            <a:ext cx="2240280" cy="640080"/>
+          </a:xfrm>
+          <a:prstGeom prst="rect">
+            <a:avLst/>
+          </a:prstGeom>
+          <a:noFill/>
+          <a:ln/>
+        </p:spPr>
+        <p:txBody>
+          <a:bodyPr wrap="square" lIns="0" tIns="0" rIns="0" bIns="0" rtlCol="0" anchor="ctr"/>
+          <a:lstStyle/>
+          <a:p>
+            <a:pPr indent="0" marL="0">
+              <a:buNone/>
+            </a:pPr>
+            <a:r>
+              <a:rPr lang="en-US" sz="1800" b="1" dirty="0">
+                <a:solidFill>
+                  <a:schemeClr val="tx1"/>
+                </a:solidFill>
+                <a:latin typeface="Cambria" pitchFamily="34" charset="0"/>
+                <a:ea typeface="Cambria" pitchFamily="34" charset="-122"/>
+                <a:cs typeface="Cambria" pitchFamily="34" charset="-120"/>
+              </a:rPr>
+              <a:t>Vertybių duomenys</a:t>
+            </a:r>
+            <a:endParaRPr lang="en-US" sz="1800" dirty="0"/>
+          </a:p>
+        </p:txBody>
+      </p:sp>
+      <p:sp>
+        <p:nvSpPr>
+          <p:cNvPr id="7" name="Text 4"/>
+          <p:cNvSpPr txBox="1"/>
+          <p:nvPr/>
+        </p:nvSpPr>
+        <p:spPr>
+          <a:xfrm>
+            <a:off x="777240" y="2423160"/>
+            <a:ext cx="3017520" cy="960120"/>
+          </a:xfrm>
+          <a:prstGeom prst="rect">
+            <a:avLst/>
+          </a:prstGeom>
+          <a:noFill/>
+          <a:ln/>
+        </p:spPr>
+        <p:txBody>
+          <a:bodyPr wrap="square" lIns="0" tIns="0" rIns="0" bIns="0" rtlCol="0" anchor="t"/>
+          <a:lstStyle/>
+          <a:p>
+            <a:pPr indent="0" marL="0">
+              <a:buNone/>
+            </a:pPr>
+            <a:r>
+              <a:rPr lang="en-US" sz="1400" dirty="0">
+                <a:solidFill>
+                  <a:schemeClr val="tx1"/>
+                </a:solidFill>
+              </a:rPr>
+              <a:t>Buveinių ir rūšių žemėlapiai, Natura 2000 vertybės, inventorizacijos</a:t>
+            </a:r>
+            <a:endParaRPr lang="en-US" sz="1400" dirty="0"/>
+          </a:p>
+        </p:txBody>
+      </p:sp>
+      <p:sp>
+        <p:nvSpPr>
+          <p:cNvPr id="8" name="need-card-1"/>
+          <p:cNvSpPr/>
+          <p:nvPr/>
+        </p:nvSpPr>
+        <p:spPr>
+          <a:xfrm>
+            <a:off x="4251960" y="1371600"/>
+            <a:ext cx="3474720" cy="2148840"/>
+          </a:xfrm>
+          <a:prstGeom prst="roundRect">
+            <a:avLst>
+              <a:gd name="adj" fmla="val 5106"/>
+            </a:avLst>
+          </a:prstGeom>
+          <a:solidFill>
+            <a:schemeClr val="bg2"/>
+          </a:solidFill>
+          <a:ln/>
+        </p:spPr>
+      </p:sp>
+      <p:sp>
+        <p:nvSpPr>
+          <p:cNvPr id="9" name="need-1-circle"/>
+          <p:cNvSpPr/>
+          <p:nvPr/>
+        </p:nvSpPr>
+        <p:spPr>
+          <a:xfrm>
+            <a:off x="4480560" y="1645920"/>
+            <a:ext cx="640080" cy="640080"/>
+          </a:xfrm>
+          <a:prstGeom prst="ellipse">
+            <a:avLst/>
+          </a:prstGeom>
+          <a:solidFill>
+            <a:schemeClr val="accent1"/>
+          </a:solidFill>
+          <a:ln/>
+        </p:spPr>
+      </p:sp>
+      <p:pic>
+        <p:nvPicPr>
+          <p:cNvPr id="10" name="need-1-icon" descr="preencoded.png">    </p:cNvPr>
+          <p:cNvPicPr>
+            <a:picLocks noChangeAspect="1"/>
+          </p:cNvPicPr>
+          <p:nvPr/>
+        </p:nvPicPr>
+        <p:blipFill>
+          <a:blip r:embed="rId2"/>
+          <a:stretch>
+            <a:fillRect/>
+          </a:stretch>
+        </p:blipFill>
+        <p:spPr>
+          <a:xfrm>
+            <a:off x="4634179" y="1799539"/>
+            <a:ext cx="332842" cy="332842"/>
+          </a:xfrm>
+          <a:prstGeom prst="rect">
+            <a:avLst/>
+          </a:prstGeom>
+        </p:spPr>
+      </p:pic>
+      <p:sp>
+        <p:nvSpPr>
+          <p:cNvPr id="11" name="Text 7"/>
+          <p:cNvSpPr txBox="1"/>
+          <p:nvPr/>
+        </p:nvSpPr>
+        <p:spPr>
+          <a:xfrm>
+            <a:off x="5303520" y="1645920"/>
+            <a:ext cx="2240280" cy="640080"/>
+          </a:xfrm>
+          <a:prstGeom prst="rect">
+            <a:avLst/>
+          </a:prstGeom>
+          <a:noFill/>
+          <a:ln/>
+        </p:spPr>
+        <p:txBody>
+          <a:bodyPr wrap="square" lIns="0" tIns="0" rIns="0" bIns="0" rtlCol="0" anchor="ctr"/>
+          <a:lstStyle/>
+          <a:p>
+            <a:pPr indent="0" marL="0">
+              <a:buNone/>
+            </a:pPr>
+            <a:r>
+              <a:rPr lang="en-US" sz="1800" b="1" dirty="0">
+                <a:solidFill>
+                  <a:schemeClr val="tx1"/>
+                </a:solidFill>
+                <a:latin typeface="Cambria" pitchFamily="34" charset="0"/>
+                <a:ea typeface="Cambria" pitchFamily="34" charset="-122"/>
+                <a:cs typeface="Cambria" pitchFamily="34" charset="-120"/>
+              </a:rPr>
+              <a:t>Sąnaudos ir spaudimas</a:t>
+            </a:r>
+            <a:endParaRPr lang="en-US" sz="1800" dirty="0"/>
+          </a:p>
+        </p:txBody>
+      </p:sp>
+      <p:sp>
+        <p:nvSpPr>
+          <p:cNvPr id="12" name="Text 8"/>
+          <p:cNvSpPr txBox="1"/>
+          <p:nvPr/>
+        </p:nvSpPr>
+        <p:spPr>
+          <a:xfrm>
+            <a:off x="4480560" y="2423160"/>
+            <a:ext cx="3017520" cy="960120"/>
+          </a:xfrm>
+          <a:prstGeom prst="rect">
+            <a:avLst/>
+          </a:prstGeom>
+          <a:noFill/>
+          <a:ln/>
+        </p:spPr>
+        <p:txBody>
+          <a:bodyPr wrap="square" lIns="0" tIns="0" rIns="0" bIns="0" rtlCol="0" anchor="t"/>
+          <a:lstStyle/>
+          <a:p>
+            <a:pPr indent="0" marL="0">
+              <a:buNone/>
+            </a:pPr>
+            <a:r>
+              <a:rPr lang="en-US" sz="1400" dirty="0">
+                <a:solidFill>
+                  <a:schemeClr val="tx1"/>
+                </a:solidFill>
+              </a:rPr>
+              <a:t>Žemės vertė, ūkinė veikla, grėsmių ir spaudimo sluoksniai</a:t>
+            </a:r>
+            <a:endParaRPr lang="en-US" sz="1400" dirty="0"/>
+          </a:p>
+        </p:txBody>
+      </p:sp>
+      <p:sp>
+        <p:nvSpPr>
+          <p:cNvPr id="13" name="need-card-2"/>
+          <p:cNvSpPr/>
+          <p:nvPr/>
+        </p:nvSpPr>
+        <p:spPr>
+          <a:xfrm>
+            <a:off x="548640" y="3749040"/>
+            <a:ext cx="3474720" cy="2148840"/>
+          </a:xfrm>
+          <a:prstGeom prst="roundRect">
+            <a:avLst>
+              <a:gd name="adj" fmla="val 5106"/>
+            </a:avLst>
+          </a:prstGeom>
+          <a:solidFill>
+            <a:schemeClr val="bg2"/>
+          </a:solidFill>
+          <a:ln/>
+        </p:spPr>
+      </p:sp>
+      <p:sp>
+        <p:nvSpPr>
+          <p:cNvPr id="14" name="need-2-circle"/>
+          <p:cNvSpPr/>
+          <p:nvPr/>
+        </p:nvSpPr>
+        <p:spPr>
+          <a:xfrm>
+            <a:off x="777240" y="4023360"/>
+            <a:ext cx="640080" cy="640080"/>
+          </a:xfrm>
+          <a:prstGeom prst="ellipse">
+            <a:avLst/>
+          </a:prstGeom>
+          <a:solidFill>
+            <a:schemeClr val="accent1"/>
+          </a:solidFill>
+          <a:ln/>
+        </p:spPr>
+      </p:sp>
+      <p:pic>
+        <p:nvPicPr>
+          <p:cNvPr id="15" name="need-2-icon" descr="preencoded.png">    </p:cNvPr>
+          <p:cNvPicPr>
+            <a:picLocks noChangeAspect="1"/>
+          </p:cNvPicPr>
+          <p:nvPr/>
+        </p:nvPicPr>
+        <p:blipFill>
+          <a:blip r:embed="rId3"/>
+          <a:stretch>
+            <a:fillRect/>
+          </a:stretch>
+        </p:blipFill>
+        <p:spPr>
+          <a:xfrm>
+            <a:off x="930859" y="4176979"/>
+            <a:ext cx="332842" cy="332842"/>
+          </a:xfrm>
+          <a:prstGeom prst="rect">
+            <a:avLst/>
+          </a:prstGeom>
+        </p:spPr>
+      </p:pic>
+      <p:sp>
+        <p:nvSpPr>
+          <p:cNvPr id="16" name="Text 11"/>
+          <p:cNvSpPr txBox="1"/>
+          <p:nvPr/>
+        </p:nvSpPr>
+        <p:spPr>
+          <a:xfrm>
+            <a:off x="1600200" y="4023360"/>
+            <a:ext cx="2240280" cy="640080"/>
+          </a:xfrm>
+          <a:prstGeom prst="rect">
+            <a:avLst/>
+          </a:prstGeom>
+          <a:noFill/>
+          <a:ln/>
+        </p:spPr>
+        <p:txBody>
+          <a:bodyPr wrap="square" lIns="0" tIns="0" rIns="0" bIns="0" rtlCol="0" anchor="ctr"/>
+          <a:lstStyle/>
+          <a:p>
+            <a:pPr indent="0" marL="0">
+              <a:buNone/>
+            </a:pPr>
+            <a:r>
+              <a:rPr lang="en-US" sz="1800" b="1" dirty="0">
+                <a:solidFill>
+                  <a:schemeClr val="tx1"/>
+                </a:solidFill>
+                <a:latin typeface="Cambria" pitchFamily="34" charset="0"/>
+                <a:ea typeface="Cambria" pitchFamily="34" charset="-122"/>
+                <a:cs typeface="Cambria" pitchFamily="34" charset="-120"/>
+              </a:rPr>
+              <a:t>Taisyklės</a:t>
+            </a:r>
+            <a:endParaRPr lang="en-US" sz="1800" dirty="0"/>
+          </a:p>
+        </p:txBody>
+      </p:sp>
+      <p:sp>
+        <p:nvSpPr>
+          <p:cNvPr id="17" name="Text 12"/>
+          <p:cNvSpPr txBox="1"/>
+          <p:nvPr/>
+        </p:nvSpPr>
+        <p:spPr>
+          <a:xfrm>
+            <a:off x="777240" y="4800600"/>
+            <a:ext cx="3017520" cy="960120"/>
+          </a:xfrm>
+          <a:prstGeom prst="rect">
+            <a:avLst/>
+          </a:prstGeom>
+          <a:noFill/>
+          <a:ln/>
+        </p:spPr>
+        <p:txBody>
+          <a:bodyPr wrap="square" lIns="0" tIns="0" rIns="0" bIns="0" rtlCol="0" anchor="t"/>
+          <a:lstStyle/>
+          <a:p>
+            <a:pPr indent="0" marL="0">
+              <a:buNone/>
+            </a:pPr>
+            <a:r>
+              <a:rPr lang="en-US" sz="1400" dirty="0">
+                <a:solidFill>
+                  <a:schemeClr val="tx1"/>
+                </a:solidFill>
+              </a:rPr>
+              <a:t>Esamų teritorijų ribos, zonų reikalavimai, ko negalima keisti</a:t>
+            </a:r>
+            <a:endParaRPr lang="en-US" sz="1400" dirty="0"/>
+          </a:p>
+        </p:txBody>
+      </p:sp>
+      <p:sp>
+        <p:nvSpPr>
+          <p:cNvPr id="18" name="need-card-3"/>
+          <p:cNvSpPr/>
+          <p:nvPr/>
+        </p:nvSpPr>
+        <p:spPr>
+          <a:xfrm>
+            <a:off x="4251960" y="3749040"/>
+            <a:ext cx="3474720" cy="2148840"/>
+          </a:xfrm>
+          <a:prstGeom prst="roundRect">
+            <a:avLst>
+              <a:gd name="adj" fmla="val 5106"/>
+            </a:avLst>
+          </a:prstGeom>
+          <a:solidFill>
+            <a:schemeClr val="bg2"/>
+          </a:solidFill>
+          <a:ln/>
+        </p:spPr>
+      </p:sp>
+      <p:sp>
+        <p:nvSpPr>
+          <p:cNvPr id="19" name="need-3-circle"/>
+          <p:cNvSpPr/>
+          <p:nvPr/>
+        </p:nvSpPr>
+        <p:spPr>
+          <a:xfrm>
+            <a:off x="4480560" y="4023360"/>
+            <a:ext cx="640080" cy="640080"/>
+          </a:xfrm>
+          <a:prstGeom prst="ellipse">
+            <a:avLst/>
+          </a:prstGeom>
+          <a:solidFill>
+            <a:schemeClr val="accent1"/>
+          </a:solidFill>
+          <a:ln/>
+        </p:spPr>
+      </p:sp>
+      <p:pic>
+        <p:nvPicPr>
+          <p:cNvPr id="20" name="need-3-icon" descr="preencoded.png">    </p:cNvPr>
+          <p:cNvPicPr>
+            <a:picLocks noChangeAspect="1"/>
+          </p:cNvPicPr>
+          <p:nvPr/>
+        </p:nvPicPr>
+        <p:blipFill>
+          <a:blip r:embed="rId4"/>
+          <a:stretch>
+            <a:fillRect/>
+          </a:stretch>
+        </p:blipFill>
+        <p:spPr>
+          <a:xfrm>
+            <a:off x="4634179" y="4176979"/>
+            <a:ext cx="332842" cy="332842"/>
+          </a:xfrm>
+          <a:prstGeom prst="rect">
+            <a:avLst/>
+          </a:prstGeom>
+        </p:spPr>
+      </p:pic>
+      <p:sp>
+        <p:nvSpPr>
+          <p:cNvPr id="21" name="Text 15"/>
+          <p:cNvSpPr txBox="1"/>
+          <p:nvPr/>
+        </p:nvSpPr>
+        <p:spPr>
+          <a:xfrm>
+            <a:off x="5303520" y="4023360"/>
+            <a:ext cx="2240280" cy="640080"/>
+          </a:xfrm>
+          <a:prstGeom prst="rect">
+            <a:avLst/>
+          </a:prstGeom>
+          <a:noFill/>
+          <a:ln/>
+        </p:spPr>
+        <p:txBody>
+          <a:bodyPr wrap="square" lIns="0" tIns="0" rIns="0" bIns="0" rtlCol="0" anchor="ctr"/>
+          <a:lstStyle/>
+          <a:p>
+            <a:pPr indent="0" marL="0">
+              <a:buNone/>
+            </a:pPr>
+            <a:r>
+              <a:rPr lang="en-US" sz="1800" b="1" dirty="0">
+                <a:solidFill>
+                  <a:schemeClr val="tx1"/>
+                </a:solidFill>
+                <a:latin typeface="Cambria" pitchFamily="34" charset="0"/>
+                <a:ea typeface="Cambria" pitchFamily="34" charset="-122"/>
+                <a:cs typeface="Cambria" pitchFamily="34" charset="-120"/>
+              </a:rPr>
+              <a:t>Konkretus klausimas</a:t>
+            </a:r>
+            <a:endParaRPr lang="en-US" sz="1800" dirty="0"/>
+          </a:p>
+        </p:txBody>
+      </p:sp>
+      <p:sp>
+        <p:nvSpPr>
+          <p:cNvPr id="22" name="Text 16"/>
+          <p:cNvSpPr txBox="1"/>
+          <p:nvPr/>
+        </p:nvSpPr>
+        <p:spPr>
+          <a:xfrm>
+            <a:off x="4480560" y="4800600"/>
+            <a:ext cx="3017520" cy="960120"/>
+          </a:xfrm>
+          <a:prstGeom prst="rect">
+            <a:avLst/>
+          </a:prstGeom>
+          <a:noFill/>
+          <a:ln/>
+        </p:spPr>
+        <p:txBody>
+          <a:bodyPr wrap="square" lIns="0" tIns="0" rIns="0" bIns="0" rtlCol="0" anchor="t"/>
+          <a:lstStyle/>
+          <a:p>
+            <a:pPr indent="0" marL="0">
+              <a:buNone/>
+            </a:pPr>
+            <a:r>
+              <a:rPr lang="en-US" sz="1400" dirty="0">
+                <a:solidFill>
+                  <a:schemeClr val="tx1"/>
+                </a:solidFill>
+              </a:rPr>
+              <a:t>Vienas realus sprendimas: tinklo plėtra, zonavimas ar atkūrimas</a:t>
+            </a:r>
+            <a:endParaRPr lang="en-US" sz="1400" dirty="0"/>
+          </a:p>
+        </p:txBody>
+      </p:sp>
+      <p:sp>
+        <p:nvSpPr>
+          <p:cNvPr id="23" name="pilot-result"/>
+          <p:cNvSpPr/>
+          <p:nvPr/>
+        </p:nvSpPr>
+        <p:spPr>
+          <a:xfrm>
+            <a:off x="8092440" y="1371600"/>
+            <a:ext cx="3520440" cy="4526280"/>
+          </a:xfrm>
+          <a:prstGeom prst="roundRect">
+            <a:avLst>
+              <a:gd name="adj" fmla="val 3117"/>
+            </a:avLst>
+          </a:prstGeom>
+          <a:solidFill>
+            <a:schemeClr val="tx2"/>
+          </a:solidFill>
+          <a:ln/>
+        </p:spPr>
+      </p:sp>
+      <p:sp>
+        <p:nvSpPr>
+          <p:cNvPr id="24" name="pilot-circle"/>
+          <p:cNvSpPr/>
+          <p:nvPr/>
+        </p:nvSpPr>
+        <p:spPr>
+          <a:xfrm>
+            <a:off x="8366760" y="1691640"/>
+            <a:ext cx="731520" cy="731520"/>
+          </a:xfrm>
+          <a:prstGeom prst="ellipse">
+            <a:avLst/>
+          </a:prstGeom>
+          <a:solidFill>
+            <a:schemeClr val="accent3"/>
+          </a:solidFill>
+          <a:ln/>
+        </p:spPr>
+      </p:sp>
+      <p:pic>
+        <p:nvPicPr>
+          <p:cNvPr id="25" name="pilot-icon" descr="preencoded.png">    </p:cNvPr>
+          <p:cNvPicPr>
+            <a:picLocks noChangeAspect="1"/>
+          </p:cNvPicPr>
+          <p:nvPr/>
+        </p:nvPicPr>
+        <p:blipFill>
+          <a:blip r:embed="rId5"/>
+          <a:stretch>
+            <a:fillRect/>
+          </a:stretch>
+        </p:blipFill>
+        <p:spPr>
+          <a:xfrm>
+            <a:off x="8542325" y="1867205"/>
+            <a:ext cx="380390" cy="380390"/>
+          </a:xfrm>
+          <a:prstGeom prst="rect">
+            <a:avLst/>
+          </a:prstGeom>
+        </p:spPr>
+      </p:pic>
+      <p:sp>
+        <p:nvSpPr>
+          <p:cNvPr id="26" name="Text 19"/>
+          <p:cNvSpPr txBox="1"/>
+          <p:nvPr/>
+        </p:nvSpPr>
+        <p:spPr>
+          <a:xfrm>
+            <a:off x="8366760" y="2651760"/>
+            <a:ext cx="2971800" cy="457200"/>
+          </a:xfrm>
+          <a:prstGeom prst="rect">
+            <a:avLst/>
+          </a:prstGeom>
+          <a:noFill/>
+          <a:ln/>
+        </p:spPr>
+        <p:txBody>
+          <a:bodyPr wrap="square" lIns="0" tIns="0" rIns="0" bIns="0" rtlCol="0" anchor="t"/>
+          <a:lstStyle/>
+          <a:p>
+            <a:pPr indent="0" marL="0">
+              <a:buNone/>
+            </a:pPr>
+            <a:r>
+              <a:rPr lang="en-US" sz="2000" b="1" dirty="0">
+                <a:solidFill>
+                  <a:schemeClr val="bg1"/>
+                </a:solidFill>
+                <a:latin typeface="Cambria" pitchFamily="34" charset="0"/>
+                <a:ea typeface="Cambria" pitchFamily="34" charset="-122"/>
+                <a:cs typeface="Cambria" pitchFamily="34" charset="-120"/>
+              </a:rPr>
+              <a:t>Rezultatas</a:t>
+            </a:r>
+            <a:endParaRPr lang="en-US" sz="2000" dirty="0"/>
+          </a:p>
+        </p:txBody>
+      </p:sp>
+      <p:sp>
+        <p:nvSpPr>
+          <p:cNvPr id="27" name="Text 20"/>
+          <p:cNvSpPr txBox="1"/>
+          <p:nvPr/>
+        </p:nvSpPr>
+        <p:spPr>
+          <a:xfrm>
+            <a:off x="8366760" y="3154680"/>
+            <a:ext cx="2971800" cy="2377440"/>
+          </a:xfrm>
+          <a:prstGeom prst="rect">
+            <a:avLst/>
+          </a:prstGeom>
+          <a:noFill/>
+          <a:ln/>
+        </p:spPr>
+        <p:txBody>
+          <a:bodyPr wrap="square" lIns="0" tIns="0" rIns="0" bIns="0" rtlCol="0" anchor="t"/>
+          <a:lstStyle/>
+          <a:p>
+            <a:pPr indent="0" marL="0">
+              <a:buNone/>
+            </a:pPr>
+            <a:r>
+              <a:rPr lang="en-US" sz="1600" dirty="0">
+                <a:solidFill>
+                  <a:schemeClr val="bg1"/>
+                </a:solidFill>
+              </a:rPr>
+              <a:t>Skaidrus, pakartojamas ir argumentuotas planas su alternatyvomis, kurį galima aptarti su savivaldybėmis, naudotojais ir bendruomene.</a:t>
+            </a:r>
+            <a:endParaRPr lang="en-US" sz="1600" dirty="0"/>
+          </a:p>
+        </p:txBody>
+      </p:sp>
+      <p:sp>
+        <p:nvSpPr>
+          <p:cNvPr id="25" name="Slide Number Placeholder 0"/>
+          <p:cNvSpPr>
+            <a:spLocks noGrp="1"/>
+          </p:cNvSpPr>
+          <p:nvPr>
+            <p:ph type="sldNum" sz="quarter" idx="4294967295"/>
+          </p:nvPr>
+        </p:nvSpPr>
+        <p:spPr>
+          <a:xfrm>
+            <a:off x="11064240" y="6355080"/>
+            <a:ext cx="548640" cy="274320"/>
+          </a:xfrm>
+          <a:prstGeom prst="rect">
+            <a:avLst/>
+          </a:prstGeom>
+          <a:extLst>
+            <a:ext uri="{C572A759-6A51-4108-AA02-DFA0A04FC94B}">
+              <ma14:wrappingTextBoxFlag xmlns:ma14="http://schemas.microsoft.com/office/mac/drawingml/2011/main" val="0"/>
+            </a:ext>
+          </a:extLst>
+        </p:spPr>
+        <p:txBody>
+          <a:bodyPr/>
+          <a:lstStyle>
+            <a:lvl1pPr>
+              <a:defRPr sz="1000">
+                <a:solidFill>
+                  <a:schemeClr val="accent4"/>
+                </a:solidFill>
+              </a:defRPr>
+            </a:lvl1pPr>
+          </a:lstStyle>
+          <a:p>
+            <a:pPr algn="r"/>
+            <a:fld id="{F7021451-1387-4CA6-816F-3879F97B5CBC}" type="slidenum">
+              <a:rPr b="0" lang="en-US"/>
+              <a:t>16</a:t>
+            </a:fld>
+            <a:endParaRPr lang="en-US"/>
+          </a:p>
+        </p:txBody>
+      </p:sp>
+    </p:spTree>
+  </p:cSld>
+  <p:clrMapOvr>
+    <a:masterClrMapping/>
+  </p:clrMapOvr>
+</p:sld>
+</file>
+
+<file path=ppt/slides/slide17.xml><?xml version="1.0" encoding="utf-8"?>
+<p:sld xmlns:a="http://schemas.openxmlformats.org/drawingml/2006/main" xmlns:r="http://schemas.openxmlformats.org/officeDocument/2006/relationships" xmlns:p="http://schemas.openxmlformats.org/presentationml/2006/main">
+  <p:cSld name="Slide 17">
     <p:spTree>
       <p:nvGrpSpPr>
         <p:cNvPr id="1" name=""/>
@@ -12076,70 +12819,22 @@
                 <a:ea typeface="Cambria" pitchFamily="34" charset="-122"/>
                 <a:cs typeface="Cambria" pitchFamily="34" charset="-120"/>
               </a:rPr>
-              <a:t>Upių atkūrimas: kuriuos barjerus šalinti</a:t>
+              <a:t>Zonavimas: nendrynų mozaika Kuršių nerijoje</a:t>
             </a:r>
             <a:endParaRPr lang="en-US" sz="3200" dirty="0"/>
           </a:p>
         </p:txBody>
       </p:sp>
-      <p:pic>
-        <p:nvPicPr>
-          <p:cNvPr id="3" name="river-map" descr="/home/razinka/marxan/docs/presentations/2026-10-20-saugomos-teritorijos/river_network_optimization_lt.png">    </p:cNvPr>
-          <p:cNvPicPr>
-            <a:picLocks noChangeAspect="1"/>
-          </p:cNvPicPr>
-          <p:nvPr/>
-        </p:nvPicPr>
-        <p:blipFill>
-          <a:blip r:embed="rId1"/>
-          <a:stretch>
-            <a:fillRect/>
-          </a:stretch>
-        </p:blipFill>
-        <p:spPr>
-          <a:xfrm>
-            <a:off x="548640" y="1325880"/>
-            <a:ext cx="6766560" cy="3865856"/>
-          </a:xfrm>
-          <a:prstGeom prst="rect">
-            <a:avLst/>
-          </a:prstGeom>
-        </p:spPr>
-      </p:pic>
-      <p:pic>
-        <p:nvPicPr>
-          <p:cNvPr id="4" name="dci-frontier" descr="/home/razinka/marxan/docs/presentations/2026-10-20-saugomos-teritorijos/dci_budget_frontier_lt.png">    </p:cNvPr>
-          <p:cNvPicPr>
-            <a:picLocks noChangeAspect="1"/>
-          </p:cNvPicPr>
-          <p:nvPr/>
-        </p:nvPicPr>
-        <p:blipFill>
-          <a:blip r:embed="rId2"/>
-          <a:stretch>
-            <a:fillRect/>
-          </a:stretch>
-        </p:blipFill>
-        <p:spPr>
-          <a:xfrm>
-            <a:off x="7680960" y="1325880"/>
-            <a:ext cx="3931920" cy="2429885"/>
-          </a:xfrm>
-          <a:prstGeom prst="rect">
-            <a:avLst/>
-          </a:prstGeom>
-        </p:spPr>
-      </p:pic>
-      <p:sp>
-        <p:nvSpPr>
-          <p:cNvPr id="5" name="Text 1"/>
+      <p:sp>
+        <p:nvSpPr>
+          <p:cNvPr id="3" name="Text 1"/>
           <p:cNvSpPr txBox="1"/>
           <p:nvPr/>
         </p:nvSpPr>
         <p:spPr>
           <a:xfrm>
-            <a:off x="7680960" y="3931920"/>
-            <a:ext cx="3931920" cy="2194560"/>
+            <a:off x="548640" y="1188720"/>
+            <a:ext cx="11064240" cy="640080"/>
           </a:xfrm>
           <a:prstGeom prst="rect">
             <a:avLst/>
@@ -12151,12 +12846,2432 @@
           <a:bodyPr wrap="square" lIns="0" tIns="0" rIns="0" bIns="0" rtlCol="0" anchor="t"/>
           <a:lstStyle/>
           <a:p>
-            <a:pPr marL="342900" indent="-342900">
-              <a:spcAft>
-                <a:spcPts val="600"/>
-              </a:spcAft>
-              <a:buSzPct val="100000"/>
-              <a:buChar char="•"/>
+            <a:pPr indent="0" marL="0">
+              <a:buNone/>
+            </a:pPr>
+            <a:r>
+              <a:rPr lang="en-US" sz="1600" dirty="0">
+                <a:solidFill>
+                  <a:schemeClr val="tx1"/>
+                </a:solidFill>
+              </a:rPr>
+              <a:t>Nendrynų įvairovė didžiausia, kai pjaunami ir nepjaunami ruožai kaitaliojasi. Kiekviena jų riba gauna premiją, todėl planas skaido nendryną, o ne jungia jį į ištisus plotus.</a:t>
+            </a:r>
+            <a:endParaRPr lang="en-US" sz="1600" dirty="0"/>
+          </a:p>
+        </p:txBody>
+      </p:sp>
+      <p:sp>
+        <p:nvSpPr>
+          <p:cNvPr id="4" name="Text 2"/>
+          <p:cNvSpPr txBox="1"/>
+          <p:nvPr/>
+        </p:nvSpPr>
+        <p:spPr>
+          <a:xfrm>
+            <a:off x="548640" y="2057400"/>
+            <a:ext cx="7315200" cy="320040"/>
+          </a:xfrm>
+          <a:prstGeom prst="rect">
+            <a:avLst/>
+          </a:prstGeom>
+          <a:noFill/>
+          <a:ln/>
+        </p:spPr>
+        <p:txBody>
+          <a:bodyPr wrap="square" lIns="0" tIns="0" rIns="0" bIns="0" rtlCol="0" anchor="t"/>
+          <a:lstStyle/>
+          <a:p>
+            <a:pPr indent="0" marL="0">
+              <a:buNone/>
+            </a:pPr>
+            <a:r>
+              <a:rPr lang="en-US" sz="1400" b="1" dirty="0">
+                <a:solidFill>
+                  <a:schemeClr val="tx2"/>
+                </a:solidFill>
+              </a:rPr>
+              <a:t>Pigiausias planas (be premijos)</a:t>
+            </a:r>
+            <a:endParaRPr lang="en-US" sz="1400" dirty="0"/>
+          </a:p>
+        </p:txBody>
+      </p:sp>
+      <p:sp>
+        <p:nvSpPr>
+          <p:cNvPr id="5" name="mosaic-2.25-0"/>
+          <p:cNvSpPr/>
+          <p:nvPr/>
+        </p:nvSpPr>
+        <p:spPr>
+          <a:xfrm>
+            <a:off x="548640" y="2423160"/>
+            <a:ext cx="189914" cy="457200"/>
+          </a:xfrm>
+          <a:prstGeom prst="rect">
+            <a:avLst/>
+          </a:prstGeom>
+          <a:solidFill>
+            <a:schemeClr val="accent3"/>
+          </a:solidFill>
+          <a:ln/>
+        </p:spPr>
+      </p:sp>
+      <p:sp>
+        <p:nvSpPr>
+          <p:cNvPr id="6" name="mosaic-2.25-1"/>
+          <p:cNvSpPr/>
+          <p:nvPr/>
+        </p:nvSpPr>
+        <p:spPr>
+          <a:xfrm>
+            <a:off x="761414" y="2423160"/>
+            <a:ext cx="189914" cy="457200"/>
+          </a:xfrm>
+          <a:prstGeom prst="rect">
+            <a:avLst/>
+          </a:prstGeom>
+          <a:solidFill>
+            <a:schemeClr val="accent3"/>
+          </a:solidFill>
+          <a:ln/>
+        </p:spPr>
+      </p:sp>
+      <p:sp>
+        <p:nvSpPr>
+          <p:cNvPr id="7" name="mosaic-2.25-2"/>
+          <p:cNvSpPr/>
+          <p:nvPr/>
+        </p:nvSpPr>
+        <p:spPr>
+          <a:xfrm>
+            <a:off x="974188" y="2423160"/>
+            <a:ext cx="189914" cy="457200"/>
+          </a:xfrm>
+          <a:prstGeom prst="rect">
+            <a:avLst/>
+          </a:prstGeom>
+          <a:solidFill>
+            <a:schemeClr val="accent1"/>
+          </a:solidFill>
+          <a:ln/>
+        </p:spPr>
+      </p:sp>
+      <p:sp>
+        <p:nvSpPr>
+          <p:cNvPr id="8" name="mosaic-2.25-3"/>
+          <p:cNvSpPr/>
+          <p:nvPr/>
+        </p:nvSpPr>
+        <p:spPr>
+          <a:xfrm>
+            <a:off x="1186962" y="2423160"/>
+            <a:ext cx="189914" cy="457200"/>
+          </a:xfrm>
+          <a:prstGeom prst="rect">
+            <a:avLst/>
+          </a:prstGeom>
+          <a:solidFill>
+            <a:schemeClr val="accent1"/>
+          </a:solidFill>
+          <a:ln/>
+        </p:spPr>
+      </p:sp>
+      <p:sp>
+        <p:nvSpPr>
+          <p:cNvPr id="9" name="mosaic-2.25-4"/>
+          <p:cNvSpPr/>
+          <p:nvPr/>
+        </p:nvSpPr>
+        <p:spPr>
+          <a:xfrm>
+            <a:off x="1399735" y="2423160"/>
+            <a:ext cx="189914" cy="457200"/>
+          </a:xfrm>
+          <a:prstGeom prst="rect">
+            <a:avLst/>
+          </a:prstGeom>
+          <a:solidFill>
+            <a:schemeClr val="accent1"/>
+          </a:solidFill>
+          <a:ln/>
+        </p:spPr>
+      </p:sp>
+      <p:sp>
+        <p:nvSpPr>
+          <p:cNvPr id="10" name="mosaic-2.25-5"/>
+          <p:cNvSpPr/>
+          <p:nvPr/>
+        </p:nvSpPr>
+        <p:spPr>
+          <a:xfrm>
+            <a:off x="1612509" y="2423160"/>
+            <a:ext cx="189914" cy="457200"/>
+          </a:xfrm>
+          <a:prstGeom prst="rect">
+            <a:avLst/>
+          </a:prstGeom>
+          <a:solidFill>
+            <a:schemeClr val="accent1"/>
+          </a:solidFill>
+          <a:ln/>
+        </p:spPr>
+      </p:sp>
+      <p:sp>
+        <p:nvSpPr>
+          <p:cNvPr id="11" name="mosaic-2.25-6"/>
+          <p:cNvSpPr/>
+          <p:nvPr/>
+        </p:nvSpPr>
+        <p:spPr>
+          <a:xfrm>
+            <a:off x="1825283" y="2423160"/>
+            <a:ext cx="189914" cy="457200"/>
+          </a:xfrm>
+          <a:prstGeom prst="rect">
+            <a:avLst/>
+          </a:prstGeom>
+          <a:solidFill>
+            <a:schemeClr val="accent1"/>
+          </a:solidFill>
+          <a:ln/>
+        </p:spPr>
+      </p:sp>
+      <p:sp>
+        <p:nvSpPr>
+          <p:cNvPr id="12" name="mosaic-2.25-7"/>
+          <p:cNvSpPr/>
+          <p:nvPr/>
+        </p:nvSpPr>
+        <p:spPr>
+          <a:xfrm>
+            <a:off x="2038057" y="2423160"/>
+            <a:ext cx="189914" cy="457200"/>
+          </a:xfrm>
+          <a:prstGeom prst="rect">
+            <a:avLst/>
+          </a:prstGeom>
+          <a:solidFill>
+            <a:schemeClr val="accent1"/>
+          </a:solidFill>
+          <a:ln/>
+        </p:spPr>
+      </p:sp>
+      <p:sp>
+        <p:nvSpPr>
+          <p:cNvPr id="13" name="mosaic-2.25-8"/>
+          <p:cNvSpPr/>
+          <p:nvPr/>
+        </p:nvSpPr>
+        <p:spPr>
+          <a:xfrm>
+            <a:off x="2250831" y="2423160"/>
+            <a:ext cx="189914" cy="457200"/>
+          </a:xfrm>
+          <a:prstGeom prst="rect">
+            <a:avLst/>
+          </a:prstGeom>
+          <a:solidFill>
+            <a:schemeClr val="accent1"/>
+          </a:solidFill>
+          <a:ln/>
+        </p:spPr>
+      </p:sp>
+      <p:sp>
+        <p:nvSpPr>
+          <p:cNvPr id="14" name="mosaic-2.25-9"/>
+          <p:cNvSpPr/>
+          <p:nvPr/>
+        </p:nvSpPr>
+        <p:spPr>
+          <a:xfrm>
+            <a:off x="2463605" y="2423160"/>
+            <a:ext cx="189914" cy="457200"/>
+          </a:xfrm>
+          <a:prstGeom prst="rect">
+            <a:avLst/>
+          </a:prstGeom>
+          <a:solidFill>
+            <a:schemeClr val="accent1"/>
+          </a:solidFill>
+          <a:ln/>
+        </p:spPr>
+      </p:sp>
+      <p:sp>
+        <p:nvSpPr>
+          <p:cNvPr id="15" name="mosaic-2.25-10"/>
+          <p:cNvSpPr/>
+          <p:nvPr/>
+        </p:nvSpPr>
+        <p:spPr>
+          <a:xfrm>
+            <a:off x="2676378" y="2423160"/>
+            <a:ext cx="189914" cy="457200"/>
+          </a:xfrm>
+          <a:prstGeom prst="rect">
+            <a:avLst/>
+          </a:prstGeom>
+          <a:solidFill>
+            <a:schemeClr val="accent1"/>
+          </a:solidFill>
+          <a:ln/>
+        </p:spPr>
+      </p:sp>
+      <p:sp>
+        <p:nvSpPr>
+          <p:cNvPr id="16" name="mosaic-2.25-11"/>
+          <p:cNvSpPr/>
+          <p:nvPr/>
+        </p:nvSpPr>
+        <p:spPr>
+          <a:xfrm>
+            <a:off x="2889152" y="2423160"/>
+            <a:ext cx="189914" cy="457200"/>
+          </a:xfrm>
+          <a:prstGeom prst="rect">
+            <a:avLst/>
+          </a:prstGeom>
+          <a:solidFill>
+            <a:schemeClr val="accent1"/>
+          </a:solidFill>
+          <a:ln/>
+        </p:spPr>
+      </p:sp>
+      <p:sp>
+        <p:nvSpPr>
+          <p:cNvPr id="17" name="mosaic-2.25-12"/>
+          <p:cNvSpPr/>
+          <p:nvPr/>
+        </p:nvSpPr>
+        <p:spPr>
+          <a:xfrm>
+            <a:off x="3101926" y="2423160"/>
+            <a:ext cx="189914" cy="457200"/>
+          </a:xfrm>
+          <a:prstGeom prst="rect">
+            <a:avLst/>
+          </a:prstGeom>
+          <a:solidFill>
+            <a:schemeClr val="accent1"/>
+          </a:solidFill>
+          <a:ln/>
+        </p:spPr>
+      </p:sp>
+      <p:sp>
+        <p:nvSpPr>
+          <p:cNvPr id="18" name="mosaic-2.25-13"/>
+          <p:cNvSpPr/>
+          <p:nvPr/>
+        </p:nvSpPr>
+        <p:spPr>
+          <a:xfrm>
+            <a:off x="3314700" y="2423160"/>
+            <a:ext cx="189914" cy="457200"/>
+          </a:xfrm>
+          <a:prstGeom prst="rect">
+            <a:avLst/>
+          </a:prstGeom>
+          <a:solidFill>
+            <a:schemeClr val="accent1"/>
+          </a:solidFill>
+          <a:ln/>
+        </p:spPr>
+      </p:sp>
+      <p:sp>
+        <p:nvSpPr>
+          <p:cNvPr id="19" name="mosaic-2.25-14"/>
+          <p:cNvSpPr/>
+          <p:nvPr/>
+        </p:nvSpPr>
+        <p:spPr>
+          <a:xfrm>
+            <a:off x="3527474" y="2423160"/>
+            <a:ext cx="189914" cy="457200"/>
+          </a:xfrm>
+          <a:prstGeom prst="rect">
+            <a:avLst/>
+          </a:prstGeom>
+          <a:solidFill>
+            <a:schemeClr val="accent1"/>
+          </a:solidFill>
+          <a:ln/>
+        </p:spPr>
+      </p:sp>
+      <p:sp>
+        <p:nvSpPr>
+          <p:cNvPr id="20" name="mosaic-2.25-15"/>
+          <p:cNvSpPr/>
+          <p:nvPr/>
+        </p:nvSpPr>
+        <p:spPr>
+          <a:xfrm>
+            <a:off x="3740248" y="2423160"/>
+            <a:ext cx="189914" cy="457200"/>
+          </a:xfrm>
+          <a:prstGeom prst="rect">
+            <a:avLst/>
+          </a:prstGeom>
+          <a:solidFill>
+            <a:schemeClr val="accent1"/>
+          </a:solidFill>
+          <a:ln/>
+        </p:spPr>
+      </p:sp>
+      <p:sp>
+        <p:nvSpPr>
+          <p:cNvPr id="21" name="mosaic-2.25-16"/>
+          <p:cNvSpPr/>
+          <p:nvPr/>
+        </p:nvSpPr>
+        <p:spPr>
+          <a:xfrm>
+            <a:off x="3953022" y="2423160"/>
+            <a:ext cx="189914" cy="457200"/>
+          </a:xfrm>
+          <a:prstGeom prst="rect">
+            <a:avLst/>
+          </a:prstGeom>
+          <a:solidFill>
+            <a:schemeClr val="accent1"/>
+          </a:solidFill>
+          <a:ln/>
+        </p:spPr>
+      </p:sp>
+      <p:sp>
+        <p:nvSpPr>
+          <p:cNvPr id="22" name="mosaic-2.25-17"/>
+          <p:cNvSpPr/>
+          <p:nvPr/>
+        </p:nvSpPr>
+        <p:spPr>
+          <a:xfrm>
+            <a:off x="4165795" y="2423160"/>
+            <a:ext cx="189914" cy="457200"/>
+          </a:xfrm>
+          <a:prstGeom prst="rect">
+            <a:avLst/>
+          </a:prstGeom>
+          <a:solidFill>
+            <a:schemeClr val="accent3"/>
+          </a:solidFill>
+          <a:ln/>
+        </p:spPr>
+      </p:sp>
+      <p:sp>
+        <p:nvSpPr>
+          <p:cNvPr id="23" name="mosaic-2.25-18"/>
+          <p:cNvSpPr/>
+          <p:nvPr/>
+        </p:nvSpPr>
+        <p:spPr>
+          <a:xfrm>
+            <a:off x="4378569" y="2423160"/>
+            <a:ext cx="189914" cy="457200"/>
+          </a:xfrm>
+          <a:prstGeom prst="rect">
+            <a:avLst/>
+          </a:prstGeom>
+          <a:solidFill>
+            <a:schemeClr val="accent3"/>
+          </a:solidFill>
+          <a:ln/>
+        </p:spPr>
+      </p:sp>
+      <p:sp>
+        <p:nvSpPr>
+          <p:cNvPr id="24" name="mosaic-2.25-19"/>
+          <p:cNvSpPr/>
+          <p:nvPr/>
+        </p:nvSpPr>
+        <p:spPr>
+          <a:xfrm>
+            <a:off x="4591343" y="2423160"/>
+            <a:ext cx="189914" cy="457200"/>
+          </a:xfrm>
+          <a:prstGeom prst="rect">
+            <a:avLst/>
+          </a:prstGeom>
+          <a:solidFill>
+            <a:schemeClr val="accent3"/>
+          </a:solidFill>
+          <a:ln/>
+        </p:spPr>
+      </p:sp>
+      <p:sp>
+        <p:nvSpPr>
+          <p:cNvPr id="25" name="mosaic-2.25-20"/>
+          <p:cNvSpPr/>
+          <p:nvPr/>
+        </p:nvSpPr>
+        <p:spPr>
+          <a:xfrm>
+            <a:off x="4804117" y="2423160"/>
+            <a:ext cx="189914" cy="457200"/>
+          </a:xfrm>
+          <a:prstGeom prst="rect">
+            <a:avLst/>
+          </a:prstGeom>
+          <a:solidFill>
+            <a:schemeClr val="accent1"/>
+          </a:solidFill>
+          <a:ln/>
+        </p:spPr>
+      </p:sp>
+      <p:sp>
+        <p:nvSpPr>
+          <p:cNvPr id="26" name="mosaic-2.25-21"/>
+          <p:cNvSpPr/>
+          <p:nvPr/>
+        </p:nvSpPr>
+        <p:spPr>
+          <a:xfrm>
+            <a:off x="5016891" y="2423160"/>
+            <a:ext cx="189914" cy="457200"/>
+          </a:xfrm>
+          <a:prstGeom prst="rect">
+            <a:avLst/>
+          </a:prstGeom>
+          <a:solidFill>
+            <a:schemeClr val="accent1"/>
+          </a:solidFill>
+          <a:ln/>
+        </p:spPr>
+      </p:sp>
+      <p:sp>
+        <p:nvSpPr>
+          <p:cNvPr id="27" name="mosaic-2.25-22"/>
+          <p:cNvSpPr/>
+          <p:nvPr/>
+        </p:nvSpPr>
+        <p:spPr>
+          <a:xfrm>
+            <a:off x="5229665" y="2423160"/>
+            <a:ext cx="189914" cy="457200"/>
+          </a:xfrm>
+          <a:prstGeom prst="rect">
+            <a:avLst/>
+          </a:prstGeom>
+          <a:solidFill>
+            <a:schemeClr val="accent1"/>
+          </a:solidFill>
+          <a:ln/>
+        </p:spPr>
+      </p:sp>
+      <p:sp>
+        <p:nvSpPr>
+          <p:cNvPr id="28" name="mosaic-2.25-23"/>
+          <p:cNvSpPr/>
+          <p:nvPr/>
+        </p:nvSpPr>
+        <p:spPr>
+          <a:xfrm>
+            <a:off x="5442438" y="2423160"/>
+            <a:ext cx="189914" cy="457200"/>
+          </a:xfrm>
+          <a:prstGeom prst="rect">
+            <a:avLst/>
+          </a:prstGeom>
+          <a:solidFill>
+            <a:schemeClr val="accent1"/>
+          </a:solidFill>
+          <a:ln/>
+        </p:spPr>
+      </p:sp>
+      <p:sp>
+        <p:nvSpPr>
+          <p:cNvPr id="29" name="mosaic-2.25-24"/>
+          <p:cNvSpPr/>
+          <p:nvPr/>
+        </p:nvSpPr>
+        <p:spPr>
+          <a:xfrm>
+            <a:off x="5655212" y="2423160"/>
+            <a:ext cx="189914" cy="457200"/>
+          </a:xfrm>
+          <a:prstGeom prst="rect">
+            <a:avLst/>
+          </a:prstGeom>
+          <a:solidFill>
+            <a:schemeClr val="accent1"/>
+          </a:solidFill>
+          <a:ln/>
+        </p:spPr>
+      </p:sp>
+      <p:sp>
+        <p:nvSpPr>
+          <p:cNvPr id="30" name="mosaic-2.25-25"/>
+          <p:cNvSpPr/>
+          <p:nvPr/>
+        </p:nvSpPr>
+        <p:spPr>
+          <a:xfrm>
+            <a:off x="5867986" y="2423160"/>
+            <a:ext cx="189914" cy="457200"/>
+          </a:xfrm>
+          <a:prstGeom prst="rect">
+            <a:avLst/>
+          </a:prstGeom>
+          <a:solidFill>
+            <a:schemeClr val="accent1"/>
+          </a:solidFill>
+          <a:ln/>
+        </p:spPr>
+      </p:sp>
+      <p:sp>
+        <p:nvSpPr>
+          <p:cNvPr id="31" name="mosaic-2.25-26"/>
+          <p:cNvSpPr/>
+          <p:nvPr/>
+        </p:nvSpPr>
+        <p:spPr>
+          <a:xfrm>
+            <a:off x="6080760" y="2423160"/>
+            <a:ext cx="189914" cy="457200"/>
+          </a:xfrm>
+          <a:prstGeom prst="rect">
+            <a:avLst/>
+          </a:prstGeom>
+          <a:solidFill>
+            <a:schemeClr val="accent1"/>
+          </a:solidFill>
+          <a:ln/>
+        </p:spPr>
+      </p:sp>
+      <p:sp>
+        <p:nvSpPr>
+          <p:cNvPr id="32" name="mosaic-2.25-27"/>
+          <p:cNvSpPr/>
+          <p:nvPr/>
+        </p:nvSpPr>
+        <p:spPr>
+          <a:xfrm>
+            <a:off x="6293534" y="2423160"/>
+            <a:ext cx="189914" cy="457200"/>
+          </a:xfrm>
+          <a:prstGeom prst="rect">
+            <a:avLst/>
+          </a:prstGeom>
+          <a:solidFill>
+            <a:schemeClr val="accent1"/>
+          </a:solidFill>
+          <a:ln/>
+        </p:spPr>
+      </p:sp>
+      <p:sp>
+        <p:nvSpPr>
+          <p:cNvPr id="33" name="mosaic-2.25-28"/>
+          <p:cNvSpPr/>
+          <p:nvPr/>
+        </p:nvSpPr>
+        <p:spPr>
+          <a:xfrm>
+            <a:off x="6506308" y="2423160"/>
+            <a:ext cx="189914" cy="457200"/>
+          </a:xfrm>
+          <a:prstGeom prst="rect">
+            <a:avLst/>
+          </a:prstGeom>
+          <a:solidFill>
+            <a:schemeClr val="accent1"/>
+          </a:solidFill>
+          <a:ln/>
+        </p:spPr>
+      </p:sp>
+      <p:sp>
+        <p:nvSpPr>
+          <p:cNvPr id="34" name="mosaic-2.25-29"/>
+          <p:cNvSpPr/>
+          <p:nvPr/>
+        </p:nvSpPr>
+        <p:spPr>
+          <a:xfrm>
+            <a:off x="6719082" y="2423160"/>
+            <a:ext cx="189914" cy="457200"/>
+          </a:xfrm>
+          <a:prstGeom prst="rect">
+            <a:avLst/>
+          </a:prstGeom>
+          <a:solidFill>
+            <a:schemeClr val="accent1"/>
+          </a:solidFill>
+          <a:ln/>
+        </p:spPr>
+      </p:sp>
+      <p:sp>
+        <p:nvSpPr>
+          <p:cNvPr id="35" name="mosaic-2.25-30"/>
+          <p:cNvSpPr/>
+          <p:nvPr/>
+        </p:nvSpPr>
+        <p:spPr>
+          <a:xfrm>
+            <a:off x="6931855" y="2423160"/>
+            <a:ext cx="189914" cy="457200"/>
+          </a:xfrm>
+          <a:prstGeom prst="rect">
+            <a:avLst/>
+          </a:prstGeom>
+          <a:solidFill>
+            <a:schemeClr val="accent1"/>
+          </a:solidFill>
+          <a:ln/>
+        </p:spPr>
+      </p:sp>
+      <p:sp>
+        <p:nvSpPr>
+          <p:cNvPr id="36" name="mosaic-2.25-31"/>
+          <p:cNvSpPr/>
+          <p:nvPr/>
+        </p:nvSpPr>
+        <p:spPr>
+          <a:xfrm>
+            <a:off x="7144629" y="2423160"/>
+            <a:ext cx="189914" cy="457200"/>
+          </a:xfrm>
+          <a:prstGeom prst="rect">
+            <a:avLst/>
+          </a:prstGeom>
+          <a:solidFill>
+            <a:schemeClr val="accent1"/>
+          </a:solidFill>
+          <a:ln/>
+        </p:spPr>
+      </p:sp>
+      <p:sp>
+        <p:nvSpPr>
+          <p:cNvPr id="37" name="mosaic-2.25-32"/>
+          <p:cNvSpPr/>
+          <p:nvPr/>
+        </p:nvSpPr>
+        <p:spPr>
+          <a:xfrm>
+            <a:off x="7357403" y="2423160"/>
+            <a:ext cx="189914" cy="457200"/>
+          </a:xfrm>
+          <a:prstGeom prst="rect">
+            <a:avLst/>
+          </a:prstGeom>
+          <a:solidFill>
+            <a:schemeClr val="accent1"/>
+          </a:solidFill>
+          <a:ln/>
+        </p:spPr>
+      </p:sp>
+      <p:sp>
+        <p:nvSpPr>
+          <p:cNvPr id="38" name="mosaic-2.25-33"/>
+          <p:cNvSpPr/>
+          <p:nvPr/>
+        </p:nvSpPr>
+        <p:spPr>
+          <a:xfrm>
+            <a:off x="7570177" y="2423160"/>
+            <a:ext cx="189914" cy="457200"/>
+          </a:xfrm>
+          <a:prstGeom prst="rect">
+            <a:avLst/>
+          </a:prstGeom>
+          <a:solidFill>
+            <a:schemeClr val="accent1"/>
+          </a:solidFill>
+          <a:ln/>
+        </p:spPr>
+      </p:sp>
+      <p:sp>
+        <p:nvSpPr>
+          <p:cNvPr id="39" name="mosaic-2.25-34"/>
+          <p:cNvSpPr/>
+          <p:nvPr/>
+        </p:nvSpPr>
+        <p:spPr>
+          <a:xfrm>
+            <a:off x="7782951" y="2423160"/>
+            <a:ext cx="189914" cy="457200"/>
+          </a:xfrm>
+          <a:prstGeom prst="rect">
+            <a:avLst/>
+          </a:prstGeom>
+          <a:solidFill>
+            <a:schemeClr val="accent3"/>
+          </a:solidFill>
+          <a:ln/>
+        </p:spPr>
+      </p:sp>
+      <p:sp>
+        <p:nvSpPr>
+          <p:cNvPr id="40" name="mosaic-2.25-35"/>
+          <p:cNvSpPr/>
+          <p:nvPr/>
+        </p:nvSpPr>
+        <p:spPr>
+          <a:xfrm>
+            <a:off x="7995725" y="2423160"/>
+            <a:ext cx="189914" cy="457200"/>
+          </a:xfrm>
+          <a:prstGeom prst="rect">
+            <a:avLst/>
+          </a:prstGeom>
+          <a:solidFill>
+            <a:schemeClr val="accent3"/>
+          </a:solidFill>
+          <a:ln/>
+        </p:spPr>
+      </p:sp>
+      <p:sp>
+        <p:nvSpPr>
+          <p:cNvPr id="41" name="mosaic-2.25-36"/>
+          <p:cNvSpPr/>
+          <p:nvPr/>
+        </p:nvSpPr>
+        <p:spPr>
+          <a:xfrm>
+            <a:off x="8208498" y="2423160"/>
+            <a:ext cx="189914" cy="457200"/>
+          </a:xfrm>
+          <a:prstGeom prst="rect">
+            <a:avLst/>
+          </a:prstGeom>
+          <a:solidFill>
+            <a:schemeClr val="accent3"/>
+          </a:solidFill>
+          <a:ln/>
+        </p:spPr>
+      </p:sp>
+      <p:sp>
+        <p:nvSpPr>
+          <p:cNvPr id="42" name="mosaic-2.25-37"/>
+          <p:cNvSpPr/>
+          <p:nvPr/>
+        </p:nvSpPr>
+        <p:spPr>
+          <a:xfrm>
+            <a:off x="8421272" y="2423160"/>
+            <a:ext cx="189914" cy="457200"/>
+          </a:xfrm>
+          <a:prstGeom prst="rect">
+            <a:avLst/>
+          </a:prstGeom>
+          <a:solidFill>
+            <a:schemeClr val="accent1"/>
+          </a:solidFill>
+          <a:ln/>
+        </p:spPr>
+      </p:sp>
+      <p:sp>
+        <p:nvSpPr>
+          <p:cNvPr id="43" name="mosaic-2.25-38"/>
+          <p:cNvSpPr/>
+          <p:nvPr/>
+        </p:nvSpPr>
+        <p:spPr>
+          <a:xfrm>
+            <a:off x="8634046" y="2423160"/>
+            <a:ext cx="189914" cy="457200"/>
+          </a:xfrm>
+          <a:prstGeom prst="rect">
+            <a:avLst/>
+          </a:prstGeom>
+          <a:solidFill>
+            <a:schemeClr val="accent1"/>
+          </a:solidFill>
+          <a:ln/>
+        </p:spPr>
+      </p:sp>
+      <p:sp>
+        <p:nvSpPr>
+          <p:cNvPr id="44" name="mosaic-2.25-39"/>
+          <p:cNvSpPr/>
+          <p:nvPr/>
+        </p:nvSpPr>
+        <p:spPr>
+          <a:xfrm>
+            <a:off x="8846820" y="2423160"/>
+            <a:ext cx="189914" cy="457200"/>
+          </a:xfrm>
+          <a:prstGeom prst="rect">
+            <a:avLst/>
+          </a:prstGeom>
+          <a:solidFill>
+            <a:schemeClr val="accent1"/>
+          </a:solidFill>
+          <a:ln/>
+        </p:spPr>
+      </p:sp>
+      <p:sp>
+        <p:nvSpPr>
+          <p:cNvPr id="45" name="mosaic-2.25-40"/>
+          <p:cNvSpPr/>
+          <p:nvPr/>
+        </p:nvSpPr>
+        <p:spPr>
+          <a:xfrm>
+            <a:off x="9059594" y="2423160"/>
+            <a:ext cx="189914" cy="457200"/>
+          </a:xfrm>
+          <a:prstGeom prst="rect">
+            <a:avLst/>
+          </a:prstGeom>
+          <a:solidFill>
+            <a:schemeClr val="accent1"/>
+          </a:solidFill>
+          <a:ln/>
+        </p:spPr>
+      </p:sp>
+      <p:sp>
+        <p:nvSpPr>
+          <p:cNvPr id="46" name="mosaic-2.25-41"/>
+          <p:cNvSpPr/>
+          <p:nvPr/>
+        </p:nvSpPr>
+        <p:spPr>
+          <a:xfrm>
+            <a:off x="9272368" y="2423160"/>
+            <a:ext cx="189914" cy="457200"/>
+          </a:xfrm>
+          <a:prstGeom prst="rect">
+            <a:avLst/>
+          </a:prstGeom>
+          <a:solidFill>
+            <a:schemeClr val="accent1"/>
+          </a:solidFill>
+          <a:ln/>
+        </p:spPr>
+      </p:sp>
+      <p:sp>
+        <p:nvSpPr>
+          <p:cNvPr id="47" name="mosaic-2.25-42"/>
+          <p:cNvSpPr/>
+          <p:nvPr/>
+        </p:nvSpPr>
+        <p:spPr>
+          <a:xfrm>
+            <a:off x="9485142" y="2423160"/>
+            <a:ext cx="189914" cy="457200"/>
+          </a:xfrm>
+          <a:prstGeom prst="rect">
+            <a:avLst/>
+          </a:prstGeom>
+          <a:solidFill>
+            <a:schemeClr val="accent1"/>
+          </a:solidFill>
+          <a:ln/>
+        </p:spPr>
+      </p:sp>
+      <p:sp>
+        <p:nvSpPr>
+          <p:cNvPr id="48" name="mosaic-2.25-43"/>
+          <p:cNvSpPr/>
+          <p:nvPr/>
+        </p:nvSpPr>
+        <p:spPr>
+          <a:xfrm>
+            <a:off x="9697915" y="2423160"/>
+            <a:ext cx="189914" cy="457200"/>
+          </a:xfrm>
+          <a:prstGeom prst="rect">
+            <a:avLst/>
+          </a:prstGeom>
+          <a:solidFill>
+            <a:schemeClr val="accent3"/>
+          </a:solidFill>
+          <a:ln/>
+        </p:spPr>
+      </p:sp>
+      <p:sp>
+        <p:nvSpPr>
+          <p:cNvPr id="49" name="mosaic-2.25-44"/>
+          <p:cNvSpPr/>
+          <p:nvPr/>
+        </p:nvSpPr>
+        <p:spPr>
+          <a:xfrm>
+            <a:off x="9910689" y="2423160"/>
+            <a:ext cx="189914" cy="457200"/>
+          </a:xfrm>
+          <a:prstGeom prst="rect">
+            <a:avLst/>
+          </a:prstGeom>
+          <a:solidFill>
+            <a:schemeClr val="accent3"/>
+          </a:solidFill>
+          <a:ln/>
+        </p:spPr>
+      </p:sp>
+      <p:sp>
+        <p:nvSpPr>
+          <p:cNvPr id="50" name="mosaic-2.25-45"/>
+          <p:cNvSpPr/>
+          <p:nvPr/>
+        </p:nvSpPr>
+        <p:spPr>
+          <a:xfrm>
+            <a:off x="10123463" y="2423160"/>
+            <a:ext cx="189914" cy="457200"/>
+          </a:xfrm>
+          <a:prstGeom prst="rect">
+            <a:avLst/>
+          </a:prstGeom>
+          <a:solidFill>
+            <a:schemeClr val="accent3"/>
+          </a:solidFill>
+          <a:ln/>
+        </p:spPr>
+      </p:sp>
+      <p:sp>
+        <p:nvSpPr>
+          <p:cNvPr id="51" name="mosaic-2.25-46"/>
+          <p:cNvSpPr/>
+          <p:nvPr/>
+        </p:nvSpPr>
+        <p:spPr>
+          <a:xfrm>
+            <a:off x="10336237" y="2423160"/>
+            <a:ext cx="189914" cy="457200"/>
+          </a:xfrm>
+          <a:prstGeom prst="rect">
+            <a:avLst/>
+          </a:prstGeom>
+          <a:solidFill>
+            <a:schemeClr val="accent3"/>
+          </a:solidFill>
+          <a:ln/>
+        </p:spPr>
+      </p:sp>
+      <p:sp>
+        <p:nvSpPr>
+          <p:cNvPr id="52" name="mosaic-2.25-47"/>
+          <p:cNvSpPr/>
+          <p:nvPr/>
+        </p:nvSpPr>
+        <p:spPr>
+          <a:xfrm>
+            <a:off x="10549011" y="2423160"/>
+            <a:ext cx="189914" cy="457200"/>
+          </a:xfrm>
+          <a:prstGeom prst="rect">
+            <a:avLst/>
+          </a:prstGeom>
+          <a:solidFill>
+            <a:schemeClr val="accent1"/>
+          </a:solidFill>
+          <a:ln/>
+        </p:spPr>
+      </p:sp>
+      <p:sp>
+        <p:nvSpPr>
+          <p:cNvPr id="53" name="mosaic-2.25-48"/>
+          <p:cNvSpPr/>
+          <p:nvPr/>
+        </p:nvSpPr>
+        <p:spPr>
+          <a:xfrm>
+            <a:off x="10761785" y="2423160"/>
+            <a:ext cx="189914" cy="457200"/>
+          </a:xfrm>
+          <a:prstGeom prst="rect">
+            <a:avLst/>
+          </a:prstGeom>
+          <a:solidFill>
+            <a:schemeClr val="accent1"/>
+          </a:solidFill>
+          <a:ln/>
+        </p:spPr>
+      </p:sp>
+      <p:sp>
+        <p:nvSpPr>
+          <p:cNvPr id="54" name="mosaic-2.25-49"/>
+          <p:cNvSpPr/>
+          <p:nvPr/>
+        </p:nvSpPr>
+        <p:spPr>
+          <a:xfrm>
+            <a:off x="10974558" y="2423160"/>
+            <a:ext cx="189914" cy="457200"/>
+          </a:xfrm>
+          <a:prstGeom prst="rect">
+            <a:avLst/>
+          </a:prstGeom>
+          <a:solidFill>
+            <a:schemeClr val="accent1"/>
+          </a:solidFill>
+          <a:ln/>
+        </p:spPr>
+      </p:sp>
+      <p:sp>
+        <p:nvSpPr>
+          <p:cNvPr id="55" name="mosaic-2.25-50"/>
+          <p:cNvSpPr/>
+          <p:nvPr/>
+        </p:nvSpPr>
+        <p:spPr>
+          <a:xfrm>
+            <a:off x="11187332" y="2423160"/>
+            <a:ext cx="189914" cy="457200"/>
+          </a:xfrm>
+          <a:prstGeom prst="rect">
+            <a:avLst/>
+          </a:prstGeom>
+          <a:solidFill>
+            <a:schemeClr val="accent1"/>
+          </a:solidFill>
+          <a:ln/>
+        </p:spPr>
+      </p:sp>
+      <p:sp>
+        <p:nvSpPr>
+          <p:cNvPr id="56" name="mosaic-2.25-51"/>
+          <p:cNvSpPr/>
+          <p:nvPr/>
+        </p:nvSpPr>
+        <p:spPr>
+          <a:xfrm>
+            <a:off x="11400106" y="2423160"/>
+            <a:ext cx="189914" cy="457200"/>
+          </a:xfrm>
+          <a:prstGeom prst="rect">
+            <a:avLst/>
+          </a:prstGeom>
+          <a:solidFill>
+            <a:schemeClr val="accent1"/>
+          </a:solidFill>
+          <a:ln/>
+        </p:spPr>
+      </p:sp>
+      <p:sp>
+        <p:nvSpPr>
+          <p:cNvPr id="57" name="Text 55"/>
+          <p:cNvSpPr txBox="1"/>
+          <p:nvPr/>
+        </p:nvSpPr>
+        <p:spPr>
+          <a:xfrm>
+            <a:off x="548640" y="3063240"/>
+            <a:ext cx="7315200" cy="320040"/>
+          </a:xfrm>
+          <a:prstGeom prst="rect">
+            <a:avLst/>
+          </a:prstGeom>
+          <a:noFill/>
+          <a:ln/>
+        </p:spPr>
+        <p:txBody>
+          <a:bodyPr wrap="square" lIns="0" tIns="0" rIns="0" bIns="0" rtlCol="0" anchor="t"/>
+          <a:lstStyle/>
+          <a:p>
+            <a:pPr indent="0" marL="0">
+              <a:buNone/>
+            </a:pPr>
+            <a:r>
+              <a:rPr lang="en-US" sz="1400" b="1" dirty="0">
+                <a:solidFill>
+                  <a:schemeClr val="tx2"/>
+                </a:solidFill>
+              </a:rPr>
+              <a:t>Mozaika (premija 1,0 k€ už kiekvieną ribą)</a:t>
+            </a:r>
+            <a:endParaRPr lang="en-US" sz="1400" dirty="0"/>
+          </a:p>
+        </p:txBody>
+      </p:sp>
+      <p:sp>
+        <p:nvSpPr>
+          <p:cNvPr id="58" name="mosaic-3.35-0"/>
+          <p:cNvSpPr/>
+          <p:nvPr/>
+        </p:nvSpPr>
+        <p:spPr>
+          <a:xfrm>
+            <a:off x="548640" y="3429000"/>
+            <a:ext cx="189914" cy="457200"/>
+          </a:xfrm>
+          <a:prstGeom prst="rect">
+            <a:avLst/>
+          </a:prstGeom>
+          <a:solidFill>
+            <a:schemeClr val="accent3"/>
+          </a:solidFill>
+          <a:ln/>
+        </p:spPr>
+      </p:sp>
+      <p:sp>
+        <p:nvSpPr>
+          <p:cNvPr id="59" name="mosaic-3.35-1"/>
+          <p:cNvSpPr/>
+          <p:nvPr/>
+        </p:nvSpPr>
+        <p:spPr>
+          <a:xfrm>
+            <a:off x="761414" y="3429000"/>
+            <a:ext cx="189914" cy="457200"/>
+          </a:xfrm>
+          <a:prstGeom prst="rect">
+            <a:avLst/>
+          </a:prstGeom>
+          <a:solidFill>
+            <a:schemeClr val="accent1"/>
+          </a:solidFill>
+          <a:ln/>
+        </p:spPr>
+      </p:sp>
+      <p:sp>
+        <p:nvSpPr>
+          <p:cNvPr id="60" name="mosaic-3.35-2"/>
+          <p:cNvSpPr/>
+          <p:nvPr/>
+        </p:nvSpPr>
+        <p:spPr>
+          <a:xfrm>
+            <a:off x="974188" y="3429000"/>
+            <a:ext cx="189914" cy="457200"/>
+          </a:xfrm>
+          <a:prstGeom prst="rect">
+            <a:avLst/>
+          </a:prstGeom>
+          <a:solidFill>
+            <a:schemeClr val="accent3"/>
+          </a:solidFill>
+          <a:ln/>
+        </p:spPr>
+      </p:sp>
+      <p:sp>
+        <p:nvSpPr>
+          <p:cNvPr id="61" name="mosaic-3.35-3"/>
+          <p:cNvSpPr/>
+          <p:nvPr/>
+        </p:nvSpPr>
+        <p:spPr>
+          <a:xfrm>
+            <a:off x="1186962" y="3429000"/>
+            <a:ext cx="189914" cy="457200"/>
+          </a:xfrm>
+          <a:prstGeom prst="rect">
+            <a:avLst/>
+          </a:prstGeom>
+          <a:solidFill>
+            <a:schemeClr val="accent1"/>
+          </a:solidFill>
+          <a:ln/>
+        </p:spPr>
+      </p:sp>
+      <p:sp>
+        <p:nvSpPr>
+          <p:cNvPr id="62" name="mosaic-3.35-4"/>
+          <p:cNvSpPr/>
+          <p:nvPr/>
+        </p:nvSpPr>
+        <p:spPr>
+          <a:xfrm>
+            <a:off x="1399735" y="3429000"/>
+            <a:ext cx="189914" cy="457200"/>
+          </a:xfrm>
+          <a:prstGeom prst="rect">
+            <a:avLst/>
+          </a:prstGeom>
+          <a:solidFill>
+            <a:schemeClr val="accent3"/>
+          </a:solidFill>
+          <a:ln/>
+        </p:spPr>
+      </p:sp>
+      <p:sp>
+        <p:nvSpPr>
+          <p:cNvPr id="63" name="mosaic-3.35-5"/>
+          <p:cNvSpPr/>
+          <p:nvPr/>
+        </p:nvSpPr>
+        <p:spPr>
+          <a:xfrm>
+            <a:off x="1612509" y="3429000"/>
+            <a:ext cx="189914" cy="457200"/>
+          </a:xfrm>
+          <a:prstGeom prst="rect">
+            <a:avLst/>
+          </a:prstGeom>
+          <a:solidFill>
+            <a:schemeClr val="accent1"/>
+          </a:solidFill>
+          <a:ln/>
+        </p:spPr>
+      </p:sp>
+      <p:sp>
+        <p:nvSpPr>
+          <p:cNvPr id="64" name="mosaic-3.35-6"/>
+          <p:cNvSpPr/>
+          <p:nvPr/>
+        </p:nvSpPr>
+        <p:spPr>
+          <a:xfrm>
+            <a:off x="1825283" y="3429000"/>
+            <a:ext cx="189914" cy="457200"/>
+          </a:xfrm>
+          <a:prstGeom prst="rect">
+            <a:avLst/>
+          </a:prstGeom>
+          <a:solidFill>
+            <a:schemeClr val="accent3"/>
+          </a:solidFill>
+          <a:ln/>
+        </p:spPr>
+      </p:sp>
+      <p:sp>
+        <p:nvSpPr>
+          <p:cNvPr id="65" name="mosaic-3.35-7"/>
+          <p:cNvSpPr/>
+          <p:nvPr/>
+        </p:nvSpPr>
+        <p:spPr>
+          <a:xfrm>
+            <a:off x="2038057" y="3429000"/>
+            <a:ext cx="189914" cy="457200"/>
+          </a:xfrm>
+          <a:prstGeom prst="rect">
+            <a:avLst/>
+          </a:prstGeom>
+          <a:solidFill>
+            <a:schemeClr val="accent1"/>
+          </a:solidFill>
+          <a:ln/>
+        </p:spPr>
+      </p:sp>
+      <p:sp>
+        <p:nvSpPr>
+          <p:cNvPr id="66" name="mosaic-3.35-8"/>
+          <p:cNvSpPr/>
+          <p:nvPr/>
+        </p:nvSpPr>
+        <p:spPr>
+          <a:xfrm>
+            <a:off x="2250831" y="3429000"/>
+            <a:ext cx="189914" cy="457200"/>
+          </a:xfrm>
+          <a:prstGeom prst="rect">
+            <a:avLst/>
+          </a:prstGeom>
+          <a:solidFill>
+            <a:schemeClr val="accent1"/>
+          </a:solidFill>
+          <a:ln/>
+        </p:spPr>
+      </p:sp>
+      <p:sp>
+        <p:nvSpPr>
+          <p:cNvPr id="67" name="mosaic-3.35-9"/>
+          <p:cNvSpPr/>
+          <p:nvPr/>
+        </p:nvSpPr>
+        <p:spPr>
+          <a:xfrm>
+            <a:off x="2463605" y="3429000"/>
+            <a:ext cx="189914" cy="457200"/>
+          </a:xfrm>
+          <a:prstGeom prst="rect">
+            <a:avLst/>
+          </a:prstGeom>
+          <a:solidFill>
+            <a:schemeClr val="accent1"/>
+          </a:solidFill>
+          <a:ln/>
+        </p:spPr>
+      </p:sp>
+      <p:sp>
+        <p:nvSpPr>
+          <p:cNvPr id="68" name="mosaic-3.35-10"/>
+          <p:cNvSpPr/>
+          <p:nvPr/>
+        </p:nvSpPr>
+        <p:spPr>
+          <a:xfrm>
+            <a:off x="2676378" y="3429000"/>
+            <a:ext cx="189914" cy="457200"/>
+          </a:xfrm>
+          <a:prstGeom prst="rect">
+            <a:avLst/>
+          </a:prstGeom>
+          <a:solidFill>
+            <a:schemeClr val="accent1"/>
+          </a:solidFill>
+          <a:ln/>
+        </p:spPr>
+      </p:sp>
+      <p:sp>
+        <p:nvSpPr>
+          <p:cNvPr id="69" name="mosaic-3.35-11"/>
+          <p:cNvSpPr/>
+          <p:nvPr/>
+        </p:nvSpPr>
+        <p:spPr>
+          <a:xfrm>
+            <a:off x="2889152" y="3429000"/>
+            <a:ext cx="189914" cy="457200"/>
+          </a:xfrm>
+          <a:prstGeom prst="rect">
+            <a:avLst/>
+          </a:prstGeom>
+          <a:solidFill>
+            <a:schemeClr val="accent1"/>
+          </a:solidFill>
+          <a:ln/>
+        </p:spPr>
+      </p:sp>
+      <p:sp>
+        <p:nvSpPr>
+          <p:cNvPr id="70" name="mosaic-3.35-12"/>
+          <p:cNvSpPr/>
+          <p:nvPr/>
+        </p:nvSpPr>
+        <p:spPr>
+          <a:xfrm>
+            <a:off x="3101926" y="3429000"/>
+            <a:ext cx="189914" cy="457200"/>
+          </a:xfrm>
+          <a:prstGeom prst="rect">
+            <a:avLst/>
+          </a:prstGeom>
+          <a:solidFill>
+            <a:schemeClr val="accent3"/>
+          </a:solidFill>
+          <a:ln/>
+        </p:spPr>
+      </p:sp>
+      <p:sp>
+        <p:nvSpPr>
+          <p:cNvPr id="71" name="mosaic-3.35-13"/>
+          <p:cNvSpPr/>
+          <p:nvPr/>
+        </p:nvSpPr>
+        <p:spPr>
+          <a:xfrm>
+            <a:off x="3314700" y="3429000"/>
+            <a:ext cx="189914" cy="457200"/>
+          </a:xfrm>
+          <a:prstGeom prst="rect">
+            <a:avLst/>
+          </a:prstGeom>
+          <a:solidFill>
+            <a:schemeClr val="accent1"/>
+          </a:solidFill>
+          <a:ln/>
+        </p:spPr>
+      </p:sp>
+      <p:sp>
+        <p:nvSpPr>
+          <p:cNvPr id="72" name="mosaic-3.35-14"/>
+          <p:cNvSpPr/>
+          <p:nvPr/>
+        </p:nvSpPr>
+        <p:spPr>
+          <a:xfrm>
+            <a:off x="3527474" y="3429000"/>
+            <a:ext cx="189914" cy="457200"/>
+          </a:xfrm>
+          <a:prstGeom prst="rect">
+            <a:avLst/>
+          </a:prstGeom>
+          <a:solidFill>
+            <a:schemeClr val="accent3"/>
+          </a:solidFill>
+          <a:ln/>
+        </p:spPr>
+      </p:sp>
+      <p:sp>
+        <p:nvSpPr>
+          <p:cNvPr id="73" name="mosaic-3.35-15"/>
+          <p:cNvSpPr/>
+          <p:nvPr/>
+        </p:nvSpPr>
+        <p:spPr>
+          <a:xfrm>
+            <a:off x="3740248" y="3429000"/>
+            <a:ext cx="189914" cy="457200"/>
+          </a:xfrm>
+          <a:prstGeom prst="rect">
+            <a:avLst/>
+          </a:prstGeom>
+          <a:solidFill>
+            <a:schemeClr val="accent1"/>
+          </a:solidFill>
+          <a:ln/>
+        </p:spPr>
+      </p:sp>
+      <p:sp>
+        <p:nvSpPr>
+          <p:cNvPr id="74" name="mosaic-3.35-16"/>
+          <p:cNvSpPr/>
+          <p:nvPr/>
+        </p:nvSpPr>
+        <p:spPr>
+          <a:xfrm>
+            <a:off x="3953022" y="3429000"/>
+            <a:ext cx="189914" cy="457200"/>
+          </a:xfrm>
+          <a:prstGeom prst="rect">
+            <a:avLst/>
+          </a:prstGeom>
+          <a:solidFill>
+            <a:schemeClr val="accent3"/>
+          </a:solidFill>
+          <a:ln/>
+        </p:spPr>
+      </p:sp>
+      <p:sp>
+        <p:nvSpPr>
+          <p:cNvPr id="75" name="mosaic-3.35-17"/>
+          <p:cNvSpPr/>
+          <p:nvPr/>
+        </p:nvSpPr>
+        <p:spPr>
+          <a:xfrm>
+            <a:off x="4165795" y="3429000"/>
+            <a:ext cx="189914" cy="457200"/>
+          </a:xfrm>
+          <a:prstGeom prst="rect">
+            <a:avLst/>
+          </a:prstGeom>
+          <a:solidFill>
+            <a:schemeClr val="accent1"/>
+          </a:solidFill>
+          <a:ln/>
+        </p:spPr>
+      </p:sp>
+      <p:sp>
+        <p:nvSpPr>
+          <p:cNvPr id="76" name="mosaic-3.35-18"/>
+          <p:cNvSpPr/>
+          <p:nvPr/>
+        </p:nvSpPr>
+        <p:spPr>
+          <a:xfrm>
+            <a:off x="4378569" y="3429000"/>
+            <a:ext cx="189914" cy="457200"/>
+          </a:xfrm>
+          <a:prstGeom prst="rect">
+            <a:avLst/>
+          </a:prstGeom>
+          <a:solidFill>
+            <a:schemeClr val="accent3"/>
+          </a:solidFill>
+          <a:ln/>
+        </p:spPr>
+      </p:sp>
+      <p:sp>
+        <p:nvSpPr>
+          <p:cNvPr id="77" name="mosaic-3.35-19"/>
+          <p:cNvSpPr/>
+          <p:nvPr/>
+        </p:nvSpPr>
+        <p:spPr>
+          <a:xfrm>
+            <a:off x="4591343" y="3429000"/>
+            <a:ext cx="189914" cy="457200"/>
+          </a:xfrm>
+          <a:prstGeom prst="rect">
+            <a:avLst/>
+          </a:prstGeom>
+          <a:solidFill>
+            <a:schemeClr val="accent1"/>
+          </a:solidFill>
+          <a:ln/>
+        </p:spPr>
+      </p:sp>
+      <p:sp>
+        <p:nvSpPr>
+          <p:cNvPr id="78" name="mosaic-3.35-20"/>
+          <p:cNvSpPr/>
+          <p:nvPr/>
+        </p:nvSpPr>
+        <p:spPr>
+          <a:xfrm>
+            <a:off x="4804117" y="3429000"/>
+            <a:ext cx="189914" cy="457200"/>
+          </a:xfrm>
+          <a:prstGeom prst="rect">
+            <a:avLst/>
+          </a:prstGeom>
+          <a:solidFill>
+            <a:schemeClr val="accent3"/>
+          </a:solidFill>
+          <a:ln/>
+        </p:spPr>
+      </p:sp>
+      <p:sp>
+        <p:nvSpPr>
+          <p:cNvPr id="79" name="mosaic-3.35-21"/>
+          <p:cNvSpPr/>
+          <p:nvPr/>
+        </p:nvSpPr>
+        <p:spPr>
+          <a:xfrm>
+            <a:off x="5016891" y="3429000"/>
+            <a:ext cx="189914" cy="457200"/>
+          </a:xfrm>
+          <a:prstGeom prst="rect">
+            <a:avLst/>
+          </a:prstGeom>
+          <a:solidFill>
+            <a:schemeClr val="accent1"/>
+          </a:solidFill>
+          <a:ln/>
+        </p:spPr>
+      </p:sp>
+      <p:sp>
+        <p:nvSpPr>
+          <p:cNvPr id="80" name="mosaic-3.35-22"/>
+          <p:cNvSpPr/>
+          <p:nvPr/>
+        </p:nvSpPr>
+        <p:spPr>
+          <a:xfrm>
+            <a:off x="5229665" y="3429000"/>
+            <a:ext cx="189914" cy="457200"/>
+          </a:xfrm>
+          <a:prstGeom prst="rect">
+            <a:avLst/>
+          </a:prstGeom>
+          <a:solidFill>
+            <a:schemeClr val="accent1"/>
+          </a:solidFill>
+          <a:ln/>
+        </p:spPr>
+      </p:sp>
+      <p:sp>
+        <p:nvSpPr>
+          <p:cNvPr id="81" name="mosaic-3.35-23"/>
+          <p:cNvSpPr/>
+          <p:nvPr/>
+        </p:nvSpPr>
+        <p:spPr>
+          <a:xfrm>
+            <a:off x="5442438" y="3429000"/>
+            <a:ext cx="189914" cy="457200"/>
+          </a:xfrm>
+          <a:prstGeom prst="rect">
+            <a:avLst/>
+          </a:prstGeom>
+          <a:solidFill>
+            <a:schemeClr val="accent1"/>
+          </a:solidFill>
+          <a:ln/>
+        </p:spPr>
+      </p:sp>
+      <p:sp>
+        <p:nvSpPr>
+          <p:cNvPr id="82" name="mosaic-3.35-24"/>
+          <p:cNvSpPr/>
+          <p:nvPr/>
+        </p:nvSpPr>
+        <p:spPr>
+          <a:xfrm>
+            <a:off x="5655212" y="3429000"/>
+            <a:ext cx="189914" cy="457200"/>
+          </a:xfrm>
+          <a:prstGeom prst="rect">
+            <a:avLst/>
+          </a:prstGeom>
+          <a:solidFill>
+            <a:schemeClr val="accent1"/>
+          </a:solidFill>
+          <a:ln/>
+        </p:spPr>
+      </p:sp>
+      <p:sp>
+        <p:nvSpPr>
+          <p:cNvPr id="83" name="mosaic-3.35-25"/>
+          <p:cNvSpPr/>
+          <p:nvPr/>
+        </p:nvSpPr>
+        <p:spPr>
+          <a:xfrm>
+            <a:off x="5867986" y="3429000"/>
+            <a:ext cx="189914" cy="457200"/>
+          </a:xfrm>
+          <a:prstGeom prst="rect">
+            <a:avLst/>
+          </a:prstGeom>
+          <a:solidFill>
+            <a:schemeClr val="accent1"/>
+          </a:solidFill>
+          <a:ln/>
+        </p:spPr>
+      </p:sp>
+      <p:sp>
+        <p:nvSpPr>
+          <p:cNvPr id="84" name="mosaic-3.35-26"/>
+          <p:cNvSpPr/>
+          <p:nvPr/>
+        </p:nvSpPr>
+        <p:spPr>
+          <a:xfrm>
+            <a:off x="6080760" y="3429000"/>
+            <a:ext cx="189914" cy="457200"/>
+          </a:xfrm>
+          <a:prstGeom prst="rect">
+            <a:avLst/>
+          </a:prstGeom>
+          <a:solidFill>
+            <a:schemeClr val="accent1"/>
+          </a:solidFill>
+          <a:ln/>
+        </p:spPr>
+      </p:sp>
+      <p:sp>
+        <p:nvSpPr>
+          <p:cNvPr id="85" name="mosaic-3.35-27"/>
+          <p:cNvSpPr/>
+          <p:nvPr/>
+        </p:nvSpPr>
+        <p:spPr>
+          <a:xfrm>
+            <a:off x="6293534" y="3429000"/>
+            <a:ext cx="189914" cy="457200"/>
+          </a:xfrm>
+          <a:prstGeom prst="rect">
+            <a:avLst/>
+          </a:prstGeom>
+          <a:solidFill>
+            <a:schemeClr val="accent1"/>
+          </a:solidFill>
+          <a:ln/>
+        </p:spPr>
+      </p:sp>
+      <p:sp>
+        <p:nvSpPr>
+          <p:cNvPr id="86" name="mosaic-3.35-28"/>
+          <p:cNvSpPr/>
+          <p:nvPr/>
+        </p:nvSpPr>
+        <p:spPr>
+          <a:xfrm>
+            <a:off x="6506308" y="3429000"/>
+            <a:ext cx="189914" cy="457200"/>
+          </a:xfrm>
+          <a:prstGeom prst="rect">
+            <a:avLst/>
+          </a:prstGeom>
+          <a:solidFill>
+            <a:schemeClr val="accent1"/>
+          </a:solidFill>
+          <a:ln/>
+        </p:spPr>
+      </p:sp>
+      <p:sp>
+        <p:nvSpPr>
+          <p:cNvPr id="87" name="mosaic-3.35-29"/>
+          <p:cNvSpPr/>
+          <p:nvPr/>
+        </p:nvSpPr>
+        <p:spPr>
+          <a:xfrm>
+            <a:off x="6719082" y="3429000"/>
+            <a:ext cx="189914" cy="457200"/>
+          </a:xfrm>
+          <a:prstGeom prst="rect">
+            <a:avLst/>
+          </a:prstGeom>
+          <a:solidFill>
+            <a:schemeClr val="accent1"/>
+          </a:solidFill>
+          <a:ln/>
+        </p:spPr>
+      </p:sp>
+      <p:sp>
+        <p:nvSpPr>
+          <p:cNvPr id="88" name="mosaic-3.35-30"/>
+          <p:cNvSpPr/>
+          <p:nvPr/>
+        </p:nvSpPr>
+        <p:spPr>
+          <a:xfrm>
+            <a:off x="6931855" y="3429000"/>
+            <a:ext cx="189914" cy="457200"/>
+          </a:xfrm>
+          <a:prstGeom prst="rect">
+            <a:avLst/>
+          </a:prstGeom>
+          <a:solidFill>
+            <a:schemeClr val="accent3"/>
+          </a:solidFill>
+          <a:ln/>
+        </p:spPr>
+      </p:sp>
+      <p:sp>
+        <p:nvSpPr>
+          <p:cNvPr id="89" name="mosaic-3.35-31"/>
+          <p:cNvSpPr/>
+          <p:nvPr/>
+        </p:nvSpPr>
+        <p:spPr>
+          <a:xfrm>
+            <a:off x="7144629" y="3429000"/>
+            <a:ext cx="189914" cy="457200"/>
+          </a:xfrm>
+          <a:prstGeom prst="rect">
+            <a:avLst/>
+          </a:prstGeom>
+          <a:solidFill>
+            <a:schemeClr val="accent1"/>
+          </a:solidFill>
+          <a:ln/>
+        </p:spPr>
+      </p:sp>
+      <p:sp>
+        <p:nvSpPr>
+          <p:cNvPr id="90" name="mosaic-3.35-32"/>
+          <p:cNvSpPr/>
+          <p:nvPr/>
+        </p:nvSpPr>
+        <p:spPr>
+          <a:xfrm>
+            <a:off x="7357403" y="3429000"/>
+            <a:ext cx="189914" cy="457200"/>
+          </a:xfrm>
+          <a:prstGeom prst="rect">
+            <a:avLst/>
+          </a:prstGeom>
+          <a:solidFill>
+            <a:schemeClr val="accent3"/>
+          </a:solidFill>
+          <a:ln/>
+        </p:spPr>
+      </p:sp>
+      <p:sp>
+        <p:nvSpPr>
+          <p:cNvPr id="91" name="mosaic-3.35-33"/>
+          <p:cNvSpPr/>
+          <p:nvPr/>
+        </p:nvSpPr>
+        <p:spPr>
+          <a:xfrm>
+            <a:off x="7570177" y="3429000"/>
+            <a:ext cx="189914" cy="457200"/>
+          </a:xfrm>
+          <a:prstGeom prst="rect">
+            <a:avLst/>
+          </a:prstGeom>
+          <a:solidFill>
+            <a:schemeClr val="accent1"/>
+          </a:solidFill>
+          <a:ln/>
+        </p:spPr>
+      </p:sp>
+      <p:sp>
+        <p:nvSpPr>
+          <p:cNvPr id="92" name="mosaic-3.35-34"/>
+          <p:cNvSpPr/>
+          <p:nvPr/>
+        </p:nvSpPr>
+        <p:spPr>
+          <a:xfrm>
+            <a:off x="7782951" y="3429000"/>
+            <a:ext cx="189914" cy="457200"/>
+          </a:xfrm>
+          <a:prstGeom prst="rect">
+            <a:avLst/>
+          </a:prstGeom>
+          <a:solidFill>
+            <a:schemeClr val="accent3"/>
+          </a:solidFill>
+          <a:ln/>
+        </p:spPr>
+      </p:sp>
+      <p:sp>
+        <p:nvSpPr>
+          <p:cNvPr id="93" name="mosaic-3.35-35"/>
+          <p:cNvSpPr/>
+          <p:nvPr/>
+        </p:nvSpPr>
+        <p:spPr>
+          <a:xfrm>
+            <a:off x="7995725" y="3429000"/>
+            <a:ext cx="189914" cy="457200"/>
+          </a:xfrm>
+          <a:prstGeom prst="rect">
+            <a:avLst/>
+          </a:prstGeom>
+          <a:solidFill>
+            <a:schemeClr val="accent1"/>
+          </a:solidFill>
+          <a:ln/>
+        </p:spPr>
+      </p:sp>
+      <p:sp>
+        <p:nvSpPr>
+          <p:cNvPr id="94" name="mosaic-3.35-36"/>
+          <p:cNvSpPr/>
+          <p:nvPr/>
+        </p:nvSpPr>
+        <p:spPr>
+          <a:xfrm>
+            <a:off x="8208498" y="3429000"/>
+            <a:ext cx="189914" cy="457200"/>
+          </a:xfrm>
+          <a:prstGeom prst="rect">
+            <a:avLst/>
+          </a:prstGeom>
+          <a:solidFill>
+            <a:schemeClr val="accent3"/>
+          </a:solidFill>
+          <a:ln/>
+        </p:spPr>
+      </p:sp>
+      <p:sp>
+        <p:nvSpPr>
+          <p:cNvPr id="95" name="mosaic-3.35-37"/>
+          <p:cNvSpPr/>
+          <p:nvPr/>
+        </p:nvSpPr>
+        <p:spPr>
+          <a:xfrm>
+            <a:off x="8421272" y="3429000"/>
+            <a:ext cx="189914" cy="457200"/>
+          </a:xfrm>
+          <a:prstGeom prst="rect">
+            <a:avLst/>
+          </a:prstGeom>
+          <a:solidFill>
+            <a:schemeClr val="accent1"/>
+          </a:solidFill>
+          <a:ln/>
+        </p:spPr>
+      </p:sp>
+      <p:sp>
+        <p:nvSpPr>
+          <p:cNvPr id="96" name="mosaic-3.35-38"/>
+          <p:cNvSpPr/>
+          <p:nvPr/>
+        </p:nvSpPr>
+        <p:spPr>
+          <a:xfrm>
+            <a:off x="8634046" y="3429000"/>
+            <a:ext cx="189914" cy="457200"/>
+          </a:xfrm>
+          <a:prstGeom prst="rect">
+            <a:avLst/>
+          </a:prstGeom>
+          <a:solidFill>
+            <a:schemeClr val="accent1"/>
+          </a:solidFill>
+          <a:ln/>
+        </p:spPr>
+      </p:sp>
+      <p:sp>
+        <p:nvSpPr>
+          <p:cNvPr id="97" name="mosaic-3.35-39"/>
+          <p:cNvSpPr/>
+          <p:nvPr/>
+        </p:nvSpPr>
+        <p:spPr>
+          <a:xfrm>
+            <a:off x="8846820" y="3429000"/>
+            <a:ext cx="189914" cy="457200"/>
+          </a:xfrm>
+          <a:prstGeom prst="rect">
+            <a:avLst/>
+          </a:prstGeom>
+          <a:solidFill>
+            <a:schemeClr val="accent1"/>
+          </a:solidFill>
+          <a:ln/>
+        </p:spPr>
+      </p:sp>
+      <p:sp>
+        <p:nvSpPr>
+          <p:cNvPr id="98" name="mosaic-3.35-40"/>
+          <p:cNvSpPr/>
+          <p:nvPr/>
+        </p:nvSpPr>
+        <p:spPr>
+          <a:xfrm>
+            <a:off x="9059594" y="3429000"/>
+            <a:ext cx="189914" cy="457200"/>
+          </a:xfrm>
+          <a:prstGeom prst="rect">
+            <a:avLst/>
+          </a:prstGeom>
+          <a:solidFill>
+            <a:schemeClr val="accent1"/>
+          </a:solidFill>
+          <a:ln/>
+        </p:spPr>
+      </p:sp>
+      <p:sp>
+        <p:nvSpPr>
+          <p:cNvPr id="99" name="mosaic-3.35-41"/>
+          <p:cNvSpPr/>
+          <p:nvPr/>
+        </p:nvSpPr>
+        <p:spPr>
+          <a:xfrm>
+            <a:off x="9272368" y="3429000"/>
+            <a:ext cx="189914" cy="457200"/>
+          </a:xfrm>
+          <a:prstGeom prst="rect">
+            <a:avLst/>
+          </a:prstGeom>
+          <a:solidFill>
+            <a:schemeClr val="accent1"/>
+          </a:solidFill>
+          <a:ln/>
+        </p:spPr>
+      </p:sp>
+      <p:sp>
+        <p:nvSpPr>
+          <p:cNvPr id="100" name="mosaic-3.35-42"/>
+          <p:cNvSpPr/>
+          <p:nvPr/>
+        </p:nvSpPr>
+        <p:spPr>
+          <a:xfrm>
+            <a:off x="9485142" y="3429000"/>
+            <a:ext cx="189914" cy="457200"/>
+          </a:xfrm>
+          <a:prstGeom prst="rect">
+            <a:avLst/>
+          </a:prstGeom>
+          <a:solidFill>
+            <a:schemeClr val="accent1"/>
+          </a:solidFill>
+          <a:ln/>
+        </p:spPr>
+      </p:sp>
+      <p:sp>
+        <p:nvSpPr>
+          <p:cNvPr id="101" name="mosaic-3.35-43"/>
+          <p:cNvSpPr/>
+          <p:nvPr/>
+        </p:nvSpPr>
+        <p:spPr>
+          <a:xfrm>
+            <a:off x="9697915" y="3429000"/>
+            <a:ext cx="189914" cy="457200"/>
+          </a:xfrm>
+          <a:prstGeom prst="rect">
+            <a:avLst/>
+          </a:prstGeom>
+          <a:solidFill>
+            <a:schemeClr val="accent1"/>
+          </a:solidFill>
+          <a:ln/>
+        </p:spPr>
+      </p:sp>
+      <p:sp>
+        <p:nvSpPr>
+          <p:cNvPr id="102" name="mosaic-3.35-44"/>
+          <p:cNvSpPr/>
+          <p:nvPr/>
+        </p:nvSpPr>
+        <p:spPr>
+          <a:xfrm>
+            <a:off x="9910689" y="3429000"/>
+            <a:ext cx="189914" cy="457200"/>
+          </a:xfrm>
+          <a:prstGeom prst="rect">
+            <a:avLst/>
+          </a:prstGeom>
+          <a:solidFill>
+            <a:schemeClr val="accent3"/>
+          </a:solidFill>
+          <a:ln/>
+        </p:spPr>
+      </p:sp>
+      <p:sp>
+        <p:nvSpPr>
+          <p:cNvPr id="103" name="mosaic-3.35-45"/>
+          <p:cNvSpPr/>
+          <p:nvPr/>
+        </p:nvSpPr>
+        <p:spPr>
+          <a:xfrm>
+            <a:off x="10123463" y="3429000"/>
+            <a:ext cx="189914" cy="457200"/>
+          </a:xfrm>
+          <a:prstGeom prst="rect">
+            <a:avLst/>
+          </a:prstGeom>
+          <a:solidFill>
+            <a:schemeClr val="accent1"/>
+          </a:solidFill>
+          <a:ln/>
+        </p:spPr>
+      </p:sp>
+      <p:sp>
+        <p:nvSpPr>
+          <p:cNvPr id="104" name="mosaic-3.35-46"/>
+          <p:cNvSpPr/>
+          <p:nvPr/>
+        </p:nvSpPr>
+        <p:spPr>
+          <a:xfrm>
+            <a:off x="10336237" y="3429000"/>
+            <a:ext cx="189914" cy="457200"/>
+          </a:xfrm>
+          <a:prstGeom prst="rect">
+            <a:avLst/>
+          </a:prstGeom>
+          <a:solidFill>
+            <a:schemeClr val="accent3"/>
+          </a:solidFill>
+          <a:ln/>
+        </p:spPr>
+      </p:sp>
+      <p:sp>
+        <p:nvSpPr>
+          <p:cNvPr id="105" name="mosaic-3.35-47"/>
+          <p:cNvSpPr/>
+          <p:nvPr/>
+        </p:nvSpPr>
+        <p:spPr>
+          <a:xfrm>
+            <a:off x="10549011" y="3429000"/>
+            <a:ext cx="189914" cy="457200"/>
+          </a:xfrm>
+          <a:prstGeom prst="rect">
+            <a:avLst/>
+          </a:prstGeom>
+          <a:solidFill>
+            <a:schemeClr val="accent1"/>
+          </a:solidFill>
+          <a:ln/>
+        </p:spPr>
+      </p:sp>
+      <p:sp>
+        <p:nvSpPr>
+          <p:cNvPr id="106" name="mosaic-3.35-48"/>
+          <p:cNvSpPr/>
+          <p:nvPr/>
+        </p:nvSpPr>
+        <p:spPr>
+          <a:xfrm>
+            <a:off x="10761785" y="3429000"/>
+            <a:ext cx="189914" cy="457200"/>
+          </a:xfrm>
+          <a:prstGeom prst="rect">
+            <a:avLst/>
+          </a:prstGeom>
+          <a:solidFill>
+            <a:schemeClr val="accent3"/>
+          </a:solidFill>
+          <a:ln/>
+        </p:spPr>
+      </p:sp>
+      <p:sp>
+        <p:nvSpPr>
+          <p:cNvPr id="107" name="mosaic-3.35-49"/>
+          <p:cNvSpPr/>
+          <p:nvPr/>
+        </p:nvSpPr>
+        <p:spPr>
+          <a:xfrm>
+            <a:off x="10974558" y="3429000"/>
+            <a:ext cx="189914" cy="457200"/>
+          </a:xfrm>
+          <a:prstGeom prst="rect">
+            <a:avLst/>
+          </a:prstGeom>
+          <a:solidFill>
+            <a:schemeClr val="accent1"/>
+          </a:solidFill>
+          <a:ln/>
+        </p:spPr>
+      </p:sp>
+      <p:sp>
+        <p:nvSpPr>
+          <p:cNvPr id="108" name="mosaic-3.35-50"/>
+          <p:cNvSpPr/>
+          <p:nvPr/>
+        </p:nvSpPr>
+        <p:spPr>
+          <a:xfrm>
+            <a:off x="11187332" y="3429000"/>
+            <a:ext cx="189914" cy="457200"/>
+          </a:xfrm>
+          <a:prstGeom prst="rect">
+            <a:avLst/>
+          </a:prstGeom>
+          <a:solidFill>
+            <a:schemeClr val="accent1"/>
+          </a:solidFill>
+          <a:ln/>
+        </p:spPr>
+      </p:sp>
+      <p:sp>
+        <p:nvSpPr>
+          <p:cNvPr id="109" name="mosaic-3.35-51"/>
+          <p:cNvSpPr/>
+          <p:nvPr/>
+        </p:nvSpPr>
+        <p:spPr>
+          <a:xfrm>
+            <a:off x="11400106" y="3429000"/>
+            <a:ext cx="189914" cy="457200"/>
+          </a:xfrm>
+          <a:prstGeom prst="rect">
+            <a:avLst/>
+          </a:prstGeom>
+          <a:solidFill>
+            <a:schemeClr val="accent1"/>
+          </a:solidFill>
+          <a:ln/>
+        </p:spPr>
+      </p:sp>
+      <p:sp>
+        <p:nvSpPr>
+          <p:cNvPr id="110" name="Text 108"/>
+          <p:cNvSpPr txBox="1"/>
+          <p:nvPr/>
+        </p:nvSpPr>
+        <p:spPr>
+          <a:xfrm>
+            <a:off x="548640" y="3950208"/>
+            <a:ext cx="1280160" cy="274320"/>
+          </a:xfrm>
+          <a:prstGeom prst="rect">
+            <a:avLst/>
+          </a:prstGeom>
+          <a:noFill/>
+          <a:ln/>
+        </p:spPr>
+        <p:txBody>
+          <a:bodyPr wrap="square" lIns="0" tIns="0" rIns="0" bIns="0" rtlCol="0" anchor="t"/>
+          <a:lstStyle/>
+          <a:p>
+            <a:pPr algn="l" indent="0" marL="0">
+              <a:buNone/>
+            </a:pPr>
+            <a:r>
+              <a:rPr lang="en-US" sz="1200" dirty="0">
+                <a:solidFill>
+                  <a:schemeClr val="accent4"/>
+                </a:solidFill>
+              </a:rPr>
+              <a:t>Smiltynė</a:t>
+            </a:r>
+            <a:endParaRPr lang="en-US" sz="1200" dirty="0"/>
+          </a:p>
+        </p:txBody>
+      </p:sp>
+      <p:sp>
+        <p:nvSpPr>
+          <p:cNvPr id="111" name="Text 109"/>
+          <p:cNvSpPr txBox="1"/>
+          <p:nvPr/>
+        </p:nvSpPr>
+        <p:spPr>
+          <a:xfrm>
+            <a:off x="4057650" y="3950208"/>
+            <a:ext cx="1280160" cy="274320"/>
+          </a:xfrm>
+          <a:prstGeom prst="rect">
+            <a:avLst/>
+          </a:prstGeom>
+          <a:noFill/>
+          <a:ln/>
+        </p:spPr>
+        <p:txBody>
+          <a:bodyPr wrap="square" lIns="0" tIns="0" rIns="0" bIns="0" rtlCol="0" anchor="t"/>
+          <a:lstStyle/>
+          <a:p>
+            <a:pPr algn="ctr" indent="0" marL="0">
+              <a:buNone/>
+            </a:pPr>
+            <a:r>
+              <a:rPr lang="en-US" sz="1200" dirty="0">
+                <a:solidFill>
+                  <a:schemeClr val="accent4"/>
+                </a:solidFill>
+              </a:rPr>
+              <a:t>Juodkrantė</a:t>
+            </a:r>
+            <a:endParaRPr lang="en-US" sz="1200" dirty="0"/>
+          </a:p>
+        </p:txBody>
+      </p:sp>
+      <p:sp>
+        <p:nvSpPr>
+          <p:cNvPr id="112" name="Text 110"/>
+          <p:cNvSpPr txBox="1"/>
+          <p:nvPr/>
+        </p:nvSpPr>
+        <p:spPr>
+          <a:xfrm>
+            <a:off x="6290017" y="3950208"/>
+            <a:ext cx="1280160" cy="274320"/>
+          </a:xfrm>
+          <a:prstGeom prst="rect">
+            <a:avLst/>
+          </a:prstGeom>
+          <a:noFill/>
+          <a:ln/>
+        </p:spPr>
+        <p:txBody>
+          <a:bodyPr wrap="square" lIns="0" tIns="0" rIns="0" bIns="0" rtlCol="0" anchor="t"/>
+          <a:lstStyle/>
+          <a:p>
+            <a:pPr algn="r" indent="0" marL="0">
+              <a:buNone/>
+            </a:pPr>
+            <a:r>
+              <a:rPr lang="en-US" sz="1200" dirty="0">
+                <a:solidFill>
+                  <a:schemeClr val="accent4"/>
+                </a:solidFill>
+              </a:rPr>
+              <a:t>Pervalka</a:t>
+            </a:r>
+            <a:endParaRPr lang="en-US" sz="1200" dirty="0"/>
+          </a:p>
+        </p:txBody>
+      </p:sp>
+      <p:sp>
+        <p:nvSpPr>
+          <p:cNvPr id="113" name="Text 111"/>
+          <p:cNvSpPr txBox="1"/>
+          <p:nvPr/>
+        </p:nvSpPr>
+        <p:spPr>
+          <a:xfrm>
+            <a:off x="7995725" y="3950208"/>
+            <a:ext cx="1280160" cy="274320"/>
+          </a:xfrm>
+          <a:prstGeom prst="rect">
+            <a:avLst/>
+          </a:prstGeom>
+          <a:noFill/>
+          <a:ln/>
+        </p:spPr>
+        <p:txBody>
+          <a:bodyPr wrap="square" lIns="0" tIns="0" rIns="0" bIns="0" rtlCol="0" anchor="t"/>
+          <a:lstStyle/>
+          <a:p>
+            <a:pPr algn="l" indent="0" marL="0">
+              <a:buNone/>
+            </a:pPr>
+            <a:r>
+              <a:rPr lang="en-US" sz="1200" dirty="0">
+                <a:solidFill>
+                  <a:schemeClr val="accent4"/>
+                </a:solidFill>
+              </a:rPr>
+              <a:t>Preila</a:t>
+            </a:r>
+            <a:endParaRPr lang="en-US" sz="1200" dirty="0"/>
+          </a:p>
+        </p:txBody>
+      </p:sp>
+      <p:sp>
+        <p:nvSpPr>
+          <p:cNvPr id="114" name="Text 112"/>
+          <p:cNvSpPr txBox="1"/>
+          <p:nvPr/>
+        </p:nvSpPr>
+        <p:spPr>
+          <a:xfrm>
+            <a:off x="9802544" y="3950208"/>
+            <a:ext cx="1280160" cy="274320"/>
+          </a:xfrm>
+          <a:prstGeom prst="rect">
+            <a:avLst/>
+          </a:prstGeom>
+          <a:noFill/>
+          <a:ln/>
+        </p:spPr>
+        <p:txBody>
+          <a:bodyPr wrap="square" lIns="0" tIns="0" rIns="0" bIns="0" rtlCol="0" anchor="t"/>
+          <a:lstStyle/>
+          <a:p>
+            <a:pPr algn="ctr" indent="0" marL="0">
+              <a:buNone/>
+            </a:pPr>
+            <a:r>
+              <a:rPr lang="en-US" sz="1200" dirty="0">
+                <a:solidFill>
+                  <a:schemeClr val="accent4"/>
+                </a:solidFill>
+              </a:rPr>
+              <a:t>Nida</a:t>
+            </a:r>
+            <a:endParaRPr lang="en-US" sz="1200" dirty="0"/>
+          </a:p>
+        </p:txBody>
+      </p:sp>
+      <p:sp>
+        <p:nvSpPr>
+          <p:cNvPr id="115" name="Text 113"/>
+          <p:cNvSpPr txBox="1"/>
+          <p:nvPr/>
+        </p:nvSpPr>
+        <p:spPr>
+          <a:xfrm>
+            <a:off x="6583680" y="4352544"/>
+            <a:ext cx="5029200" cy="301752"/>
+          </a:xfrm>
+          <a:prstGeom prst="rect">
+            <a:avLst/>
+          </a:prstGeom>
+          <a:noFill/>
+          <a:ln/>
+        </p:spPr>
+        <p:txBody>
+          <a:bodyPr wrap="square" lIns="0" tIns="0" rIns="0" bIns="0" rtlCol="0" anchor="ctr"/>
+          <a:lstStyle/>
+          <a:p>
+            <a:pPr algn="r" indent="0" marL="0">
+              <a:buNone/>
+            </a:pPr>
+            <a:r>
+              <a:rPr lang="en-US" sz="1200" dirty="0">
+                <a:solidFill>
+                  <a:schemeClr val="accent4"/>
+                </a:solidFill>
+              </a:rPr>
+              <a:t>Smiltynė (šiaurė) → siena (pietūs), 1 langelis = 1 km</a:t>
+            </a:r>
+            <a:endParaRPr lang="en-US" sz="1200" dirty="0"/>
+          </a:p>
+        </p:txBody>
+      </p:sp>
+      <p:sp>
+        <p:nvSpPr>
+          <p:cNvPr id="116" name="mosaic-legend-0"/>
+          <p:cNvSpPr/>
+          <p:nvPr/>
+        </p:nvSpPr>
+        <p:spPr>
+          <a:xfrm>
+            <a:off x="548640" y="4389120"/>
+            <a:ext cx="228600" cy="228600"/>
+          </a:xfrm>
+          <a:prstGeom prst="rect">
+            <a:avLst/>
+          </a:prstGeom>
+          <a:solidFill>
+            <a:schemeClr val="accent3"/>
+          </a:solidFill>
+          <a:ln/>
+        </p:spPr>
+      </p:sp>
+      <p:sp>
+        <p:nvSpPr>
+          <p:cNvPr id="117" name="Text 115"/>
+          <p:cNvSpPr txBox="1"/>
+          <p:nvPr/>
+        </p:nvSpPr>
+        <p:spPr>
+          <a:xfrm>
+            <a:off x="868680" y="4352544"/>
+            <a:ext cx="2560320" cy="301752"/>
+          </a:xfrm>
+          <a:prstGeom prst="rect">
+            <a:avLst/>
+          </a:prstGeom>
+          <a:noFill/>
+          <a:ln/>
+        </p:spPr>
+        <p:txBody>
+          <a:bodyPr wrap="square" lIns="0" tIns="0" rIns="0" bIns="0" rtlCol="0" anchor="ctr"/>
+          <a:lstStyle/>
+          <a:p>
+            <a:pPr indent="0" marL="0">
+              <a:buNone/>
             </a:pPr>
             <a:r>
               <a:rPr lang="en-US" sz="1400" dirty="0">
@@ -12164,17 +15279,55 @@
                   <a:schemeClr val="tx1"/>
                 </a:solidFill>
               </a:rPr>
-              <a:t>Žuvų migracijai svarbus upių tinklo jungtumas (DCI indeksas)</a:t>
+              <a:t>Pjaunama šį sezoną</a:t>
             </a:r>
             <a:endParaRPr lang="en-US" sz="1400" dirty="0"/>
           </a:p>
-          <a:p>
-            <a:pPr marL="342900" indent="-342900">
-              <a:spcAft>
-                <a:spcPts val="600"/>
-              </a:spcAft>
-              <a:buSzPct val="100000"/>
-              <a:buChar char="•"/>
+        </p:txBody>
+      </p:sp>
+      <p:sp>
+        <p:nvSpPr>
+          <p:cNvPr id="118" name="mosaic-legend-1"/>
+          <p:cNvSpPr/>
+          <p:nvPr/>
+        </p:nvSpPr>
+        <p:spPr>
+          <a:xfrm>
+            <a:off x="3474720" y="4389120"/>
+            <a:ext cx="228600" cy="228600"/>
+          </a:xfrm>
+          <a:prstGeom prst="rect">
+            <a:avLst/>
+          </a:prstGeom>
+          <a:solidFill>
+            <a:schemeClr val="accent1"/>
+          </a:solidFill>
+          <a:ln/>
+        </p:spPr>
+      </p:sp>
+      <p:sp>
+        <p:nvSpPr>
+          <p:cNvPr id="119" name="Text 117"/>
+          <p:cNvSpPr txBox="1"/>
+          <p:nvPr/>
+        </p:nvSpPr>
+        <p:spPr>
+          <a:xfrm>
+            <a:off x="3794760" y="4352544"/>
+            <a:ext cx="2560320" cy="301752"/>
+          </a:xfrm>
+          <a:prstGeom prst="rect">
+            <a:avLst/>
+          </a:prstGeom>
+          <a:noFill/>
+          <a:ln/>
+        </p:spPr>
+        <p:txBody>
+          <a:bodyPr wrap="square" lIns="0" tIns="0" rIns="0" bIns="0" rtlCol="0" anchor="ctr"/>
+          <a:lstStyle/>
+          <a:p>
+            <a:pPr indent="0" marL="0">
+              <a:buNone/>
             </a:pPr>
             <a:r>
               <a:rPr lang="en-US" sz="1400" dirty="0">
@@ -12182,17 +15335,74 @@
                   <a:schemeClr val="tx1"/>
                 </a:solidFill>
               </a:rPr>
-              <a:t>Optimalus barjerų rinkinys už turimą biudžetą</a:t>
+              <a:t>Paliekama (sena nendrė)</a:t>
             </a:r>
             <a:endParaRPr lang="en-US" sz="1400" dirty="0"/>
           </a:p>
-          <a:p>
-            <a:pPr marL="342900" indent="-342900">
-              <a:spcAft>
-                <a:spcPts val="600"/>
-              </a:spcAft>
-              <a:buSzPct val="100000"/>
-              <a:buChar char="•"/>
+        </p:txBody>
+      </p:sp>
+      <p:sp>
+        <p:nvSpPr>
+          <p:cNvPr id="120" name="Text 118"/>
+          <p:cNvSpPr txBox="1"/>
+          <p:nvPr/>
+        </p:nvSpPr>
+        <p:spPr>
+          <a:xfrm>
+            <a:off x="548640" y="4892040"/>
+            <a:ext cx="3474720" cy="685800"/>
+          </a:xfrm>
+          <a:prstGeom prst="rect">
+            <a:avLst/>
+          </a:prstGeom>
+          <a:noFill/>
+          <a:ln/>
+        </p:spPr>
+        <p:txBody>
+          <a:bodyPr wrap="square" lIns="0" tIns="0" rIns="0" bIns="0" rtlCol="0" anchor="b"/>
+          <a:lstStyle/>
+          <a:p>
+            <a:pPr indent="0" marL="0">
+              <a:buNone/>
+            </a:pPr>
+            <a:r>
+              <a:rPr lang="en-US" sz="3600" b="1" dirty="0">
+                <a:solidFill>
+                  <a:schemeClr val="accent1"/>
+                </a:solidFill>
+                <a:latin typeface="Cambria" pitchFamily="34" charset="0"/>
+                <a:ea typeface="Cambria" pitchFamily="34" charset="-122"/>
+                <a:cs typeface="Cambria" pitchFamily="34" charset="-120"/>
+              </a:rPr>
+              <a:t>7 → 31</a:t>
+            </a:r>
+            <a:endParaRPr lang="en-US" sz="3600" dirty="0"/>
+          </a:p>
+        </p:txBody>
+      </p:sp>
+      <p:sp>
+        <p:nvSpPr>
+          <p:cNvPr id="121" name="Text 119"/>
+          <p:cNvSpPr txBox="1"/>
+          <p:nvPr/>
+        </p:nvSpPr>
+        <p:spPr>
+          <a:xfrm>
+            <a:off x="548640" y="5623560"/>
+            <a:ext cx="3474720" cy="457200"/>
+          </a:xfrm>
+          <a:prstGeom prst="rect">
+            <a:avLst/>
+          </a:prstGeom>
+          <a:noFill/>
+          <a:ln/>
+        </p:spPr>
+        <p:txBody>
+          <a:bodyPr wrap="square" lIns="0" tIns="0" rIns="0" bIns="0" rtlCol="0" anchor="t"/>
+          <a:lstStyle/>
+          <a:p>
+            <a:pPr indent="0" marL="0">
+              <a:buNone/>
             </a:pPr>
             <a:r>
               <a:rPr lang="en-US" sz="1400" dirty="0">
@@ -12200,17 +15410,74 @@
                   <a:schemeClr val="tx1"/>
                 </a:solidFill>
               </a:rPr>
-              <a:t>Kreivė rodo, kiek jungtumo nuperka kiekvienas papildomas euras</a:t>
+              <a:t>ribų tarp pjaunamų ir nepjaunamų ruožų</a:t>
             </a:r>
             <a:endParaRPr lang="en-US" sz="1400" dirty="0"/>
           </a:p>
-          <a:p>
-            <a:pPr marL="342900" indent="-342900">
-              <a:spcAft>
-                <a:spcPts val="600"/>
-              </a:spcAft>
-              <a:buSzPct val="100000"/>
-              <a:buChar char="•"/>
+        </p:txBody>
+      </p:sp>
+      <p:sp>
+        <p:nvSpPr>
+          <p:cNvPr id="122" name="Text 120"/>
+          <p:cNvSpPr txBox="1"/>
+          <p:nvPr/>
+        </p:nvSpPr>
+        <p:spPr>
+          <a:xfrm>
+            <a:off x="4297680" y="4892040"/>
+            <a:ext cx="3474720" cy="685800"/>
+          </a:xfrm>
+          <a:prstGeom prst="rect">
+            <a:avLst/>
+          </a:prstGeom>
+          <a:noFill/>
+          <a:ln/>
+        </p:spPr>
+        <p:txBody>
+          <a:bodyPr wrap="square" lIns="0" tIns="0" rIns="0" bIns="0" rtlCol="0" anchor="b"/>
+          <a:lstStyle/>
+          <a:p>
+            <a:pPr indent="0" marL="0">
+              <a:buNone/>
+            </a:pPr>
+            <a:r>
+              <a:rPr lang="en-US" sz="3600" b="1" dirty="0">
+                <a:solidFill>
+                  <a:schemeClr val="accent1"/>
+                </a:solidFill>
+                <a:latin typeface="Cambria" pitchFamily="34" charset="0"/>
+                <a:ea typeface="Cambria" pitchFamily="34" charset="-122"/>
+                <a:cs typeface="Cambria" pitchFamily="34" charset="-120"/>
+              </a:rPr>
+              <a:t>15 → 9 km</a:t>
+            </a:r>
+            <a:endParaRPr lang="en-US" sz="3600" dirty="0"/>
+          </a:p>
+        </p:txBody>
+      </p:sp>
+      <p:sp>
+        <p:nvSpPr>
+          <p:cNvPr id="123" name="Text 121"/>
+          <p:cNvSpPr txBox="1"/>
+          <p:nvPr/>
+        </p:nvSpPr>
+        <p:spPr>
+          <a:xfrm>
+            <a:off x="4297680" y="5623560"/>
+            <a:ext cx="3474720" cy="457200"/>
+          </a:xfrm>
+          <a:prstGeom prst="rect">
+            <a:avLst/>
+          </a:prstGeom>
+          <a:noFill/>
+          <a:ln/>
+        </p:spPr>
+        <p:txBody>
+          <a:bodyPr wrap="square" lIns="0" tIns="0" rIns="0" bIns="0" rtlCol="0" anchor="t"/>
+          <a:lstStyle/>
+          <a:p>
+            <a:pPr indent="0" marL="0">
+              <a:buNone/>
             </a:pPr>
             <a:r>
               <a:rPr lang="en-US" sz="1400" dirty="0">
@@ -12218,9 +15485,120 @@
                   <a:schemeClr val="tx1"/>
                 </a:solidFill>
               </a:rPr>
-              <a:t>Įkeliami HydroRIVERS ar nacionaliniai upių duomenys</a:t>
+              <a:t>ilgiausias vientisas nepjaunamas ruožas</a:t>
             </a:r>
             <a:endParaRPr lang="en-US" sz="1400" dirty="0"/>
+          </a:p>
+        </p:txBody>
+      </p:sp>
+      <p:sp>
+        <p:nvSpPr>
+          <p:cNvPr id="124" name="Text 122"/>
+          <p:cNvSpPr txBox="1"/>
+          <p:nvPr/>
+        </p:nvSpPr>
+        <p:spPr>
+          <a:xfrm>
+            <a:off x="8046720" y="4892040"/>
+            <a:ext cx="3474720" cy="685800"/>
+          </a:xfrm>
+          <a:prstGeom prst="rect">
+            <a:avLst/>
+          </a:prstGeom>
+          <a:noFill/>
+          <a:ln/>
+        </p:spPr>
+        <p:txBody>
+          <a:bodyPr wrap="square" lIns="0" tIns="0" rIns="0" bIns="0" rtlCol="0" anchor="b"/>
+          <a:lstStyle/>
+          <a:p>
+            <a:pPr indent="0" marL="0">
+              <a:buNone/>
+            </a:pPr>
+            <a:r>
+              <a:rPr lang="en-US" sz="3600" b="1" dirty="0">
+                <a:solidFill>
+                  <a:schemeClr val="accent2"/>
+                </a:solidFill>
+                <a:latin typeface="Cambria" pitchFamily="34" charset="0"/>
+                <a:ea typeface="Cambria" pitchFamily="34" charset="-122"/>
+                <a:cs typeface="Cambria" pitchFamily="34" charset="-120"/>
+              </a:rPr>
+              <a:t>+12,6 k€</a:t>
+            </a:r>
+            <a:endParaRPr lang="en-US" sz="3600" dirty="0"/>
+          </a:p>
+        </p:txBody>
+      </p:sp>
+      <p:sp>
+        <p:nvSpPr>
+          <p:cNvPr id="125" name="Text 123"/>
+          <p:cNvSpPr txBox="1"/>
+          <p:nvPr/>
+        </p:nvSpPr>
+        <p:spPr>
+          <a:xfrm>
+            <a:off x="8046720" y="5623560"/>
+            <a:ext cx="3474720" cy="457200"/>
+          </a:xfrm>
+          <a:prstGeom prst="rect">
+            <a:avLst/>
+          </a:prstGeom>
+          <a:noFill/>
+          <a:ln/>
+        </p:spPr>
+        <p:txBody>
+          <a:bodyPr wrap="square" lIns="0" tIns="0" rIns="0" bIns="0" rtlCol="0" anchor="t"/>
+          <a:lstStyle/>
+          <a:p>
+            <a:pPr indent="0" marL="0">
+              <a:buNone/>
+            </a:pPr>
+            <a:r>
+              <a:rPr lang="en-US" sz="1400" dirty="0">
+                <a:solidFill>
+                  <a:schemeClr val="tx1"/>
+                </a:solidFill>
+              </a:rPr>
+              <a:t>papildomos pjovimo išlaidos už mozaiką</a:t>
+            </a:r>
+            <a:endParaRPr lang="en-US" sz="1400" dirty="0"/>
+          </a:p>
+        </p:txBody>
+      </p:sp>
+      <p:sp>
+        <p:nvSpPr>
+          <p:cNvPr id="126" name="Text 124"/>
+          <p:cNvSpPr txBox="1"/>
+          <p:nvPr/>
+        </p:nvSpPr>
+        <p:spPr>
+          <a:xfrm>
+            <a:off x="6126480" y="6355080"/>
+            <a:ext cx="4754880" cy="274320"/>
+          </a:xfrm>
+          <a:prstGeom prst="rect">
+            <a:avLst/>
+          </a:prstGeom>
+          <a:noFill/>
+          <a:ln/>
+        </p:spPr>
+        <p:txBody>
+          <a:bodyPr wrap="square" lIns="0" tIns="0" rIns="0" bIns="0" rtlCol="0" anchor="t"/>
+          <a:lstStyle/>
+          <a:p>
+            <a:pPr algn="r" indent="0" marL="0">
+              <a:buNone/>
+            </a:pPr>
+            <a:r>
+              <a:rPr lang="en-US" sz="1000" dirty="0">
+                <a:solidFill>
+                  <a:schemeClr val="accent4"/>
+                </a:solidFill>
+              </a:rPr>
+              <a:t>Sintetinis scenarijus (examples/curonian_spit_reedbeds.py)</a:t>
+            </a:r>
+            <a:endParaRPr lang="en-US" sz="1000" dirty="0"/>
           </a:p>
         </p:txBody>
       </p:sp>
@@ -12329,533 +15707,15 @@
                 <a:ea typeface="Cambria" pitchFamily="34" charset="-122"/>
                 <a:cs typeface="Cambria" pitchFamily="34" charset="-120"/>
               </a:rPr>
-              <a:t>Kaip tai atrodytų darbe</a:t>
+              <a:t>Upių atkūrimas: kuriuos barjerus šalinti</a:t>
             </a:r>
             <a:endParaRPr lang="en-US" sz="3200" dirty="0"/>
           </a:p>
         </p:txBody>
-      </p:sp>
-      <p:sp>
-        <p:nvSpPr>
-          <p:cNvPr id="3" name="wf-num-0"/>
-          <p:cNvSpPr/>
-          <p:nvPr/>
-        </p:nvSpPr>
-        <p:spPr>
-          <a:xfrm>
-            <a:off x="548640" y="1417320"/>
-            <a:ext cx="548640" cy="548640"/>
-          </a:xfrm>
-          <a:prstGeom prst="ellipse">
-            <a:avLst/>
-          </a:prstGeom>
-          <a:solidFill>
-            <a:schemeClr val="accent1"/>
-          </a:solidFill>
-          <a:ln/>
-        </p:spPr>
-      </p:sp>
-      <p:sp>
-        <p:nvSpPr>
-          <p:cNvPr id="4" name="Text 2"/>
-          <p:cNvSpPr txBox="1"/>
-          <p:nvPr/>
-        </p:nvSpPr>
-        <p:spPr>
-          <a:xfrm>
-            <a:off x="548640" y="1417320"/>
-            <a:ext cx="548640" cy="548640"/>
-          </a:xfrm>
-          <a:prstGeom prst="rect">
-            <a:avLst/>
-          </a:prstGeom>
-          <a:noFill/>
-          <a:ln/>
-        </p:spPr>
-        <p:txBody>
-          <a:bodyPr wrap="square" lIns="0" tIns="0" rIns="0" bIns="0" rtlCol="0" anchor="ctr"/>
-          <a:lstStyle/>
-          <a:p>
-            <a:pPr algn="ctr" indent="0" marL="0">
-              <a:buNone/>
-            </a:pPr>
-            <a:r>
-              <a:rPr lang="en-US" sz="1800" b="1" dirty="0">
-                <a:solidFill>
-                  <a:schemeClr val="bg1"/>
-                </a:solidFill>
-              </a:rPr>
-              <a:t>1</a:t>
-            </a:r>
-            <a:endParaRPr lang="en-US" sz="1800" dirty="0"/>
-          </a:p>
-        </p:txBody>
-      </p:sp>
-      <p:sp>
-        <p:nvSpPr>
-          <p:cNvPr id="5" name="Text 3"/>
-          <p:cNvSpPr txBox="1"/>
-          <p:nvPr/>
-        </p:nvSpPr>
-        <p:spPr>
-          <a:xfrm>
-            <a:off x="1325880" y="1417320"/>
-            <a:ext cx="4846320" cy="548640"/>
-          </a:xfrm>
-          <a:prstGeom prst="rect">
-            <a:avLst/>
-          </a:prstGeom>
-          <a:noFill/>
-          <a:ln/>
-        </p:spPr>
-        <p:txBody>
-          <a:bodyPr wrap="square" lIns="0" tIns="0" rIns="0" bIns="0" rtlCol="0" anchor="ctr"/>
-          <a:lstStyle/>
-          <a:p>
-            <a:pPr indent="0" marL="0">
-              <a:buNone/>
-            </a:pPr>
-            <a:r>
-              <a:rPr lang="en-US" sz="1600" dirty="0">
-                <a:solidFill>
-                  <a:schemeClr val="tx1"/>
-                </a:solidFill>
-              </a:rPr>
-              <a:t>Įkelti duomenis: Marxan failai, rastrai, GIS sluoksniai</a:t>
-            </a:r>
-            <a:endParaRPr lang="en-US" sz="1600" dirty="0"/>
-          </a:p>
-        </p:txBody>
-      </p:sp>
-      <p:sp>
-        <p:nvSpPr>
-          <p:cNvPr id="6" name="wf-num-1"/>
-          <p:cNvSpPr/>
-          <p:nvPr/>
-        </p:nvSpPr>
-        <p:spPr>
-          <a:xfrm>
-            <a:off x="548640" y="2286000"/>
-            <a:ext cx="548640" cy="548640"/>
-          </a:xfrm>
-          <a:prstGeom prst="ellipse">
-            <a:avLst/>
-          </a:prstGeom>
-          <a:solidFill>
-            <a:schemeClr val="accent1"/>
-          </a:solidFill>
-          <a:ln/>
-        </p:spPr>
-      </p:sp>
-      <p:sp>
-        <p:nvSpPr>
-          <p:cNvPr id="7" name="Text 5"/>
-          <p:cNvSpPr txBox="1"/>
-          <p:nvPr/>
-        </p:nvSpPr>
-        <p:spPr>
-          <a:xfrm>
-            <a:off x="548640" y="2286000"/>
-            <a:ext cx="548640" cy="548640"/>
-          </a:xfrm>
-          <a:prstGeom prst="rect">
-            <a:avLst/>
-          </a:prstGeom>
-          <a:noFill/>
-          <a:ln/>
-        </p:spPr>
-        <p:txBody>
-          <a:bodyPr wrap="square" lIns="0" tIns="0" rIns="0" bIns="0" rtlCol="0" anchor="ctr"/>
-          <a:lstStyle/>
-          <a:p>
-            <a:pPr algn="ctr" indent="0" marL="0">
-              <a:buNone/>
-            </a:pPr>
-            <a:r>
-              <a:rPr lang="en-US" sz="1800" b="1" dirty="0">
-                <a:solidFill>
-                  <a:schemeClr val="bg1"/>
-                </a:solidFill>
-              </a:rPr>
-              <a:t>2</a:t>
-            </a:r>
-            <a:endParaRPr lang="en-US" sz="1800" dirty="0"/>
-          </a:p>
-        </p:txBody>
-      </p:sp>
-      <p:sp>
-        <p:nvSpPr>
-          <p:cNvPr id="8" name="Text 6"/>
-          <p:cNvSpPr txBox="1"/>
-          <p:nvPr/>
-        </p:nvSpPr>
-        <p:spPr>
-          <a:xfrm>
-            <a:off x="1325880" y="2286000"/>
-            <a:ext cx="4846320" cy="548640"/>
-          </a:xfrm>
-          <a:prstGeom prst="rect">
-            <a:avLst/>
-          </a:prstGeom>
-          <a:noFill/>
-          <a:ln/>
-        </p:spPr>
-        <p:txBody>
-          <a:bodyPr wrap="square" lIns="0" tIns="0" rIns="0" bIns="0" rtlCol="0" anchor="ctr"/>
-          <a:lstStyle/>
-          <a:p>
-            <a:pPr indent="0" marL="0">
-              <a:buNone/>
-            </a:pPr>
-            <a:r>
-              <a:rPr lang="en-US" sz="1600" dirty="0">
-                <a:solidFill>
-                  <a:schemeClr val="tx1"/>
-                </a:solidFill>
-              </a:rPr>
-              <a:t>Nustatyti tikslus ir esamas saugomas teritorijas</a:t>
-            </a:r>
-            <a:endParaRPr lang="en-US" sz="1600" dirty="0"/>
-          </a:p>
-        </p:txBody>
-      </p:sp>
-      <p:sp>
-        <p:nvSpPr>
-          <p:cNvPr id="9" name="wf-num-2"/>
-          <p:cNvSpPr/>
-          <p:nvPr/>
-        </p:nvSpPr>
-        <p:spPr>
-          <a:xfrm>
-            <a:off x="548640" y="3154680"/>
-            <a:ext cx="548640" cy="548640"/>
-          </a:xfrm>
-          <a:prstGeom prst="ellipse">
-            <a:avLst/>
-          </a:prstGeom>
-          <a:solidFill>
-            <a:schemeClr val="accent1"/>
-          </a:solidFill>
-          <a:ln/>
-        </p:spPr>
-      </p:sp>
-      <p:sp>
-        <p:nvSpPr>
-          <p:cNvPr id="10" name="Text 8"/>
-          <p:cNvSpPr txBox="1"/>
-          <p:nvPr/>
-        </p:nvSpPr>
-        <p:spPr>
-          <a:xfrm>
-            <a:off x="548640" y="3154680"/>
-            <a:ext cx="548640" cy="548640"/>
-          </a:xfrm>
-          <a:prstGeom prst="rect">
-            <a:avLst/>
-          </a:prstGeom>
-          <a:noFill/>
-          <a:ln/>
-        </p:spPr>
-        <p:txBody>
-          <a:bodyPr wrap="square" lIns="0" tIns="0" rIns="0" bIns="0" rtlCol="0" anchor="ctr"/>
-          <a:lstStyle/>
-          <a:p>
-            <a:pPr algn="ctr" indent="0" marL="0">
-              <a:buNone/>
-            </a:pPr>
-            <a:r>
-              <a:rPr lang="en-US" sz="1800" b="1" dirty="0">
-                <a:solidFill>
-                  <a:schemeClr val="bg1"/>
-                </a:solidFill>
-              </a:rPr>
-              <a:t>3</a:t>
-            </a:r>
-            <a:endParaRPr lang="en-US" sz="1800" dirty="0"/>
-          </a:p>
-        </p:txBody>
-      </p:sp>
-      <p:sp>
-        <p:nvSpPr>
-          <p:cNvPr id="11" name="Text 9"/>
-          <p:cNvSpPr txBox="1"/>
-          <p:nvPr/>
-        </p:nvSpPr>
-        <p:spPr>
-          <a:xfrm>
-            <a:off x="1325880" y="3154680"/>
-            <a:ext cx="4846320" cy="548640"/>
-          </a:xfrm>
-          <a:prstGeom prst="rect">
-            <a:avLst/>
-          </a:prstGeom>
-          <a:noFill/>
-          <a:ln/>
-        </p:spPr>
-        <p:txBody>
-          <a:bodyPr wrap="square" lIns="0" tIns="0" rIns="0" bIns="0" rtlCol="0" anchor="ctr"/>
-          <a:lstStyle/>
-          <a:p>
-            <a:pPr indent="0" marL="0">
-              <a:buNone/>
-            </a:pPr>
-            <a:r>
-              <a:rPr lang="en-US" sz="1600" dirty="0">
-                <a:solidFill>
-                  <a:schemeClr val="tx1"/>
-                </a:solidFill>
-              </a:rPr>
-              <a:t>Paleisti skaičiavimą internetinėje programoje</a:t>
-            </a:r>
-            <a:endParaRPr lang="en-US" sz="1600" dirty="0"/>
-          </a:p>
-        </p:txBody>
-      </p:sp>
-      <p:sp>
-        <p:nvSpPr>
-          <p:cNvPr id="12" name="wf-num-3"/>
-          <p:cNvSpPr/>
-          <p:nvPr/>
-        </p:nvSpPr>
-        <p:spPr>
-          <a:xfrm>
-            <a:off x="548640" y="4023360"/>
-            <a:ext cx="548640" cy="548640"/>
-          </a:xfrm>
-          <a:prstGeom prst="ellipse">
-            <a:avLst/>
-          </a:prstGeom>
-          <a:solidFill>
-            <a:schemeClr val="accent1"/>
-          </a:solidFill>
-          <a:ln/>
-        </p:spPr>
-      </p:sp>
-      <p:sp>
-        <p:nvSpPr>
-          <p:cNvPr id="13" name="Text 11"/>
-          <p:cNvSpPr txBox="1"/>
-          <p:nvPr/>
-        </p:nvSpPr>
-        <p:spPr>
-          <a:xfrm>
-            <a:off x="548640" y="4023360"/>
-            <a:ext cx="548640" cy="548640"/>
-          </a:xfrm>
-          <a:prstGeom prst="rect">
-            <a:avLst/>
-          </a:prstGeom>
-          <a:noFill/>
-          <a:ln/>
-        </p:spPr>
-        <p:txBody>
-          <a:bodyPr wrap="square" lIns="0" tIns="0" rIns="0" bIns="0" rtlCol="0" anchor="ctr"/>
-          <a:lstStyle/>
-          <a:p>
-            <a:pPr algn="ctr" indent="0" marL="0">
-              <a:buNone/>
-            </a:pPr>
-            <a:r>
-              <a:rPr lang="en-US" sz="1800" b="1" dirty="0">
-                <a:solidFill>
-                  <a:schemeClr val="bg1"/>
-                </a:solidFill>
-              </a:rPr>
-              <a:t>4</a:t>
-            </a:r>
-            <a:endParaRPr lang="en-US" sz="1800" dirty="0"/>
-          </a:p>
-        </p:txBody>
-      </p:sp>
-      <p:sp>
-        <p:nvSpPr>
-          <p:cNvPr id="14" name="Text 12"/>
-          <p:cNvSpPr txBox="1"/>
-          <p:nvPr/>
-        </p:nvSpPr>
-        <p:spPr>
-          <a:xfrm>
-            <a:off x="1325880" y="4023360"/>
-            <a:ext cx="4846320" cy="548640"/>
-          </a:xfrm>
-          <a:prstGeom prst="rect">
-            <a:avLst/>
-          </a:prstGeom>
-          <a:noFill/>
-          <a:ln/>
-        </p:spPr>
-        <p:txBody>
-          <a:bodyPr wrap="square" lIns="0" tIns="0" rIns="0" bIns="0" rtlCol="0" anchor="ctr"/>
-          <a:lstStyle/>
-          <a:p>
-            <a:pPr indent="0" marL="0">
-              <a:buNone/>
-            </a:pPr>
-            <a:r>
-              <a:rPr lang="en-US" sz="1600" dirty="0">
-                <a:solidFill>
-                  <a:schemeClr val="tx1"/>
-                </a:solidFill>
-              </a:rPr>
-              <a:t>Palyginti alternatyvas ir scenarijus</a:t>
-            </a:r>
-            <a:endParaRPr lang="en-US" sz="1600" dirty="0"/>
-          </a:p>
-        </p:txBody>
-      </p:sp>
-      <p:sp>
-        <p:nvSpPr>
-          <p:cNvPr id="15" name="wf-num-4"/>
-          <p:cNvSpPr/>
-          <p:nvPr/>
-        </p:nvSpPr>
-        <p:spPr>
-          <a:xfrm>
-            <a:off x="548640" y="4892040"/>
-            <a:ext cx="548640" cy="548640"/>
-          </a:xfrm>
-          <a:prstGeom prst="ellipse">
-            <a:avLst/>
-          </a:prstGeom>
-          <a:solidFill>
-            <a:schemeClr val="accent1"/>
-          </a:solidFill>
-          <a:ln/>
-        </p:spPr>
-      </p:sp>
-      <p:sp>
-        <p:nvSpPr>
-          <p:cNvPr id="16" name="Text 14"/>
-          <p:cNvSpPr txBox="1"/>
-          <p:nvPr/>
-        </p:nvSpPr>
-        <p:spPr>
-          <a:xfrm>
-            <a:off x="548640" y="4892040"/>
-            <a:ext cx="548640" cy="548640"/>
-          </a:xfrm>
-          <a:prstGeom prst="rect">
-            <a:avLst/>
-          </a:prstGeom>
-          <a:noFill/>
-          <a:ln/>
-        </p:spPr>
-        <p:txBody>
-          <a:bodyPr wrap="square" lIns="0" tIns="0" rIns="0" bIns="0" rtlCol="0" anchor="ctr"/>
-          <a:lstStyle/>
-          <a:p>
-            <a:pPr algn="ctr" indent="0" marL="0">
-              <a:buNone/>
-            </a:pPr>
-            <a:r>
-              <a:rPr lang="en-US" sz="1800" b="1" dirty="0">
-                <a:solidFill>
-                  <a:schemeClr val="bg1"/>
-                </a:solidFill>
-              </a:rPr>
-              <a:t>5</a:t>
-            </a:r>
-            <a:endParaRPr lang="en-US" sz="1800" dirty="0"/>
-          </a:p>
-        </p:txBody>
-      </p:sp>
-      <p:sp>
-        <p:nvSpPr>
-          <p:cNvPr id="17" name="Text 15"/>
-          <p:cNvSpPr txBox="1"/>
-          <p:nvPr/>
-        </p:nvSpPr>
-        <p:spPr>
-          <a:xfrm>
-            <a:off x="1325880" y="4892040"/>
-            <a:ext cx="4846320" cy="548640"/>
-          </a:xfrm>
-          <a:prstGeom prst="rect">
-            <a:avLst/>
-          </a:prstGeom>
-          <a:noFill/>
-          <a:ln/>
-        </p:spPr>
-        <p:txBody>
-          <a:bodyPr wrap="square" lIns="0" tIns="0" rIns="0" bIns="0" rtlCol="0" anchor="ctr"/>
-          <a:lstStyle/>
-          <a:p>
-            <a:pPr indent="0" marL="0">
-              <a:buNone/>
-            </a:pPr>
-            <a:r>
-              <a:rPr lang="en-US" sz="1600" dirty="0">
-                <a:solidFill>
-                  <a:schemeClr val="tx1"/>
-                </a:solidFill>
-              </a:rPr>
-              <a:t>Eksportuoti žemėlapius ir ataskaitas sprendimams</a:t>
-            </a:r>
-            <a:endParaRPr lang="en-US" sz="1600" dirty="0"/>
-          </a:p>
-        </p:txBody>
-      </p:sp>
-      <p:sp>
-        <p:nvSpPr>
-          <p:cNvPr id="18" name="Text 16"/>
-          <p:cNvSpPr txBox="1"/>
-          <p:nvPr/>
-        </p:nvSpPr>
-        <p:spPr>
-          <a:xfrm>
-            <a:off x="548640" y="5760720"/>
-            <a:ext cx="5669280" cy="457200"/>
-          </a:xfrm>
-          <a:prstGeom prst="rect">
-            <a:avLst/>
-          </a:prstGeom>
-          <a:noFill/>
-          <a:ln/>
-        </p:spPr>
-        <p:txBody>
-          <a:bodyPr wrap="square" lIns="0" tIns="0" rIns="0" bIns="0" rtlCol="0" anchor="t"/>
-          <a:lstStyle/>
-          <a:p>
-            <a:pPr indent="0" marL="0">
-              <a:buNone/>
-            </a:pPr>
-            <a:r>
-              <a:rPr lang="en-US" sz="1400" i="1" dirty="0">
-                <a:solidFill>
-                  <a:schemeClr val="tx2"/>
-                </a:solidFill>
-              </a:rPr>
-              <a:t>Analitikai tą patį gali atlikti Python skriptuose – pakartojamai ir dokumentuotai.</a:t>
-            </a:r>
-            <a:endParaRPr lang="en-US" sz="1400" dirty="0"/>
-          </a:p>
-        </p:txBody>
-      </p:sp>
-      <p:sp>
-        <p:nvSpPr>
-          <p:cNvPr id="19" name="app-frame"/>
-          <p:cNvSpPr/>
-          <p:nvPr/>
-        </p:nvSpPr>
-        <p:spPr>
-          <a:xfrm>
-            <a:off x="6583680" y="1280160"/>
-            <a:ext cx="5029200" cy="4892040"/>
-          </a:xfrm>
-          <a:prstGeom prst="roundRect">
-            <a:avLst>
-              <a:gd name="adj" fmla="val 2243"/>
-            </a:avLst>
-          </a:prstGeom>
-          <a:solidFill>
-            <a:schemeClr val="bg2"/>
-          </a:solidFill>
-          <a:ln/>
-        </p:spPr>
       </p:sp>
       <p:pic>
         <p:nvPicPr>
-          <p:cNvPr id="20" name="app-screenshot" descr="/home/razinka/marxan/docs/presentations/2026-10-20-saugomos-teritorijos/rivers_tab_crop.png">    </p:cNvPr>
+          <p:cNvPr id="3" name="river-map" descr="/home/razinka/marxan/docs/presentations/2026-10-20-saugomos-teritorijos/river_network_optimization_lt.png">    </p:cNvPr>
           <p:cNvPicPr>
             <a:picLocks noChangeAspect="1"/>
           </p:cNvPicPr>
@@ -12869,14 +15729,132 @@
         </p:blipFill>
         <p:spPr>
           <a:xfrm>
-            <a:off x="7334504" y="1444752"/>
-            <a:ext cx="3527552" cy="4572000"/>
+            <a:off x="548640" y="1325880"/>
+            <a:ext cx="6766560" cy="3865856"/>
           </a:xfrm>
           <a:prstGeom prst="rect">
             <a:avLst/>
           </a:prstGeom>
         </p:spPr>
       </p:pic>
+      <p:pic>
+        <p:nvPicPr>
+          <p:cNvPr id="4" name="dci-frontier" descr="/home/razinka/marxan/docs/presentations/2026-10-20-saugomos-teritorijos/dci_budget_frontier_lt.png">    </p:cNvPr>
+          <p:cNvPicPr>
+            <a:picLocks noChangeAspect="1"/>
+          </p:cNvPicPr>
+          <p:nvPr/>
+        </p:nvPicPr>
+        <p:blipFill>
+          <a:blip r:embed="rId2"/>
+          <a:stretch>
+            <a:fillRect/>
+          </a:stretch>
+        </p:blipFill>
+        <p:spPr>
+          <a:xfrm>
+            <a:off x="7680960" y="1325880"/>
+            <a:ext cx="3931920" cy="2429885"/>
+          </a:xfrm>
+          <a:prstGeom prst="rect">
+            <a:avLst/>
+          </a:prstGeom>
+        </p:spPr>
+      </p:pic>
+      <p:sp>
+        <p:nvSpPr>
+          <p:cNvPr id="5" name="Text 1"/>
+          <p:cNvSpPr txBox="1"/>
+          <p:nvPr/>
+        </p:nvSpPr>
+        <p:spPr>
+          <a:xfrm>
+            <a:off x="7680960" y="3931920"/>
+            <a:ext cx="3931920" cy="2194560"/>
+          </a:xfrm>
+          <a:prstGeom prst="rect">
+            <a:avLst/>
+          </a:prstGeom>
+          <a:noFill/>
+          <a:ln/>
+        </p:spPr>
+        <p:txBody>
+          <a:bodyPr wrap="square" lIns="0" tIns="0" rIns="0" bIns="0" rtlCol="0" anchor="t"/>
+          <a:lstStyle/>
+          <a:p>
+            <a:pPr marL="342900" indent="-342900">
+              <a:spcAft>
+                <a:spcPts val="600"/>
+              </a:spcAft>
+              <a:buSzPct val="100000"/>
+              <a:buChar char="•"/>
+            </a:pPr>
+            <a:r>
+              <a:rPr lang="en-US" sz="1400" dirty="0">
+                <a:solidFill>
+                  <a:schemeClr val="tx1"/>
+                </a:solidFill>
+              </a:rPr>
+              <a:t>Žuvų migracijai svarbus upių tinklo jungtumas (DCI indeksas)</a:t>
+            </a:r>
+            <a:endParaRPr lang="en-US" sz="1400" dirty="0"/>
+          </a:p>
+          <a:p>
+            <a:pPr marL="342900" indent="-342900">
+              <a:spcAft>
+                <a:spcPts val="600"/>
+              </a:spcAft>
+              <a:buSzPct val="100000"/>
+              <a:buChar char="•"/>
+            </a:pPr>
+            <a:r>
+              <a:rPr lang="en-US" sz="1400" dirty="0">
+                <a:solidFill>
+                  <a:schemeClr val="tx1"/>
+                </a:solidFill>
+              </a:rPr>
+              <a:t>Optimalus barjerų rinkinys už turimą biudžetą</a:t>
+            </a:r>
+            <a:endParaRPr lang="en-US" sz="1400" dirty="0"/>
+          </a:p>
+          <a:p>
+            <a:pPr marL="342900" indent="-342900">
+              <a:spcAft>
+                <a:spcPts val="600"/>
+              </a:spcAft>
+              <a:buSzPct val="100000"/>
+              <a:buChar char="•"/>
+            </a:pPr>
+            <a:r>
+              <a:rPr lang="en-US" sz="1400" dirty="0">
+                <a:solidFill>
+                  <a:schemeClr val="tx1"/>
+                </a:solidFill>
+              </a:rPr>
+              <a:t>Kreivė rodo, kiek jungtumo nuperka kiekvienas papildomas euras</a:t>
+            </a:r>
+            <a:endParaRPr lang="en-US" sz="1400" dirty="0"/>
+          </a:p>
+          <a:p>
+            <a:pPr marL="342900" indent="-342900">
+              <a:spcAft>
+                <a:spcPts val="600"/>
+              </a:spcAft>
+              <a:buSzPct val="100000"/>
+              <a:buChar char="•"/>
+            </a:pPr>
+            <a:r>
+              <a:rPr lang="en-US" sz="1400" dirty="0">
+                <a:solidFill>
+                  <a:schemeClr val="tx1"/>
+                </a:solidFill>
+              </a:rPr>
+              <a:t>Įkeliami HydroRIVERS ar nacionaliniai upių duomenys</a:t>
+            </a:r>
+            <a:endParaRPr lang="en-US" sz="1400" dirty="0"/>
+          </a:p>
+        </p:txBody>
+      </p:sp>
       <p:sp>
         <p:nvSpPr>
           <p:cNvPr id="25" name="Slide Number Placeholder 0"/>
